--- a/docs/PetStore_Demo_45min.pptx
+++ b/docs/PetStore_Demo_45min.pptx
@@ -23,6 +23,7 @@
     <p:sldId id="271" r:id="rId22"/>
     <p:sldId id="272" r:id="rId23"/>
     <p:sldId id="273" r:id="rId24"/>
+    <p:sldId id="274" r:id="rId25"/>
   </p:sldIdLst>
   <p:sldSz cx="12191695" cy="6858000" type="screen4x3"/>
   <p:notesSz cx="6858000" cy="9144000"/>
@@ -3450,7 +3451,7 @@
                 </a:solidFill>
                 <a:latin typeface="Calibri"/>
               </a:rPr>
-              <a:t>3 min</a:t>
+              <a:t>4 min</a:t>
             </a:r>
           </a:p>
         </p:txBody>
@@ -3485,7 +3486,7 @@
                 </a:solidFill>
                 <a:latin typeface="Calibri"/>
               </a:rPr>
-              <a:t>Target Architecture — As-Built</a:t>
+              <a:t>What We Fixed — Parity Audit</a:t>
             </a:r>
           </a:p>
         </p:txBody>
@@ -3520,35 +3521,725 @@
                 </a:solidFill>
                 <a:latin typeface="Calibri"/>
               </a:rPr>
-              <a:t>8 Spring Boot services · standalone Artemis · 2 queues + 3 topics + DLQ · 5 client SDKs</a:t>
-            </a:r>
-          </a:p>
-        </p:txBody>
-      </p:sp>
-      <p:pic>
-        <p:nvPicPr>
-          <p:cNvPr id="7" name="Picture 6" descr="petstore_architecture.png"/>
-          <p:cNvPicPr>
-            <a:picLocks noChangeAspect="1"/>
-          </p:cNvPicPr>
-          <p:nvPr/>
-        </p:nvPicPr>
-        <p:blipFill>
-          <a:blip r:embed="rId2"/>
-          <a:stretch>
-            <a:fillRect/>
-          </a:stretch>
-        </p:blipFill>
-        <p:spPr>
-          <a:xfrm>
-            <a:off x="1512838" y="1170432"/>
-            <a:ext cx="9166018" cy="5394960"/>
-          </a:xfrm>
-          <a:prstGeom prst="rect">
-            <a:avLst/>
-          </a:prstGeom>
-        </p:spPr>
-      </p:pic>
+              <a:t>File-by-file legacy vs migrated · 21 gaps found, all resolved</a:t>
+            </a:r>
+          </a:p>
+        </p:txBody>
+      </p:sp>
+      <p:graphicFrame>
+        <p:nvGraphicFramePr>
+          <p:cNvPr id="7" name="Table 6"/>
+          <p:cNvGraphicFramePr>
+            <a:graphicFrameLocks noGrp="1"/>
+          </p:cNvGraphicFramePr>
+          <p:nvPr/>
+        </p:nvGraphicFramePr>
+        <p:xfrm>
+          <a:off x="320040" y="1207008"/>
+          <a:ext cx="11567160" cy="4160520"/>
+        </p:xfrm>
+        <a:graphic>
+          <a:graphicData uri="http://schemas.openxmlformats.org/drawingml/2006/table">
+            <a:tbl>
+              <a:tblPr firstRow="1" bandRow="1">
+                <a:tableStyleId>{5C22544A-7EE6-4342-B048-85BDC9FD1C3A}</a:tableStyleId>
+              </a:tblPr>
+              <a:tblGrid>
+                <a:gridCol w="1005840"/>
+                <a:gridCol w="5623560"/>
+                <a:gridCol w="4937760"/>
+              </a:tblGrid>
+              <a:tr h="520065">
+                <a:tc>
+                  <a:txBody>
+                    <a:bodyPr/>
+                    <a:lstStyle/>
+                    <a:p>
+                      <a:pPr>
+                        <a:defRPr sz="1050" b="1">
+                          <a:solidFill>
+                            <a:srgbClr val="FFFFFF"/>
+                          </a:solidFill>
+                          <a:latin typeface="Calibri"/>
+                        </a:defRPr>
+                      </a:pPr>
+                      <a:r>
+                        <a:t>#</a:t>
+                      </a:r>
+                    </a:p>
+                  </a:txBody>
+                  <a:tcPr anchor="ctr" marT="25400" marB="25400" marL="63500" marR="63500">
+                    <a:solidFill>
+                      <a:srgbClr val="1F3355"/>
+                    </a:solidFill>
+                  </a:tcPr>
+                </a:tc>
+                <a:tc>
+                  <a:txBody>
+                    <a:bodyPr/>
+                    <a:lstStyle/>
+                    <a:p>
+                      <a:pPr>
+                        <a:defRPr sz="1050" b="1">
+                          <a:solidFill>
+                            <a:srgbClr val="FFFFFF"/>
+                          </a:solidFill>
+                          <a:latin typeface="Calibri"/>
+                        </a:defRPr>
+                      </a:pPr>
+                      <a:r>
+                        <a:t>Gap the audit found</a:t>
+                      </a:r>
+                    </a:p>
+                  </a:txBody>
+                  <a:tcPr anchor="ctr" marT="25400" marB="25400" marL="63500" marR="63500">
+                    <a:solidFill>
+                      <a:srgbClr val="1F3355"/>
+                    </a:solidFill>
+                  </a:tcPr>
+                </a:tc>
+                <a:tc>
+                  <a:txBody>
+                    <a:bodyPr/>
+                    <a:lstStyle/>
+                    <a:p>
+                      <a:pPr>
+                        <a:defRPr sz="1050" b="1">
+                          <a:solidFill>
+                            <a:srgbClr val="FFFFFF"/>
+                          </a:solidFill>
+                          <a:latin typeface="Calibri"/>
+                        </a:defRPr>
+                      </a:pPr>
+                      <a:r>
+                        <a:t>Resolution</a:t>
+                      </a:r>
+                    </a:p>
+                  </a:txBody>
+                  <a:tcPr anchor="ctr" marT="25400" marB="25400" marL="63500" marR="63500">
+                    <a:solidFill>
+                      <a:srgbClr val="1F3355"/>
+                    </a:solidFill>
+                  </a:tcPr>
+                </a:tc>
+              </a:tr>
+              <a:tr h="520065">
+                <a:tc>
+                  <a:txBody>
+                    <a:bodyPr/>
+                    <a:lstStyle/>
+                    <a:p>
+                      <a:pPr>
+                        <a:defRPr sz="1050">
+                          <a:solidFill>
+                            <a:srgbClr val="1F3355"/>
+                          </a:solidFill>
+                          <a:latin typeface="Calibri"/>
+                        </a:defRPr>
+                      </a:pPr>
+                      <a:r>
+                        <a:t>H2</a:t>
+                      </a:r>
+                    </a:p>
+                  </a:txBody>
+                  <a:tcPr anchor="ctr" marT="25400" marB="25400" marL="63500" marR="63500">
+                    <a:solidFill>
+                      <a:srgbClr val="FFFFFF"/>
+                    </a:solidFill>
+                  </a:tcPr>
+                </a:tc>
+                <a:tc>
+                  <a:txBody>
+                    <a:bodyPr/>
+                    <a:lstStyle/>
+                    <a:p>
+                      <a:pPr>
+                        <a:defRPr sz="1050">
+                          <a:solidFill>
+                            <a:srgbClr val="1F3355"/>
+                          </a:solidFill>
+                          <a:latin typeface="Calibri"/>
+                        </a:defRPr>
+                      </a:pPr>
+                      <a:r>
+                        <a:t>Backorder retry-on-restock dropped</a:t>
+                      </a:r>
+                    </a:p>
+                  </a:txBody>
+                  <a:tcPr anchor="ctr" marT="25400" marB="25400" marL="63500" marR="63500">
+                    <a:solidFill>
+                      <a:srgbClr val="FFFFFF"/>
+                    </a:solidFill>
+                  </a:tcPr>
+                </a:tc>
+                <a:tc>
+                  <a:txBody>
+                    <a:bodyPr/>
+                    <a:lstStyle/>
+                    <a:p>
+                      <a:pPr>
+                        <a:defRPr sz="1050">
+                          <a:solidFill>
+                            <a:srgbClr val="1F3355"/>
+                          </a:solidFill>
+                          <a:latin typeface="Calibri"/>
+                        </a:defRPr>
+                      </a:pPr>
+                      <a:r>
+                        <a:t>RESTORED event-driven: RestockEvent → OPC re-drives APPROVED backorders</a:t>
+                      </a:r>
+                    </a:p>
+                  </a:txBody>
+                  <a:tcPr anchor="ctr" marT="25400" marB="25400" marL="63500" marR="63500">
+                    <a:solidFill>
+                      <a:srgbClr val="FFFFFF"/>
+                    </a:solidFill>
+                  </a:tcPr>
+                </a:tc>
+              </a:tr>
+              <a:tr h="520065">
+                <a:tc>
+                  <a:txBody>
+                    <a:bodyPr/>
+                    <a:lstStyle/>
+                    <a:p>
+                      <a:pPr>
+                        <a:defRPr sz="1050">
+                          <a:solidFill>
+                            <a:srgbClr val="1F3355"/>
+                          </a:solidFill>
+                          <a:latin typeface="Calibri"/>
+                        </a:defRPr>
+                      </a:pPr>
+                      <a:r>
+                        <a:t>H3/H4</a:t>
+                      </a:r>
+                    </a:p>
+                  </a:txBody>
+                  <a:tcPr anchor="ctr" marT="25400" marB="25400" marL="63500" marR="63500">
+                    <a:solidFill>
+                      <a:srgbClr val="F2F4F7"/>
+                    </a:solidFill>
+                  </a:tcPr>
+                </a:tc>
+                <a:tc>
+                  <a:txBody>
+                    <a:bodyPr/>
+                    <a:lstStyle/>
+                    <a:p>
+                      <a:pPr>
+                        <a:defRPr sz="1050">
+                          <a:solidFill>
+                            <a:srgbClr val="1F3355"/>
+                          </a:solidFill>
+                          <a:latin typeface="Calibri"/>
+                        </a:defRPr>
+                      </a:pPr>
+                      <a:r>
+                        <a:t>Approval / denial / COMPLETED emails missing</a:t>
+                      </a:r>
+                    </a:p>
+                  </a:txBody>
+                  <a:tcPr anchor="ctr" marT="25400" marB="25400" marL="63500" marR="63500">
+                    <a:solidFill>
+                      <a:srgbClr val="F2F4F7"/>
+                    </a:solidFill>
+                  </a:tcPr>
+                </a:tc>
+                <a:tc>
+                  <a:txBody>
+                    <a:bodyPr/>
+                    <a:lstStyle/>
+                    <a:p>
+                      <a:pPr>
+                        <a:defRPr sz="1050">
+                          <a:solidFill>
+                            <a:srgbClr val="1F3355"/>
+                          </a:solidFill>
+                          <a:latin typeface="Calibri"/>
+                        </a:defRPr>
+                      </a:pPr>
+                      <a:r>
+                        <a:t>OrderStatusTopic → notification-service emails restored</a:t>
+                      </a:r>
+                    </a:p>
+                  </a:txBody>
+                  <a:tcPr anchor="ctr" marT="25400" marB="25400" marL="63500" marR="63500">
+                    <a:solidFill>
+                      <a:srgbClr val="F2F4F7"/>
+                    </a:solidFill>
+                  </a:tcPr>
+                </a:tc>
+              </a:tr>
+              <a:tr h="520065">
+                <a:tc>
+                  <a:txBody>
+                    <a:bodyPr/>
+                    <a:lstStyle/>
+                    <a:p>
+                      <a:pPr>
+                        <a:defRPr sz="1050">
+                          <a:solidFill>
+                            <a:srgbClr val="1F3355"/>
+                          </a:solidFill>
+                          <a:latin typeface="Calibri"/>
+                        </a:defRPr>
+                      </a:pPr>
+                      <a:r>
+                        <a:t>H5</a:t>
+                      </a:r>
+                    </a:p>
+                  </a:txBody>
+                  <a:tcPr anchor="ctr" marT="25400" marB="25400" marL="63500" marR="63500">
+                    <a:solidFill>
+                      <a:srgbClr val="FFFFFF"/>
+                    </a:solidFill>
+                  </a:tcPr>
+                </a:tc>
+                <a:tc>
+                  <a:txBody>
+                    <a:bodyPr/>
+                    <a:lstStyle/>
+                    <a:p>
+                      <a:pPr>
+                        <a:defRPr sz="1050">
+                          <a:solidFill>
+                            <a:srgbClr val="1F3355"/>
+                          </a:solidFill>
+                          <a:latin typeface="Calibri"/>
+                        </a:defRPr>
+                      </a:pPr>
+                      <a:r>
+                        <a:t>Sales/revenue aggregation gone</a:t>
+                      </a:r>
+                    </a:p>
+                  </a:txBody>
+                  <a:tcPr anchor="ctr" marT="25400" marB="25400" marL="63500" marR="63500">
+                    <a:solidFill>
+                      <a:srgbClr val="FFFFFF"/>
+                    </a:solidFill>
+                  </a:tcPr>
+                </a:tc>
+                <a:tc>
+                  <a:txBody>
+                    <a:bodyPr/>
+                    <a:lstStyle/>
+                    <a:p>
+                      <a:pPr>
+                        <a:defRPr sz="1050">
+                          <a:solidFill>
+                            <a:srgbClr val="1F3355"/>
+                          </a:solidFill>
+                          <a:latin typeface="Calibri"/>
+                        </a:defRPr>
+                      </a:pPr>
+                      <a:r>
+                        <a:t>OPC aggregateSales() + GET /api/sales; admin delegates</a:t>
+                      </a:r>
+                    </a:p>
+                  </a:txBody>
+                  <a:tcPr anchor="ctr" marT="25400" marB="25400" marL="63500" marR="63500">
+                    <a:solidFill>
+                      <a:srgbClr val="FFFFFF"/>
+                    </a:solidFill>
+                  </a:tcPr>
+                </a:tc>
+              </a:tr>
+              <a:tr h="520065">
+                <a:tc>
+                  <a:txBody>
+                    <a:bodyPr/>
+                    <a:lstStyle/>
+                    <a:p>
+                      <a:pPr>
+                        <a:defRPr sz="1050">
+                          <a:solidFill>
+                            <a:srgbClr val="1F3355"/>
+                          </a:solidFill>
+                          <a:latin typeface="Calibri"/>
+                        </a:defRPr>
+                      </a:pPr>
+                      <a:r>
+                        <a:t>H6</a:t>
+                      </a:r>
+                    </a:p>
+                  </a:txBody>
+                  <a:tcPr anchor="ctr" marT="25400" marB="25400" marL="63500" marR="63500">
+                    <a:solidFill>
+                      <a:srgbClr val="F2F4F7"/>
+                    </a:solidFill>
+                  </a:tcPr>
+                </a:tc>
+                <a:tc>
+                  <a:txBody>
+                    <a:bodyPr/>
+                    <a:lstStyle/>
+                    <a:p>
+                      <a:pPr>
+                        <a:defRPr sz="1050">
+                          <a:solidFill>
+                            <a:srgbClr val="1F3355"/>
+                          </a:solidFill>
+                          <a:latin typeface="Calibri"/>
+                        </a:defRPr>
+                      </a:pPr>
+                      <a:r>
+                        <a:t>Catalog search semantics changed</a:t>
+                      </a:r>
+                    </a:p>
+                  </a:txBody>
+                  <a:tcPr anchor="ctr" marT="25400" marB="25400" marL="63500" marR="63500">
+                    <a:solidFill>
+                      <a:srgbClr val="F2F4F7"/>
+                    </a:solidFill>
+                  </a:tcPr>
+                </a:tc>
+                <a:tc>
+                  <a:txBody>
+                    <a:bodyPr/>
+                    <a:lstStyle/>
+                    <a:p>
+                      <a:pPr>
+                        <a:defRPr sz="1050">
+                          <a:solidFill>
+                            <a:srgbClr val="1F3355"/>
+                          </a:solidFill>
+                          <a:latin typeface="Calibri"/>
+                        </a:defRPr>
+                      </a:pPr>
+                      <a:r>
+                        <a:t>Restored tokenized multi-field LIKE search</a:t>
+                      </a:r>
+                    </a:p>
+                  </a:txBody>
+                  <a:tcPr anchor="ctr" marT="25400" marB="25400" marL="63500" marR="63500">
+                    <a:solidFill>
+                      <a:srgbClr val="F2F4F7"/>
+                    </a:solidFill>
+                  </a:tcPr>
+                </a:tc>
+              </a:tr>
+              <a:tr h="520065">
+                <a:tc>
+                  <a:txBody>
+                    <a:bodyPr/>
+                    <a:lstStyle/>
+                    <a:p>
+                      <a:pPr>
+                        <a:defRPr sz="1050">
+                          <a:solidFill>
+                            <a:srgbClr val="1F3355"/>
+                          </a:solidFill>
+                          <a:latin typeface="Calibri"/>
+                        </a:defRPr>
+                      </a:pPr>
+                      <a:r>
+                        <a:t>H7</a:t>
+                      </a:r>
+                    </a:p>
+                  </a:txBody>
+                  <a:tcPr anchor="ctr" marT="25400" marB="25400" marL="63500" marR="63500">
+                    <a:solidFill>
+                      <a:srgbClr val="FFFFFF"/>
+                    </a:solidFill>
+                  </a:tcPr>
+                </a:tc>
+                <a:tc>
+                  <a:txBody>
+                    <a:bodyPr/>
+                    <a:lstStyle/>
+                    <a:p>
+                      <a:pPr>
+                        <a:defRPr sz="1050">
+                          <a:solidFill>
+                            <a:srgbClr val="1F3355"/>
+                          </a:solidFill>
+                          <a:latin typeface="Calibri"/>
+                        </a:defRPr>
+                      </a:pPr>
+                      <a:r>
+                        <a:t>Ship/bill address collection + validation lost</a:t>
+                      </a:r>
+                    </a:p>
+                  </a:txBody>
+                  <a:tcPr anchor="ctr" marT="25400" marB="25400" marL="63500" marR="63500">
+                    <a:solidFill>
+                      <a:srgbClr val="FFFFFF"/>
+                    </a:solidFill>
+                  </a:tcPr>
+                </a:tc>
+                <a:tc>
+                  <a:txBody>
+                    <a:bodyPr/>
+                    <a:lstStyle/>
+                    <a:p>
+                      <a:pPr>
+                        <a:defRPr sz="1050">
+                          <a:solidFill>
+                            <a:srgbClr val="1F3355"/>
+                          </a:solidFill>
+                          <a:latin typeface="Calibri"/>
+                        </a:defRPr>
+                      </a:pPr>
+                      <a:r>
+                        <a:t>Both addresses collected + validated; persisted on order</a:t>
+                      </a:r>
+                    </a:p>
+                  </a:txBody>
+                  <a:tcPr anchor="ctr" marT="25400" marB="25400" marL="63500" marR="63500">
+                    <a:solidFill>
+                      <a:srgbClr val="FFFFFF"/>
+                    </a:solidFill>
+                  </a:tcPr>
+                </a:tc>
+              </a:tr>
+              <a:tr h="520065">
+                <a:tc>
+                  <a:txBody>
+                    <a:bodyPr/>
+                    <a:lstStyle/>
+                    <a:p>
+                      <a:pPr>
+                        <a:defRPr sz="1050">
+                          <a:solidFill>
+                            <a:srgbClr val="1F3355"/>
+                          </a:solidFill>
+                          <a:latin typeface="Calibri"/>
+                        </a:defRPr>
+                      </a:pPr>
+                      <a:r>
+                        <a:t>H8/H9</a:t>
+                      </a:r>
+                    </a:p>
+                  </a:txBody>
+                  <a:tcPr anchor="ctr" marT="25400" marB="25400" marL="63500" marR="63500">
+                    <a:solidFill>
+                      <a:srgbClr val="F2F4F7"/>
+                    </a:solidFill>
+                  </a:tcPr>
+                </a:tc>
+                <a:tc>
+                  <a:txBody>
+                    <a:bodyPr/>
+                    <a:lstStyle/>
+                    <a:p>
+                      <a:pPr>
+                        <a:defRPr sz="1050">
+                          <a:solidFill>
+                            <a:srgbClr val="1F3355"/>
+                          </a:solidFill>
+                          <a:latin typeface="Calibri"/>
+                        </a:defRPr>
+                      </a:pPr>
+                      <a:r>
+                        <a:t>New-customer profile defaults + sign-on locale</a:t>
+                      </a:r>
+                    </a:p>
+                  </a:txBody>
+                  <a:tcPr anchor="ctr" marT="25400" marB="25400" marL="63500" marR="63500">
+                    <a:solidFill>
+                      <a:srgbClr val="F2F4F7"/>
+                    </a:solidFill>
+                  </a:tcPr>
+                </a:tc>
+                <a:tc>
+                  <a:txBody>
+                    <a:bodyPr/>
+                    <a:lstStyle/>
+                    <a:p>
+                      <a:pPr>
+                        <a:defRPr sz="1050">
+                          <a:solidFill>
+                            <a:srgbClr val="1F3355"/>
+                          </a:solidFill>
+                          <a:latin typeface="Calibri"/>
+                        </a:defRPr>
+                      </a:pPr>
+                      <a:r>
+                        <a:t>Legacy defaults restored; preferredLanguage applied on login</a:t>
+                      </a:r>
+                    </a:p>
+                  </a:txBody>
+                  <a:tcPr anchor="ctr" marT="25400" marB="25400" marL="63500" marR="63500">
+                    <a:solidFill>
+                      <a:srgbClr val="F2F4F7"/>
+                    </a:solidFill>
+                  </a:tcPr>
+                </a:tc>
+              </a:tr>
+              <a:tr h="520065">
+                <a:tc>
+                  <a:txBody>
+                    <a:bodyPr/>
+                    <a:lstStyle/>
+                    <a:p>
+                      <a:pPr>
+                        <a:defRPr sz="1050">
+                          <a:solidFill>
+                            <a:srgbClr val="1F3355"/>
+                          </a:solidFill>
+                          <a:latin typeface="Calibri"/>
+                        </a:defRPr>
+                      </a:pPr>
+                      <a:r>
+                        <a:t>M1–M7</a:t>
+                      </a:r>
+                    </a:p>
+                  </a:txBody>
+                  <a:tcPr anchor="ctr" marT="25400" marB="25400" marL="63500" marR="63500">
+                    <a:solidFill>
+                      <a:srgbClr val="FFFFFF"/>
+                    </a:solidFill>
+                  </a:tcPr>
+                </a:tc>
+                <a:tc>
+                  <a:txBody>
+                    <a:bodyPr/>
+                    <a:lstStyle/>
+                    <a:p>
+                      <a:pPr>
+                        <a:defRPr sz="1050">
+                          <a:solidFill>
+                            <a:srgbClr val="1F3355"/>
+                          </a:solidFill>
+                          <a:latin typeface="Calibri"/>
+                        </a:defRPr>
+                      </a:pPr>
+                      <a:r>
+                        <a:t>Ordering, getItem.category, batch approval, etc.</a:t>
+                      </a:r>
+                    </a:p>
+                  </a:txBody>
+                  <a:tcPr anchor="ctr" marT="25400" marB="25400" marL="63500" marR="63500">
+                    <a:solidFill>
+                      <a:srgbClr val="FFFFFF"/>
+                    </a:solidFill>
+                  </a:tcPr>
+                </a:tc>
+                <a:tc>
+                  <a:txBody>
+                    <a:bodyPr/>
+                    <a:lstStyle/>
+                    <a:p>
+                      <a:pPr>
+                        <a:defRPr sz="1050">
+                          <a:solidFill>
+                            <a:srgbClr val="1F3355"/>
+                          </a:solidFill>
+                          <a:latin typeface="Calibri"/>
+                        </a:defRPr>
+                      </a:pPr>
+                      <a:r>
+                        <a:t>All restored (see PARITY_AUDIT.md)</a:t>
+                      </a:r>
+                    </a:p>
+                  </a:txBody>
+                  <a:tcPr anchor="ctr" marT="25400" marB="25400" marL="63500" marR="63500">
+                    <a:solidFill>
+                      <a:srgbClr val="FFFFFF"/>
+                    </a:solidFill>
+                  </a:tcPr>
+                </a:tc>
+              </a:tr>
+            </a:tbl>
+          </a:graphicData>
+        </a:graphic>
+      </p:graphicFrame>
+      <p:sp>
+        <p:nvSpPr>
+          <p:cNvPr id="8" name="Rectangle 7"/>
+          <p:cNvSpPr/>
+          <p:nvPr/>
+        </p:nvSpPr>
+        <p:spPr>
+          <a:xfrm>
+            <a:off x="320040" y="5532120"/>
+            <a:ext cx="11567160" cy="960120"/>
+          </a:xfrm>
+          <a:prstGeom prst="rect">
+            <a:avLst/>
+          </a:prstGeom>
+          <a:solidFill>
+            <a:srgbClr val="F2F4F7"/>
+          </a:solidFill>
+          <a:ln>
+            <a:noFill/>
+          </a:ln>
+          <a:effectLst/>
+        </p:spPr>
+        <p:style>
+          <a:lnRef idx="1">
+            <a:schemeClr val="accent1"/>
+          </a:lnRef>
+          <a:fillRef idx="3">
+            <a:schemeClr val="accent1"/>
+          </a:fillRef>
+          <a:effectRef idx="2">
+            <a:schemeClr val="accent1"/>
+          </a:effectRef>
+          <a:fontRef idx="minor">
+            <a:schemeClr val="lt1"/>
+          </a:fontRef>
+        </p:style>
+        <p:txBody>
+          <a:bodyPr rtlCol="0" anchor="ctr"/>
+          <a:lstStyle/>
+          <a:p>
+            <a:pPr algn="ctr"/>
+          </a:p>
+        </p:txBody>
+      </p:sp>
+      <p:sp>
+        <p:nvSpPr>
+          <p:cNvPr id="9" name="TextBox 8"/>
+          <p:cNvSpPr txBox="1"/>
+          <p:nvPr/>
+        </p:nvSpPr>
+        <p:spPr>
+          <a:xfrm>
+            <a:off x="502920" y="5623560"/>
+            <a:ext cx="11155680" cy="822960"/>
+          </a:xfrm>
+          <a:prstGeom prst="rect">
+            <a:avLst/>
+          </a:prstGeom>
+          <a:noFill/>
+        </p:spPr>
+        <p:txBody>
+          <a:bodyPr wrap="square" anchor="t">
+            <a:spAutoFit/>
+          </a:bodyPr>
+          <a:lstStyle/>
+          <a:p>
+            <a:pPr algn="l">
+              <a:spcAft>
+                <a:spcPts val="300"/>
+              </a:spcAft>
+            </a:pPr>
+            <a:r>
+              <a:rPr sz="1300" b="1">
+                <a:solidFill>
+                  <a:srgbClr val="1F3355"/>
+                </a:solidFill>
+                <a:latin typeface="Calibri"/>
+              </a:rPr>
+              <a:t>Kept intentional (recorded in DECISIONS.md): H1 all-or-nothing fulfilment · M8 no persisted supplier PO.</a:t>
+            </a:r>
+          </a:p>
+          <a:p>
+            <a:pPr algn="l"/>
+            <a:r>
+              <a:rPr sz="1200" b="0">
+                <a:solidFill>
+                  <a:srgbClr val="B23A48"/>
+                </a:solidFill>
+                <a:latin typeface="Calibri"/>
+              </a:rPr>
+              <a:t>Two bugs caught by LIVE end-to-end testing (not unit tests): large orders auto-shipped without approval; approve→fulfil race (published before commit). Both fixed + regression-tested.</a:t>
+            </a:r>
+          </a:p>
+        </p:txBody>
+      </p:sp>
     </p:spTree>
   </p:cSld>
   <p:clrMapOvr>
@@ -3576,7 +4267,7 @@
         <p:spPr>
           <a:xfrm>
             <a:off x="0" y="0"/>
-            <a:ext cx="12191695" cy="6858000"/>
+            <a:ext cx="12191695" cy="1051560"/>
           </a:xfrm>
           <a:prstGeom prst="rect">
             <a:avLst/>
@@ -3619,8 +4310,8 @@
         </p:nvSpPr>
         <p:spPr>
           <a:xfrm>
-            <a:off x="0" y="3200400"/>
-            <a:ext cx="12191695" cy="54864"/>
+            <a:off x="10378440" y="274320"/>
+            <a:ext cx="1600200" cy="502920"/>
           </a:xfrm>
           <a:prstGeom prst="rect">
             <a:avLst/>
@@ -3663,8 +4354,78 @@
         </p:nvSpPr>
         <p:spPr>
           <a:xfrm>
-            <a:off x="731520" y="2286000"/>
-            <a:ext cx="10698480" cy="914400"/>
+            <a:off x="10378440" y="274320"/>
+            <a:ext cx="1600200" cy="502920"/>
+          </a:xfrm>
+          <a:prstGeom prst="rect">
+            <a:avLst/>
+          </a:prstGeom>
+          <a:noFill/>
+        </p:spPr>
+        <p:txBody>
+          <a:bodyPr wrap="square" anchor="ctr">
+            <a:spAutoFit/>
+          </a:bodyPr>
+          <a:lstStyle/>
+          <a:p>
+            <a:pPr algn="ctr"/>
+            <a:r>
+              <a:rPr sz="1300" b="1">
+                <a:solidFill>
+                  <a:srgbClr val="FFFFFF"/>
+                </a:solidFill>
+                <a:latin typeface="Calibri"/>
+              </a:rPr>
+              <a:t>3 min</a:t>
+            </a:r>
+          </a:p>
+        </p:txBody>
+      </p:sp>
+      <p:sp>
+        <p:nvSpPr>
+          <p:cNvPr id="5" name="TextBox 4"/>
+          <p:cNvSpPr txBox="1"/>
+          <p:nvPr/>
+        </p:nvSpPr>
+        <p:spPr>
+          <a:xfrm>
+            <a:off x="457200" y="109728"/>
+            <a:ext cx="9784080" cy="640080"/>
+          </a:xfrm>
+          <a:prstGeom prst="rect">
+            <a:avLst/>
+          </a:prstGeom>
+          <a:noFill/>
+        </p:spPr>
+        <p:txBody>
+          <a:bodyPr wrap="square" anchor="ctr">
+            <a:spAutoFit/>
+          </a:bodyPr>
+          <a:lstStyle/>
+          <a:p>
+            <a:pPr algn="l"/>
+            <a:r>
+              <a:rPr sz="2700" b="1">
+                <a:solidFill>
+                  <a:srgbClr val="FFFFFF"/>
+                </a:solidFill>
+                <a:latin typeface="Calibri"/>
+              </a:rPr>
+              <a:t>Target Architecture — As-Built</a:t>
+            </a:r>
+          </a:p>
+        </p:txBody>
+      </p:sp>
+      <p:sp>
+        <p:nvSpPr>
+          <p:cNvPr id="6" name="TextBox 5"/>
+          <p:cNvSpPr txBox="1"/>
+          <p:nvPr/>
+        </p:nvSpPr>
+        <p:spPr>
+          <a:xfrm>
+            <a:off x="457200" y="676656"/>
+            <a:ext cx="9784080" cy="320040"/>
           </a:xfrm>
           <a:prstGeom prst="rect">
             <a:avLst/>
@@ -3679,68 +4440,41 @@
           <a:p>
             <a:pPr algn="l"/>
             <a:r>
-              <a:rPr sz="4000" b="1">
-                <a:solidFill>
-                  <a:srgbClr val="FFFFFF"/>
+              <a:rPr sz="1300" b="0">
+                <a:solidFill>
+                  <a:srgbClr val="C5D3E6"/>
                 </a:solidFill>
                 <a:latin typeface="Calibri"/>
               </a:rPr>
-              <a:t>Code Walkthrough</a:t>
-            </a:r>
-          </a:p>
-        </p:txBody>
-      </p:sp>
-      <p:sp>
-        <p:nvSpPr>
-          <p:cNvPr id="5" name="TextBox 4"/>
-          <p:cNvSpPr txBox="1"/>
-          <p:nvPr/>
-        </p:nvSpPr>
-        <p:spPr>
-          <a:xfrm>
-            <a:off x="731520" y="3429000"/>
-            <a:ext cx="10698480" cy="1463040"/>
-          </a:xfrm>
-          <a:prstGeom prst="rect">
-            <a:avLst/>
-          </a:prstGeom>
-          <a:noFill/>
-        </p:spPr>
-        <p:txBody>
-          <a:bodyPr wrap="square" anchor="t">
-            <a:spAutoFit/>
-          </a:bodyPr>
-          <a:lstStyle/>
-          <a:p>
-            <a:pPr algn="l">
-              <a:spcAft>
-                <a:spcPts val="1000"/>
-              </a:spcAft>
-            </a:pPr>
-            <a:r>
-              <a:rPr sz="1700" b="0">
-                <a:solidFill>
-                  <a:srgbClr val="C5D3E6"/>
-                </a:solidFill>
-                <a:latin typeface="Calibri"/>
-              </a:rPr>
-              <a:t>Live in the repo — the slides mirror the files, open the real code alongside.</a:t>
-            </a:r>
-          </a:p>
-          <a:p>
-            <a:pPr algn="l"/>
-            <a:r>
-              <a:rPr sz="1400" b="0">
-                <a:solidFill>
-                  <a:srgbClr val="9DB4D4"/>
-                </a:solidFill>
-                <a:latin typeface="Calibri"/>
-              </a:rPr>
-              <a:t>1) JMS contract  2) Anti-Corruption / envelope  3) checkout intake  4) pessimistic-lock fulfilment  5) restock re-drive  6) transactional outbox</a:t>
-            </a:r>
-          </a:p>
-        </p:txBody>
-      </p:sp>
+              <a:t>8 Spring Boot services · standalone Artemis · 2 queues + 3 topics + DLQ · 5 client SDKs</a:t>
+            </a:r>
+          </a:p>
+        </p:txBody>
+      </p:sp>
+      <p:pic>
+        <p:nvPicPr>
+          <p:cNvPr id="7" name="Picture 6" descr="petstore_architecture.png"/>
+          <p:cNvPicPr>
+            <a:picLocks noChangeAspect="1"/>
+          </p:cNvPicPr>
+          <p:nvPr/>
+        </p:nvPicPr>
+        <p:blipFill>
+          <a:blip r:embed="rId2"/>
+          <a:stretch>
+            <a:fillRect/>
+          </a:stretch>
+        </p:blipFill>
+        <p:spPr>
+          <a:xfrm>
+            <a:off x="1512838" y="1170432"/>
+            <a:ext cx="9166018" cy="5394960"/>
+          </a:xfrm>
+          <a:prstGeom prst="rect">
+            <a:avLst/>
+          </a:prstGeom>
+        </p:spPr>
+      </p:pic>
     </p:spTree>
   </p:cSld>
   <p:clrMapOvr>
@@ -3768,7 +4502,7 @@
         <p:spPr>
           <a:xfrm>
             <a:off x="0" y="0"/>
-            <a:ext cx="12191695" cy="1051560"/>
+            <a:ext cx="12191695" cy="6858000"/>
           </a:xfrm>
           <a:prstGeom prst="rect">
             <a:avLst/>
@@ -3811,8 +4545,8 @@
         </p:nvSpPr>
         <p:spPr>
           <a:xfrm>
-            <a:off x="10378440" y="274320"/>
-            <a:ext cx="1600200" cy="502920"/>
+            <a:off x="0" y="3200400"/>
+            <a:ext cx="12191695" cy="54864"/>
           </a:xfrm>
           <a:prstGeom prst="rect">
             <a:avLst/>
@@ -3855,78 +4589,8 @@
         </p:nvSpPr>
         <p:spPr>
           <a:xfrm>
-            <a:off x="10378440" y="274320"/>
-            <a:ext cx="1600200" cy="502920"/>
-          </a:xfrm>
-          <a:prstGeom prst="rect">
-            <a:avLst/>
-          </a:prstGeom>
-          <a:noFill/>
-        </p:spPr>
-        <p:txBody>
-          <a:bodyPr wrap="square" anchor="ctr">
-            <a:spAutoFit/>
-          </a:bodyPr>
-          <a:lstStyle/>
-          <a:p>
-            <a:pPr algn="ctr"/>
-            <a:r>
-              <a:rPr sz="1300" b="1">
-                <a:solidFill>
-                  <a:srgbClr val="FFFFFF"/>
-                </a:solidFill>
-                <a:latin typeface="Calibri"/>
-              </a:rPr>
-              <a:t>code</a:t>
-            </a:r>
-          </a:p>
-        </p:txBody>
-      </p:sp>
-      <p:sp>
-        <p:nvSpPr>
-          <p:cNvPr id="5" name="TextBox 4"/>
-          <p:cNvSpPr txBox="1"/>
-          <p:nvPr/>
-        </p:nvSpPr>
-        <p:spPr>
-          <a:xfrm>
-            <a:off x="457200" y="109728"/>
-            <a:ext cx="9784080" cy="640080"/>
-          </a:xfrm>
-          <a:prstGeom prst="rect">
-            <a:avLst/>
-          </a:prstGeom>
-          <a:noFill/>
-        </p:spPr>
-        <p:txBody>
-          <a:bodyPr wrap="square" anchor="ctr">
-            <a:spAutoFit/>
-          </a:bodyPr>
-          <a:lstStyle/>
-          <a:p>
-            <a:pPr algn="l"/>
-            <a:r>
-              <a:rPr sz="2700" b="1">
-                <a:solidFill>
-                  <a:srgbClr val="FFFFFF"/>
-                </a:solidFill>
-                <a:latin typeface="Calibri"/>
-              </a:rPr>
-              <a:t>Walkthrough 1 — The JMS Contract</a:t>
-            </a:r>
-          </a:p>
-        </p:txBody>
-      </p:sp>
-      <p:sp>
-        <p:nvSpPr>
-          <p:cNvPr id="6" name="TextBox 5"/>
-          <p:cNvSpPr txBox="1"/>
-          <p:nvPr/>
-        </p:nvSpPr>
-        <p:spPr>
-          <a:xfrm>
-            <a:off x="457200" y="676656"/>
-            <a:ext cx="9784080" cy="320040"/>
+            <a:off x="731520" y="2286000"/>
+            <a:ext cx="10698480" cy="914400"/>
           </a:xfrm>
           <a:prstGeom prst="rect">
             <a:avLst/>
@@ -3941,71 +4605,27 @@
           <a:p>
             <a:pPr algn="l"/>
             <a:r>
-              <a:rPr sz="1300" b="0">
-                <a:solidFill>
-                  <a:srgbClr val="C5D3E6"/>
+              <a:rPr sz="4000" b="1">
+                <a:solidFill>
+                  <a:srgbClr val="FFFFFF"/>
                 </a:solidFill>
                 <a:latin typeface="Calibri"/>
               </a:rPr>
-              <a:t>One shared library defines every destination; producers/consumers import it</a:t>
-            </a:r>
-          </a:p>
-        </p:txBody>
-      </p:sp>
-      <p:sp>
-        <p:nvSpPr>
-          <p:cNvPr id="7" name="Rectangle 6"/>
-          <p:cNvSpPr/>
-          <p:nvPr/>
-        </p:nvSpPr>
-        <p:spPr>
-          <a:xfrm>
-            <a:off x="457200" y="1280160"/>
-            <a:ext cx="11247120" cy="3246120"/>
-          </a:xfrm>
-          <a:prstGeom prst="rect">
-            <a:avLst/>
-          </a:prstGeom>
-          <a:solidFill>
-            <a:srgbClr val="1E283B"/>
-          </a:solidFill>
-          <a:ln>
-            <a:noFill/>
-          </a:ln>
-          <a:effectLst/>
-        </p:spPr>
-        <p:style>
-          <a:lnRef idx="1">
-            <a:schemeClr val="accent1"/>
-          </a:lnRef>
-          <a:fillRef idx="3">
-            <a:schemeClr val="accent1"/>
-          </a:fillRef>
-          <a:effectRef idx="2">
-            <a:schemeClr val="accent1"/>
-          </a:effectRef>
-          <a:fontRef idx="minor">
-            <a:schemeClr val="lt1"/>
-          </a:fontRef>
-        </p:style>
-        <p:txBody>
-          <a:bodyPr rtlCol="0" anchor="ctr"/>
-          <a:lstStyle/>
-          <a:p>
-            <a:pPr algn="ctr"/>
-          </a:p>
-        </p:txBody>
-      </p:sp>
-      <p:sp>
-        <p:nvSpPr>
-          <p:cNvPr id="8" name="TextBox 7"/>
+              <a:t>Code Walkthrough</a:t>
+            </a:r>
+          </a:p>
+        </p:txBody>
+      </p:sp>
+      <p:sp>
+        <p:nvSpPr>
+          <p:cNvPr id="5" name="TextBox 4"/>
           <p:cNvSpPr txBox="1"/>
           <p:nvPr/>
         </p:nvSpPr>
         <p:spPr>
           <a:xfrm>
-            <a:off x="594360" y="1335024"/>
-            <a:ext cx="10972800" cy="274320"/>
+            <a:off x="731520" y="3429000"/>
+            <a:ext cx="10698480" cy="1463040"/>
           </a:xfrm>
           <a:prstGeom prst="rect">
             <a:avLst/>
@@ -4013,257 +4633,36 @@
           <a:noFill/>
         </p:spPr>
         <p:txBody>
-          <a:bodyPr wrap="none">
+          <a:bodyPr wrap="square" anchor="t">
             <a:spAutoFit/>
           </a:bodyPr>
           <a:lstStyle/>
           <a:p>
-            <a:r>
-              <a:rPr sz="1100" b="1">
-                <a:solidFill>
-                  <a:srgbClr val="7FB5F5"/>
-                </a:solidFill>
-                <a:latin typeface="Consolas"/>
-              </a:rPr>
-              <a:t>petstore-messaging/src/com/petstore/messaging/Destinations.java</a:t>
-            </a:r>
-          </a:p>
-        </p:txBody>
-      </p:sp>
-      <p:sp>
-        <p:nvSpPr>
-          <p:cNvPr id="9" name="TextBox 8"/>
-          <p:cNvSpPr txBox="1"/>
-          <p:nvPr/>
-        </p:nvSpPr>
-        <p:spPr>
-          <a:xfrm>
-            <a:off x="594360" y="1664208"/>
-            <a:ext cx="10972800" cy="2788920"/>
-          </a:xfrm>
-          <a:prstGeom prst="rect">
-            <a:avLst/>
-          </a:prstGeom>
-          <a:noFill/>
-        </p:spPr>
-        <p:txBody>
-          <a:bodyPr wrap="square">
-            <a:spAutoFit/>
-          </a:bodyPr>
-          <a:lstStyle/>
-          <a:p>
-            <a:pPr>
+            <a:pPr algn="l">
               <a:spcAft>
-                <a:spcPts val="100"/>
+                <a:spcPts val="1000"/>
               </a:spcAft>
             </a:pPr>
             <a:r>
-              <a:rPr sz="1200">
-                <a:solidFill>
-                  <a:srgbClr val="E6EDF3"/>
-                </a:solidFill>
-                <a:latin typeface="Consolas"/>
-              </a:rPr>
-              <a:t>public static final String PURCHASE_ORDER_NAME = "PurchaseOrderQueue";</a:t>
-            </a:r>
-          </a:p>
-          <a:p>
-            <a:pPr>
-              <a:spcAft>
-                <a:spcPts val="100"/>
-              </a:spcAft>
-            </a:pPr>
-            <a:r>
-              <a:rPr sz="1200">
-                <a:solidFill>
-                  <a:srgbClr val="E6EDF3"/>
-                </a:solidFill>
-                <a:latin typeface="Consolas"/>
-              </a:rPr>
-              <a:t>public static final String APPROVED_ORDER_NAME = "ApprovedOrderQueue";</a:t>
-            </a:r>
-          </a:p>
-          <a:p>
-            <a:pPr>
-              <a:spcAft>
-                <a:spcPts val="100"/>
-              </a:spcAft>
-            </a:pPr>
-            <a:r>
-              <a:rPr sz="1200">
-                <a:solidFill>
-                  <a:srgbClr val="E6EDF3"/>
-                </a:solidFill>
-                <a:latin typeface="Consolas"/>
-              </a:rPr>
-              <a:t>public static final String INVOICE_NAME        = "InvoiceTopic";</a:t>
-            </a:r>
-          </a:p>
-          <a:p>
-            <a:pPr>
-              <a:spcAft>
-                <a:spcPts val="100"/>
-              </a:spcAft>
-            </a:pPr>
-            <a:r>
-              <a:rPr sz="1200">
-                <a:solidFill>
-                  <a:srgbClr val="E6EDF3"/>
-                </a:solidFill>
-                <a:latin typeface="Consolas"/>
-              </a:rPr>
-              <a:t>public static final String ORDER_STATUS_NAME   = "OrderStatusTopic";</a:t>
-            </a:r>
-          </a:p>
-          <a:p>
-            <a:pPr>
-              <a:spcAft>
-                <a:spcPts val="100"/>
-              </a:spcAft>
-            </a:pPr>
-            <a:r>
-              <a:rPr sz="1200">
-                <a:solidFill>
-                  <a:srgbClr val="E6EDF3"/>
-                </a:solidFill>
-                <a:latin typeface="Consolas"/>
-              </a:rPr>
-              <a:t>public static final String RESTOCK_NAME        = "RestockTopic";</a:t>
-            </a:r>
-          </a:p>
-          <a:p>
-            <a:pPr>
-              <a:spcAft>
-                <a:spcPts val="100"/>
-              </a:spcAft>
-            </a:pPr>
-            <a:r>
-              <a:rPr sz="1200">
-                <a:solidFill>
-                  <a:srgbClr val="E6EDF3"/>
-                </a:solidFill>
-                <a:latin typeface="Consolas"/>
-              </a:rPr>
-              <a:t> </a:t>
-            </a:r>
-          </a:p>
-          <a:p>
-            <a:pPr>
-              <a:spcAft>
-                <a:spcPts val="100"/>
-              </a:spcAft>
-            </a:pPr>
-            <a:r>
-              <a:rPr sz="1200">
-                <a:solidFill>
-                  <a:srgbClr val="7FB5F5"/>
-                </a:solidFill>
-                <a:latin typeface="Consolas"/>
-              </a:rPr>
-              <a:t>public static final Destination APPROVED_ORDER = queue(APPROVED_ORDER_NAME);</a:t>
-            </a:r>
-          </a:p>
-          <a:p>
-            <a:pPr>
-              <a:spcAft>
-                <a:spcPts val="100"/>
-              </a:spcAft>
-            </a:pPr>
-            <a:r>
-              <a:rPr sz="1200">
-                <a:solidFill>
-                  <a:srgbClr val="7FB5F5"/>
-                </a:solidFill>
-                <a:latin typeface="Consolas"/>
-              </a:rPr>
-              <a:t>public static final Destination INVOICE        = topic(INVOICE_NAME);   // pub/sub fan-out</a:t>
-            </a:r>
-          </a:p>
-          <a:p>
-            <a:pPr>
-              <a:spcAft>
-                <a:spcPts val="100"/>
-              </a:spcAft>
-            </a:pPr>
-            <a:r>
-              <a:rPr sz="1200">
-                <a:solidFill>
-                  <a:srgbClr val="7FB5F5"/>
-                </a:solidFill>
-                <a:latin typeface="Consolas"/>
-              </a:rPr>
-              <a:t>public static final Destination RESTOCK        = topic(RESTOCK_NAME);   // H2 re-drive</a:t>
-            </a:r>
-          </a:p>
-        </p:txBody>
-      </p:sp>
-      <p:sp>
-        <p:nvSpPr>
-          <p:cNvPr id="10" name="TextBox 9"/>
-          <p:cNvSpPr txBox="1"/>
-          <p:nvPr/>
-        </p:nvSpPr>
-        <p:spPr>
-          <a:xfrm>
-            <a:off x="457200" y="4709160"/>
-            <a:ext cx="11247120" cy="1828800"/>
-          </a:xfrm>
-          <a:prstGeom prst="rect">
-            <a:avLst/>
-          </a:prstGeom>
-          <a:noFill/>
-        </p:spPr>
-        <p:txBody>
-          <a:bodyPr wrap="square">
-            <a:spAutoFit/>
-          </a:bodyPr>
-          <a:lstStyle/>
-          <a:p>
-            <a:pPr>
-              <a:spcAft>
-                <a:spcPts val="700"/>
-              </a:spcAft>
-            </a:pPr>
+              <a:rPr sz="1700" b="0">
+                <a:solidFill>
+                  <a:srgbClr val="C5D3E6"/>
+                </a:solidFill>
+                <a:latin typeface="Calibri"/>
+              </a:rPr>
+              <a:t>Live in the repo — the slides mirror the files, open the real code alongside.</a:t>
+            </a:r>
+          </a:p>
+          <a:p>
+            <a:pPr algn="l"/>
             <a:r>
               <a:rPr sz="1400" b="0">
                 <a:solidFill>
-                  <a:srgbClr val="1F3355"/>
+                  <a:srgbClr val="9DB4D4"/>
                 </a:solidFill>
                 <a:latin typeface="Calibri"/>
               </a:rPr>
-              <a:t>•  Single source of truth — no service hard-codes a destination string.</a:t>
-            </a:r>
-          </a:p>
-          <a:p>
-            <a:pPr>
-              <a:spcAft>
-                <a:spcPts val="700"/>
-              </a:spcAft>
-            </a:pPr>
-            <a:r>
-              <a:rPr sz="1400" b="0">
-                <a:solidFill>
-                  <a:srgbClr val="1F3355"/>
-                </a:solidFill>
-                <a:latin typeface="Calibri"/>
-              </a:rPr>
-              <a:t>•  queue() = point-to-point (one consumer) · topic() = fan-out (legacy InvoiceTopic preserved).</a:t>
-            </a:r>
-          </a:p>
-          <a:p>
-            <a:pPr>
-              <a:spcAft>
-                <a:spcPts val="700"/>
-              </a:spcAft>
-            </a:pPr>
-            <a:r>
-              <a:rPr sz="1400" b="0">
-                <a:solidFill>
-                  <a:srgbClr val="1F3355"/>
-                </a:solidFill>
-                <a:latin typeface="Calibri"/>
-              </a:rPr>
-              <a:t>•  2 queues + 3 topics; DLQ + ExpiryQueue are broker-managed safety nets.</a:t>
+              <a:t>1) JMS contract  2) Anti-Corruption / envelope  3) checkout intake  4) pessimistic-lock fulfilment  5) restock re-drive  6) transactional outbox</a:t>
             </a:r>
           </a:p>
         </p:txBody>
@@ -4439,7 +4838,7 @@
                 </a:solidFill>
                 <a:latin typeface="Calibri"/>
               </a:rPr>
-              <a:t>Walkthrough 2 — Checkout Intake (sync REST)</a:t>
+              <a:t>Walkthrough 1 — The JMS Contract</a:t>
             </a:r>
           </a:p>
         </p:txBody>
@@ -4474,7 +4873,7 @@
                 </a:solidFill>
                 <a:latin typeface="Calibri"/>
               </a:rPr>
-              <a:t>Storefront hands the order to OPC over REST; JWT proxied for authz</a:t>
+              <a:t>One shared library defines every destination; producers/consumers import it</a:t>
             </a:r>
           </a:p>
         </p:txBody>
@@ -4488,7 +4887,7 @@
         <p:spPr>
           <a:xfrm>
             <a:off x="457200" y="1280160"/>
-            <a:ext cx="11247120" cy="2743200"/>
+            <a:ext cx="11247120" cy="3246120"/>
           </a:xfrm>
           <a:prstGeom prst="rect">
             <a:avLst/>
@@ -4552,7 +4951,7 @@
                 </a:solidFill>
                 <a:latin typeface="Consolas"/>
               </a:rPr>
-              <a:t>petstore-app-v1/src/com/petstore/order/service/OrderService.java</a:t>
+              <a:t>petstore-messaging/src/com/petstore/messaging/Destinations.java</a:t>
             </a:r>
           </a:p>
         </p:txBody>
@@ -4566,7 +4965,7 @@
         <p:spPr>
           <a:xfrm>
             <a:off x="594360" y="1664208"/>
-            <a:ext cx="10972800" cy="2286000"/>
+            <a:ext cx="10972800" cy="2788920"/>
           </a:xfrm>
           <a:prstGeom prst="rect">
             <a:avLst/>
@@ -4591,7 +4990,7 @@
                 </a:solidFill>
                 <a:latin typeface="Consolas"/>
               </a:rPr>
-              <a:t>List&lt;CartItem&gt; items = cart.getItems();</a:t>
+              <a:t>public static final String PURCHASE_ORDER_NAME = "PurchaseOrderQueue";</a:t>
             </a:r>
           </a:p>
           <a:p>
@@ -4607,7 +5006,7 @@
                 </a:solidFill>
                 <a:latin typeface="Consolas"/>
               </a:rPr>
-              <a:t>if (items.isEmpty()) throw new EmptyCartException();</a:t>
+              <a:t>public static final String APPROVED_ORDER_NAME = "ApprovedOrderQueue";</a:t>
             </a:r>
           </a:p>
           <a:p>
@@ -4619,11 +5018,11 @@
             <a:r>
               <a:rPr sz="1200">
                 <a:solidFill>
-                  <a:srgbClr val="2F8F46"/>
+                  <a:srgbClr val="E6EDF3"/>
                 </a:solidFill>
                 <a:latin typeface="Consolas"/>
               </a:rPr>
-              <a:t>// LOCALE = Locale.US, CURRENCY = "USD" (legacy quirk — UI locale does not flow in)</a:t>
+              <a:t>public static final String INVOICE_NAME        = "InvoiceTopic";</a:t>
             </a:r>
           </a:p>
           <a:p>
@@ -4639,7 +5038,7 @@
                 </a:solidFill>
                 <a:latin typeface="Consolas"/>
               </a:rPr>
-              <a:t>CheckoutRequest request = new CheckoutRequest(</a:t>
+              <a:t>public static final String ORDER_STATUS_NAME   = "OrderStatusTopic";</a:t>
             </a:r>
           </a:p>
           <a:p>
@@ -4655,7 +5054,7 @@
                 </a:solidFill>
                 <a:latin typeface="Consolas"/>
               </a:rPr>
-              <a:t>    orderId, userId, emailId, LOCALE, CURRENCY, total, lines, toDto(shipTo), toDto(billTo));</a:t>
+              <a:t>public static final String RESTOCK_NAME        = "RestockTopic";</a:t>
             </a:r>
           </a:p>
           <a:p>
@@ -4671,7 +5070,7 @@
                 </a:solidFill>
                 <a:latin typeface="Consolas"/>
               </a:rPr>
-              <a:t>try {</a:t>
+              <a:t> </a:t>
             </a:r>
           </a:p>
           <a:p>
@@ -4687,7 +5086,7 @@
                 </a:solidFill>
                 <a:latin typeface="Consolas"/>
               </a:rPr>
-              <a:t>    response = orderProcessing.checkout(request, bearer); // POST /api/orders/intake, JWT fwd</a:t>
+              <a:t>public static final Destination APPROVED_ORDER = queue(APPROVED_ORDER_NAME);</a:t>
             </a:r>
           </a:p>
           <a:p>
@@ -4699,11 +5098,11 @@
             <a:r>
               <a:rPr sz="1200">
                 <a:solidFill>
-                  <a:srgbClr val="E6EDF3"/>
+                  <a:srgbClr val="7FB5F5"/>
                 </a:solidFill>
                 <a:latin typeface="Consolas"/>
               </a:rPr>
-              <a:t>} catch (RestClientException e) {</a:t>
+              <a:t>public static final Destination INVOICE        = topic(INVOICE_NAME);   // pub/sub fan-out</a:t>
             </a:r>
           </a:p>
           <a:p>
@@ -4715,43 +5114,11 @@
             <a:r>
               <a:rPr sz="1200">
                 <a:solidFill>
-                  <a:srgbClr val="B23A48"/>
+                  <a:srgbClr val="7FB5F5"/>
                 </a:solidFill>
                 <a:latin typeface="Consolas"/>
               </a:rPr>
-              <a:t>    throw new OrderIntakeUnavailableException(...); // OPC down → 503, cart NOT emptied</a:t>
-            </a:r>
-          </a:p>
-          <a:p>
-            <a:pPr>
-              <a:spcAft>
-                <a:spcPts val="100"/>
-              </a:spcAft>
-            </a:pPr>
-            <a:r>
-              <a:rPr sz="1200">
-                <a:solidFill>
-                  <a:srgbClr val="E6EDF3"/>
-                </a:solidFill>
-                <a:latin typeface="Consolas"/>
-              </a:rPr>
-              <a:t>}</a:t>
-            </a:r>
-          </a:p>
-          <a:p>
-            <a:pPr>
-              <a:spcAft>
-                <a:spcPts val="100"/>
-              </a:spcAft>
-            </a:pPr>
-            <a:r>
-              <a:rPr sz="1200">
-                <a:solidFill>
-                  <a:srgbClr val="7FB5F5"/>
-                </a:solidFill>
-                <a:latin typeface="Consolas"/>
-              </a:rPr>
-              <a:t>cart.empty();   // only on success</a:t>
+              <a:t>public static final Destination RESTOCK        = topic(RESTOCK_NAME);   // H2 re-drive</a:t>
             </a:r>
           </a:p>
         </p:txBody>
@@ -4764,8 +5131,8 @@
         </p:nvSpPr>
         <p:spPr>
           <a:xfrm>
-            <a:off x="457200" y="4251960"/>
-            <a:ext cx="11247120" cy="2148840"/>
+            <a:off x="457200" y="4709160"/>
+            <a:ext cx="11247120" cy="1828800"/>
           </a:xfrm>
           <a:prstGeom prst="rect">
             <a:avLst/>
@@ -4790,7 +5157,7 @@
                 </a:solidFill>
                 <a:latin typeface="Calibri"/>
               </a:rPr>
-              <a:t>•  Legacy published a PurchaseOrder XML fire-and-forget; we made intake synchronous so the shopper gets an immediate, authoritative result.</a:t>
+              <a:t>•  Single source of truth — no service hard-codes a destination string.</a:t>
             </a:r>
           </a:p>
           <a:p>
@@ -4806,7 +5173,7 @@
                 </a:solidFill>
                 <a:latin typeface="Calibri"/>
               </a:rPr>
-              <a:t>•  The storefront persists nothing — OPC is the authoritative order store (single writer).</a:t>
+              <a:t>•  queue() = point-to-point (one consumer) · topic() = fan-out (legacy InvoiceTopic preserved).</a:t>
             </a:r>
           </a:p>
           <a:p>
@@ -4818,11 +5185,11 @@
             <a:r>
               <a:rPr sz="1400" b="0">
                 <a:solidFill>
-                  <a:srgbClr val="555555"/>
+                  <a:srgbClr val="1F3355"/>
                 </a:solidFill>
                 <a:latin typeface="Calibri"/>
               </a:rPr>
-              <a:t>•  PurchaseOrderQueue listener is kept as an alternate async intake path (contract unchanged).</a:t>
+              <a:t>•  2 queues + 3 topics; DLQ + ExpiryQueue are broker-managed safety nets.</a:t>
             </a:r>
           </a:p>
         </p:txBody>
@@ -4998,7 +5365,7 @@
                 </a:solidFill>
                 <a:latin typeface="Calibri"/>
               </a:rPr>
-              <a:t>Walkthrough 3 — Oversell Guard</a:t>
+              <a:t>Walkthrough 2 — Checkout Intake (sync REST)</a:t>
             </a:r>
           </a:p>
         </p:txBody>
@@ -5033,7 +5400,7 @@
                 </a:solidFill>
                 <a:latin typeface="Calibri"/>
               </a:rPr>
-              <a:t>The sanctioned technical fix: pessimistic row lock replaces the EJB container lock</a:t>
+              <a:t>Storefront hands the order to OPC over REST; JWT proxied for authz</a:t>
             </a:r>
           </a:p>
         </p:txBody>
@@ -5047,7 +5414,7 @@
         <p:spPr>
           <a:xfrm>
             <a:off x="457200" y="1280160"/>
-            <a:ext cx="11247120" cy="2606040"/>
+            <a:ext cx="11247120" cy="2743200"/>
           </a:xfrm>
           <a:prstGeom prst="rect">
             <a:avLst/>
@@ -5111,7 +5478,7 @@
                 </a:solidFill>
                 <a:latin typeface="Consolas"/>
               </a:rPr>
-              <a:t>inventory-service/.../repository/jpa/InventoryJpaRepository.java</a:t>
+              <a:t>petstore-app-v1/src/com/petstore/order/service/OrderService.java</a:t>
             </a:r>
           </a:p>
         </p:txBody>
@@ -5125,7 +5492,7 @@
         <p:spPr>
           <a:xfrm>
             <a:off x="594360" y="1664208"/>
-            <a:ext cx="10972800" cy="2148840"/>
+            <a:ext cx="10972800" cy="2286000"/>
           </a:xfrm>
           <a:prstGeom prst="rect">
             <a:avLst/>
@@ -5146,11 +5513,11 @@
             <a:r>
               <a:rPr sz="1200">
                 <a:solidFill>
-                  <a:srgbClr val="7FB5F5"/>
+                  <a:srgbClr val="E6EDF3"/>
                 </a:solidFill>
                 <a:latin typeface="Consolas"/>
               </a:rPr>
-              <a:t>@Lock(LockModeType.PESSIMISTIC_WRITE)</a:t>
+              <a:t>List&lt;CartItem&gt; items = cart.getItems();</a:t>
             </a:r>
           </a:p>
           <a:p>
@@ -5166,7 +5533,7 @@
                 </a:solidFill>
                 <a:latin typeface="Consolas"/>
               </a:rPr>
-              <a:t>@Query("select i from InventoryEntity i where i.itemId = :itemId")</a:t>
+              <a:t>if (items.isEmpty()) throw new EmptyCartException();</a:t>
             </a:r>
           </a:p>
           <a:p>
@@ -5178,11 +5545,11 @@
             <a:r>
               <a:rPr sz="1200">
                 <a:solidFill>
-                  <a:srgbClr val="E6EDF3"/>
+                  <a:srgbClr val="2F8F46"/>
                 </a:solidFill>
                 <a:latin typeface="Consolas"/>
               </a:rPr>
-              <a:t>Optional&lt;InventoryEntity&gt; findByIdForUpdate(String itemId);  // SELECT … FOR UPDATE</a:t>
+              <a:t>// LOCALE = Locale.US, CURRENCY = "USD" (legacy quirk — UI locale does not flow in)</a:t>
             </a:r>
           </a:p>
           <a:p>
@@ -5198,7 +5565,7 @@
                 </a:solidFill>
                 <a:latin typeface="Consolas"/>
               </a:rPr>
-              <a:t> </a:t>
+              <a:t>CheckoutRequest request = new CheckoutRequest(</a:t>
             </a:r>
           </a:p>
           <a:p>
@@ -5210,11 +5577,11 @@
             <a:r>
               <a:rPr sz="1200">
                 <a:solidFill>
-                  <a:srgbClr val="7FB5F5"/>
+                  <a:srgbClr val="E6EDF3"/>
                 </a:solidFill>
                 <a:latin typeface="Consolas"/>
               </a:rPr>
-              <a:t>@Modifying(flushAutomatically = true, clearAutomatically = true)</a:t>
+              <a:t>    orderId, userId, emailId, LOCALE, CURRENCY, total, lines, toDto(shipTo), toDto(billTo));</a:t>
             </a:r>
           </a:p>
           <a:p>
@@ -5230,7 +5597,7 @@
                 </a:solidFill>
                 <a:latin typeface="Consolas"/>
               </a:rPr>
-              <a:t>@Query("update InventoryEntity i set i.quantity = i.quantity + :qty where i.itemId = :itemId")</a:t>
+              <a:t>try {</a:t>
             </a:r>
           </a:p>
           <a:p>
@@ -5242,11 +5609,75 @@
             <a:r>
               <a:rPr sz="1200">
                 <a:solidFill>
+                  <a:srgbClr val="7FB5F5"/>
+                </a:solidFill>
+                <a:latin typeface="Consolas"/>
+              </a:rPr>
+              <a:t>    response = orderProcessing.checkout(request, bearer); // POST /api/orders/intake, JWT fwd</a:t>
+            </a:r>
+          </a:p>
+          <a:p>
+            <a:pPr>
+              <a:spcAft>
+                <a:spcPts val="100"/>
+              </a:spcAft>
+            </a:pPr>
+            <a:r>
+              <a:rPr sz="1200">
+                <a:solidFill>
                   <a:srgbClr val="E6EDF3"/>
                 </a:solidFill>
                 <a:latin typeface="Consolas"/>
               </a:rPr>
-              <a:t>int increment(String itemId, int qty);   // additive restock</a:t>
+              <a:t>} catch (RestClientException e) {</a:t>
+            </a:r>
+          </a:p>
+          <a:p>
+            <a:pPr>
+              <a:spcAft>
+                <a:spcPts val="100"/>
+              </a:spcAft>
+            </a:pPr>
+            <a:r>
+              <a:rPr sz="1200">
+                <a:solidFill>
+                  <a:srgbClr val="B23A48"/>
+                </a:solidFill>
+                <a:latin typeface="Consolas"/>
+              </a:rPr>
+              <a:t>    throw new OrderIntakeUnavailableException(...); // OPC down → 503, cart NOT emptied</a:t>
+            </a:r>
+          </a:p>
+          <a:p>
+            <a:pPr>
+              <a:spcAft>
+                <a:spcPts val="100"/>
+              </a:spcAft>
+            </a:pPr>
+            <a:r>
+              <a:rPr sz="1200">
+                <a:solidFill>
+                  <a:srgbClr val="E6EDF3"/>
+                </a:solidFill>
+                <a:latin typeface="Consolas"/>
+              </a:rPr>
+              <a:t>}</a:t>
+            </a:r>
+          </a:p>
+          <a:p>
+            <a:pPr>
+              <a:spcAft>
+                <a:spcPts val="100"/>
+              </a:spcAft>
+            </a:pPr>
+            <a:r>
+              <a:rPr sz="1200">
+                <a:solidFill>
+                  <a:srgbClr val="7FB5F5"/>
+                </a:solidFill>
+                <a:latin typeface="Consolas"/>
+              </a:rPr>
+              <a:t>cart.empty();   // only on success</a:t>
             </a:r>
           </a:p>
         </p:txBody>
@@ -5259,8 +5690,8 @@
         </p:nvSpPr>
         <p:spPr>
           <a:xfrm>
-            <a:off x="457200" y="4114800"/>
-            <a:ext cx="11247120" cy="2194560"/>
+            <a:off x="457200" y="4251960"/>
+            <a:ext cx="11247120" cy="2148840"/>
           </a:xfrm>
           <a:prstGeom prst="rect">
             <a:avLst/>
@@ -5285,7 +5716,7 @@
                 </a:solidFill>
                 <a:latin typeface="Calibri"/>
               </a:rPr>
-              <a:t>•  check-and-decrement inside one @Transactional; DB CHECK (quantity &gt;= 0) is the floor.</a:t>
+              <a:t>•  Legacy published a PurchaseOrder XML fire-and-forget; we made intake synchronous so the shopper gets an immediate, authoritative result.</a:t>
             </a:r>
           </a:p>
           <a:p>
@@ -5297,11 +5728,11 @@
             <a:r>
               <a:rPr sz="1400" b="0">
                 <a:solidFill>
-                  <a:srgbClr val="2F8F46"/>
+                  <a:srgbClr val="1F3355"/>
                 </a:solidFill>
                 <a:latin typeface="Calibri"/>
               </a:rPr>
-              <a:t>•  Verified with a 20-thread test: 5 stock → exactly 5 succeed, never negative.</a:t>
+              <a:t>•  The storefront persists nothing — OPC is the authoritative order store (single writer).</a:t>
             </a:r>
           </a:p>
           <a:p>
@@ -5313,11 +5744,11 @@
             <a:r>
               <a:rPr sz="1400" b="0">
                 <a:solidFill>
-                  <a:srgbClr val="1F3355"/>
+                  <a:srgbClr val="555555"/>
                 </a:solidFill>
                 <a:latin typeface="Calibri"/>
               </a:rPr>
-              <a:t>•  Preserves the legacy observable outcome: one order ships, the other backorders (stays APPROVED).</a:t>
+              <a:t>•  PurchaseOrderQueue listener is kept as an alternate async intake path (contract unchanged).</a:t>
             </a:r>
           </a:p>
         </p:txBody>
@@ -5493,7 +5924,7 @@
                 </a:solidFill>
                 <a:latin typeface="Calibri"/>
               </a:rPr>
-              <a:t>Walkthrough 4 — Backorder Re-drive (H2)</a:t>
+              <a:t>Walkthrough 3 — Oversell Guard</a:t>
             </a:r>
           </a:p>
         </p:txBody>
@@ -5528,7 +5959,7 @@
                 </a:solidFill>
                 <a:latin typeface="Calibri"/>
               </a:rPr>
-              <a:t>Restore legacy processPendingPO without the legacy PENDING PO store</a:t>
+              <a:t>The sanctioned technical fix: pessimistic row lock replaces the EJB container lock</a:t>
             </a:r>
           </a:p>
         </p:txBody>
@@ -5542,7 +5973,7 @@
         <p:spPr>
           <a:xfrm>
             <a:off x="457200" y="1280160"/>
-            <a:ext cx="11247120" cy="3063240"/>
+            <a:ext cx="11247120" cy="2606040"/>
           </a:xfrm>
           <a:prstGeom prst="rect">
             <a:avLst/>
@@ -5606,7 +6037,7 @@
                 </a:solidFill>
                 <a:latin typeface="Consolas"/>
               </a:rPr>
-              <a:t>order-processing-service/app/.../messaging/RestockListener.java</a:t>
+              <a:t>inventory-service/.../repository/jpa/InventoryJpaRepository.java</a:t>
             </a:r>
           </a:p>
         </p:txBody>
@@ -5620,7 +6051,7 @@
         <p:spPr>
           <a:xfrm>
             <a:off x="594360" y="1664208"/>
-            <a:ext cx="10972800" cy="2606040"/>
+            <a:ext cx="10972800" cy="2148840"/>
           </a:xfrm>
           <a:prstGeom prst="rect">
             <a:avLst/>
@@ -5645,7 +6076,7 @@
                 </a:solidFill>
                 <a:latin typeface="Consolas"/>
               </a:rPr>
-              <a:t>@JmsListener(destination = Destinations.RESTOCK_NAME, containerFactory = "topicFactory",</a:t>
+              <a:t>@Lock(LockModeType.PESSIMISTIC_WRITE)</a:t>
             </a:r>
           </a:p>
           <a:p>
@@ -5657,11 +6088,11 @@
             <a:r>
               <a:rPr sz="1200">
                 <a:solidFill>
-                  <a:srgbClr val="7FB5F5"/>
+                  <a:srgbClr val="E6EDF3"/>
                 </a:solidFill>
                 <a:latin typeface="Consolas"/>
               </a:rPr>
-              <a:t>           subscription = "opc-restock")   // durable shared subscription</a:t>
+              <a:t>@Query("select i from InventoryEntity i where i.itemId = :itemId")</a:t>
             </a:r>
           </a:p>
           <a:p>
@@ -5673,11 +6104,11 @@
             <a:r>
               <a:rPr sz="1200">
                 <a:solidFill>
-                  <a:srgbClr val="7FB5F5"/>
+                  <a:srgbClr val="E6EDF3"/>
                 </a:solidFill>
                 <a:latin typeface="Consolas"/>
               </a:rPr>
-              <a:t>@Transactional</a:t>
+              <a:t>Optional&lt;InventoryEntity&gt; findByIdForUpdate(String itemId);  // SELECT … FOR UPDATE</a:t>
             </a:r>
           </a:p>
           <a:p>
@@ -5693,7 +6124,7 @@
                 </a:solidFill>
                 <a:latin typeface="Consolas"/>
               </a:rPr>
-              <a:t>public void onRestock(RestockEvent restock) {</a:t>
+              <a:t> </a:t>
             </a:r>
           </a:p>
           <a:p>
@@ -5705,11 +6136,11 @@
             <a:r>
               <a:rPr sz="1200">
                 <a:solidFill>
-                  <a:srgbClr val="E6EDF3"/>
+                  <a:srgbClr val="7FB5F5"/>
                 </a:solidFill>
                 <a:latin typeface="Consolas"/>
               </a:rPr>
-              <a:t>    Correlation.set(restock.meta() == null ? null : restock.meta().correlationId());</a:t>
+              <a:t>@Modifying(flushAutomatically = true, clearAutomatically = true)</a:t>
             </a:r>
           </a:p>
           <a:p>
@@ -5721,11 +6152,11 @@
             <a:r>
               <a:rPr sz="1200">
                 <a:solidFill>
-                  <a:srgbClr val="2F8F46"/>
+                  <a:srgbClr val="E6EDF3"/>
                 </a:solidFill>
                 <a:latin typeface="Consolas"/>
               </a:rPr>
-              <a:t>    // AdminService: orderIdsByStatus(APPROVED) → sorted by created (oldest-first)</a:t>
+              <a:t>@Query("update InventoryEntity i set i.quantity = i.quantity + :qty where i.itemId = :itemId")</a:t>
             </a:r>
           </a:p>
           <a:p>
@@ -5737,43 +6168,11 @@
             <a:r>
               <a:rPr sz="1200">
                 <a:solidFill>
-                  <a:srgbClr val="2F8F46"/>
+                  <a:srgbClr val="E6EDF3"/>
                 </a:solidFill>
                 <a:latin typeface="Consolas"/>
               </a:rPr>
-              <a:t>    //             → approvalGateway.dispatchForFulfilment(order) per order</a:t>
-            </a:r>
-          </a:p>
-          <a:p>
-            <a:pPr>
-              <a:spcAft>
-                <a:spcPts val="100"/>
-              </a:spcAft>
-            </a:pPr>
-            <a:r>
-              <a:rPr sz="1200">
-                <a:solidFill>
-                  <a:srgbClr val="E6EDF3"/>
-                </a:solidFill>
-                <a:latin typeface="Consolas"/>
-              </a:rPr>
-              <a:t>    admin.redriveApprovedForFulfilment();</a:t>
-            </a:r>
-          </a:p>
-          <a:p>
-            <a:pPr>
-              <a:spcAft>
-                <a:spcPts val="100"/>
-              </a:spcAft>
-            </a:pPr>
-            <a:r>
-              <a:rPr sz="1200">
-                <a:solidFill>
-                  <a:srgbClr val="E6EDF3"/>
-                </a:solidFill>
-                <a:latin typeface="Consolas"/>
-              </a:rPr>
-              <a:t>}</a:t>
+              <a:t>int increment(String itemId, int qty);   // additive restock</a:t>
             </a:r>
           </a:p>
         </p:txBody>
@@ -5786,8 +6185,8 @@
         </p:nvSpPr>
         <p:spPr>
           <a:xfrm>
-            <a:off x="457200" y="4572000"/>
-            <a:ext cx="11247120" cy="1828800"/>
+            <a:off x="457200" y="4114800"/>
+            <a:ext cx="11247120" cy="2194560"/>
           </a:xfrm>
           <a:prstGeom prst="rect">
             <a:avLst/>
@@ -5806,13 +6205,13 @@
               </a:spcAft>
             </a:pPr>
             <a:r>
-              <a:rPr sz="1300" b="0">
+              <a:rPr sz="1400" b="0">
                 <a:solidFill>
                   <a:srgbClr val="1F3355"/>
                 </a:solidFill>
                 <a:latin typeface="Calibri"/>
               </a:rPr>
-              <a:t>•  inventory publishes RestockEvent → RestockTopic when stock is added; OPC owns the order read-model and reacts.</a:t>
+              <a:t>•  check-and-decrement inside one @Transactional; DB CHECK (quantity &gt;= 0) is the floor.</a:t>
             </a:r>
           </a:p>
           <a:p>
@@ -5822,13 +6221,13 @@
               </a:spcAft>
             </a:pPr>
             <a:r>
-              <a:rPr sz="1300" b="0">
+              <a:rPr sz="1400" b="0">
                 <a:solidFill>
                   <a:srgbClr val="2F8F46"/>
                 </a:solidFill>
                 <a:latin typeface="Calibri"/>
               </a:rPr>
-              <a:t>•  Idempotent end-to-end: inventory dedups by order_id (fulfilled_order ledger) — a re-driven order that already shipped never double-decrements.</a:t>
+              <a:t>•  Verified with a 20-thread test: 5 stock → exactly 5 succeed, never negative.</a:t>
             </a:r>
           </a:p>
           <a:p>
@@ -5838,13 +6237,13 @@
               </a:spcAft>
             </a:pPr>
             <a:r>
-              <a:rPr sz="1300" b="0">
-                <a:solidFill>
-                  <a:srgbClr val="555555"/>
+              <a:rPr sz="1400" b="0">
+                <a:solidFill>
+                  <a:srgbClr val="1F3355"/>
                 </a:solidFill>
                 <a:latin typeface="Calibri"/>
               </a:rPr>
-              <a:t>•  Same observable behavior as legacy; no persisted supplier PO required (M8 kept).</a:t>
+              <a:t>•  Preserves the legacy observable outcome: one order ships, the other backorders (stays APPROVED).</a:t>
             </a:r>
           </a:p>
         </p:txBody>
@@ -6020,7 +6419,7 @@
                 </a:solidFill>
                 <a:latin typeface="Calibri"/>
               </a:rPr>
-              <a:t>Walkthrough 5 — Transactional Outbox</a:t>
+              <a:t>Walkthrough 4 — Backorder Re-drive (H2)</a:t>
             </a:r>
           </a:p>
         </p:txBody>
@@ -6055,76 +6454,21 @@
                 </a:solidFill>
                 <a:latin typeface="Calibri"/>
               </a:rPr>
-              <a:t>Order commit and 'approved' publish can't diverge</a:t>
-            </a:r>
-          </a:p>
-        </p:txBody>
-      </p:sp>
-      <p:sp>
-        <p:nvSpPr>
-          <p:cNvPr id="7" name="TextBox 6"/>
-          <p:cNvSpPr txBox="1"/>
+              <a:t>Restore legacy processPendingPO without the legacy PENDING PO store</a:t>
+            </a:r>
+          </a:p>
+        </p:txBody>
+      </p:sp>
+      <p:sp>
+        <p:nvSpPr>
+          <p:cNvPr id="7" name="Rectangle 6"/>
+          <p:cNvSpPr/>
           <p:nvPr/>
         </p:nvSpPr>
         <p:spPr>
           <a:xfrm>
             <a:off x="457200" y="1280160"/>
-            <a:ext cx="11247120" cy="1828800"/>
-          </a:xfrm>
-          <a:prstGeom prst="rect">
-            <a:avLst/>
-          </a:prstGeom>
-          <a:noFill/>
-        </p:spPr>
-        <p:txBody>
-          <a:bodyPr wrap="square">
-            <a:spAutoFit/>
-          </a:bodyPr>
-          <a:lstStyle/>
-          <a:p>
-            <a:pPr>
-              <a:spcAft>
-                <a:spcPts val="700"/>
-              </a:spcAft>
-            </a:pPr>
-            <a:r>
-              <a:rPr sz="1500" b="0">
-                <a:solidFill>
-                  <a:srgbClr val="B23A48"/>
-                </a:solidFill>
-                <a:latin typeface="Calibri"/>
-              </a:rPr>
-              <a:t>•  Problem: if we persist the order then publish, a crash between them loses the message (or double-sends).</a:t>
-            </a:r>
-          </a:p>
-          <a:p>
-            <a:pPr>
-              <a:spcAft>
-                <a:spcPts val="700"/>
-              </a:spcAft>
-            </a:pPr>
-            <a:r>
-              <a:rPr sz="1500" b="0">
-                <a:solidFill>
-                  <a:srgbClr val="1F3355"/>
-                </a:solidFill>
-                <a:latin typeface="Calibri"/>
-              </a:rPr>
-              <a:t>•  Fix: write the outgoing event into an outbox row in the SAME DB transaction as the order; a relay polls and publishes, marking rows sent. Publish is now exactly-effectively-once.</a:t>
-            </a:r>
-          </a:p>
-        </p:txBody>
-      </p:sp>
-      <p:sp>
-        <p:nvSpPr>
-          <p:cNvPr id="8" name="Rectangle 7"/>
-          <p:cNvSpPr/>
-          <p:nvPr/>
-        </p:nvSpPr>
-        <p:spPr>
-          <a:xfrm>
-            <a:off x="457200" y="3200400"/>
-            <a:ext cx="11247120" cy="2194560"/>
+            <a:ext cx="11247120" cy="3063240"/>
           </a:xfrm>
           <a:prstGeom prst="rect">
             <a:avLst/>
@@ -6161,13 +6505,13 @@
       </p:sp>
       <p:sp>
         <p:nvSpPr>
-          <p:cNvPr id="9" name="TextBox 8"/>
+          <p:cNvPr id="8" name="TextBox 7"/>
           <p:cNvSpPr txBox="1"/>
           <p:nvPr/>
         </p:nvSpPr>
         <p:spPr>
           <a:xfrm>
-            <a:off x="594360" y="3255264"/>
+            <a:off x="594360" y="1335024"/>
             <a:ext cx="10972800" cy="274320"/>
           </a:xfrm>
           <a:prstGeom prst="rect">
@@ -6188,21 +6532,21 @@
                 </a:solidFill>
                 <a:latin typeface="Consolas"/>
               </a:rPr>
-              <a:t>order-processing-service/app/.../service/  (AdminService · ApprovalGateway · OutboxRelay)</a:t>
-            </a:r>
-          </a:p>
-        </p:txBody>
-      </p:sp>
-      <p:sp>
-        <p:nvSpPr>
-          <p:cNvPr id="10" name="TextBox 9"/>
+              <a:t>order-processing-service/app/.../messaging/RestockListener.java</a:t>
+            </a:r>
+          </a:p>
+        </p:txBody>
+      </p:sp>
+      <p:sp>
+        <p:nvSpPr>
+          <p:cNvPr id="9" name="TextBox 8"/>
           <p:cNvSpPr txBox="1"/>
           <p:nvPr/>
         </p:nvSpPr>
         <p:spPr>
           <a:xfrm>
-            <a:off x="594360" y="3584448"/>
-            <a:ext cx="10972800" cy="1737360"/>
+            <a:off x="594360" y="1664208"/>
+            <a:ext cx="10972800" cy="2606040"/>
           </a:xfrm>
           <a:prstGeom prst="rect">
             <a:avLst/>
@@ -6227,7 +6571,7 @@
                 </a:solidFill>
                 <a:latin typeface="Consolas"/>
               </a:rPr>
-              <a:t>@Transactional                                     // ONE atomic unit</a:t>
+              <a:t>@JmsListener(destination = Destinations.RESTOCK_NAME, containerFactory = "topicFactory",</a:t>
             </a:r>
           </a:p>
           <a:p>
@@ -6239,11 +6583,11 @@
             <a:r>
               <a:rPr sz="1200">
                 <a:solidFill>
-                  <a:srgbClr val="E6EDF3"/>
+                  <a:srgbClr val="7FB5F5"/>
                 </a:solidFill>
                 <a:latin typeface="Consolas"/>
               </a:rPr>
-              <a:t>void applyStatusChange(orderId, APPROVED) {</a:t>
+              <a:t>           subscription = "opc-restock")   // durable shared subscription</a:t>
             </a:r>
           </a:p>
           <a:p>
@@ -6255,11 +6599,11 @@
             <a:r>
               <a:rPr sz="1200">
                 <a:solidFill>
-                  <a:srgbClr val="E6EDF3"/>
+                  <a:srgbClr val="7FB5F5"/>
                 </a:solidFill>
                 <a:latin typeface="Consolas"/>
               </a:rPr>
-              <a:t>    orders.updateStatus(orderId, APPROVED);         // order row</a:t>
+              <a:t>@Transactional</a:t>
             </a:r>
           </a:p>
           <a:p>
@@ -6271,11 +6615,11 @@
             <a:r>
               <a:rPr sz="1200">
                 <a:solidFill>
-                  <a:srgbClr val="7FB5F5"/>
+                  <a:srgbClr val="E6EDF3"/>
                 </a:solidFill>
                 <a:latin typeface="Consolas"/>
               </a:rPr>
-              <a:t>    approvalGateway.dispatchForFulfilment(order);   // → OutboxWriter.enqueue(...) — SAME tx</a:t>
+              <a:t>public void onRestock(RestockEvent restock) {</a:t>
             </a:r>
           </a:p>
           <a:p>
@@ -6287,11 +6631,11 @@
             <a:r>
               <a:rPr sz="1200">
                 <a:solidFill>
-                  <a:srgbClr val="7FB5F5"/>
+                  <a:srgbClr val="E6EDF3"/>
                 </a:solidFill>
                 <a:latin typeface="Consolas"/>
               </a:rPr>
-              <a:t>    statusGateway.announce(order, APPROVED);        // → OutboxWriter.enqueue(...) — SAME tx</a:t>
+              <a:t>    Correlation.set(restock.meta() == null ? null : restock.meta().correlationId());</a:t>
             </a:r>
           </a:p>
           <a:p>
@@ -6303,11 +6647,11 @@
             <a:r>
               <a:rPr sz="1200">
                 <a:solidFill>
-                  <a:srgbClr val="E6EDF3"/>
+                  <a:srgbClr val="2F8F46"/>
                 </a:solidFill>
                 <a:latin typeface="Consolas"/>
               </a:rPr>
-              <a:t>}</a:t>
+              <a:t>    // AdminService: orderIdsByStatus(APPROVED) → sorted by created (oldest-first)</a:t>
             </a:r>
           </a:p>
           <a:p>
@@ -6323,21 +6667,53 @@
                 </a:solidFill>
                 <a:latin typeface="Consolas"/>
               </a:rPr>
-              <a:t>// @Scheduled OutboxRelay polls unsent rows → MessagePublisher → marks published</a:t>
-            </a:r>
-          </a:p>
-        </p:txBody>
-      </p:sp>
-      <p:sp>
-        <p:nvSpPr>
-          <p:cNvPr id="11" name="TextBox 10"/>
+              <a:t>    //             → approvalGateway.dispatchForFulfilment(order) per order</a:t>
+            </a:r>
+          </a:p>
+          <a:p>
+            <a:pPr>
+              <a:spcAft>
+                <a:spcPts val="100"/>
+              </a:spcAft>
+            </a:pPr>
+            <a:r>
+              <a:rPr sz="1200">
+                <a:solidFill>
+                  <a:srgbClr val="E6EDF3"/>
+                </a:solidFill>
+                <a:latin typeface="Consolas"/>
+              </a:rPr>
+              <a:t>    admin.redriveApprovedForFulfilment();</a:t>
+            </a:r>
+          </a:p>
+          <a:p>
+            <a:pPr>
+              <a:spcAft>
+                <a:spcPts val="100"/>
+              </a:spcAft>
+            </a:pPr>
+            <a:r>
+              <a:rPr sz="1200">
+                <a:solidFill>
+                  <a:srgbClr val="E6EDF3"/>
+                </a:solidFill>
+                <a:latin typeface="Consolas"/>
+              </a:rPr>
+              <a:t>}</a:t>
+            </a:r>
+          </a:p>
+        </p:txBody>
+      </p:sp>
+      <p:sp>
+        <p:nvSpPr>
+          <p:cNvPr id="10" name="TextBox 9"/>
           <p:cNvSpPr txBox="1"/>
           <p:nvPr/>
         </p:nvSpPr>
         <p:spPr>
           <a:xfrm>
-            <a:off x="457200" y="5532120"/>
-            <a:ext cx="11247120" cy="868680"/>
+            <a:off x="457200" y="4572000"/>
+            <a:ext cx="11247120" cy="1828800"/>
           </a:xfrm>
           <a:prstGeom prst="rect">
             <a:avLst/>
@@ -6345,20 +6721,56 @@
           <a:noFill/>
         </p:spPr>
         <p:txBody>
-          <a:bodyPr wrap="square" anchor="t">
+          <a:bodyPr wrap="square">
             <a:spAutoFit/>
           </a:bodyPr>
           <a:lstStyle/>
           <a:p>
-            <a:pPr algn="l"/>
-            <a:r>
-              <a:rPr sz="1200" b="0">
+            <a:pPr>
+              <a:spcAft>
+                <a:spcPts val="700"/>
+              </a:spcAft>
+            </a:pPr>
+            <a:r>
+              <a:rPr sz="1300" b="0">
+                <a:solidFill>
+                  <a:srgbClr val="1F3355"/>
+                </a:solidFill>
+                <a:latin typeface="Calibri"/>
+              </a:rPr>
+              <a:t>•  inventory publishes RestockEvent → RestockTopic when stock is added; OPC owns the order read-model and reacts.</a:t>
+            </a:r>
+          </a:p>
+          <a:p>
+            <a:pPr>
+              <a:spcAft>
+                <a:spcPts val="700"/>
+              </a:spcAft>
+            </a:pPr>
+            <a:r>
+              <a:rPr sz="1300" b="0">
+                <a:solidFill>
+                  <a:srgbClr val="2F8F46"/>
+                </a:solidFill>
+                <a:latin typeface="Calibri"/>
+              </a:rPr>
+              <a:t>•  Idempotent end-to-end: inventory dedups by order_id (fulfilled_order ledger) — a re-driven order that already shipped never double-decrements.</a:t>
+            </a:r>
+          </a:p>
+          <a:p>
+            <a:pPr>
+              <a:spcAft>
+                <a:spcPts val="700"/>
+              </a:spcAft>
+            </a:pPr>
+            <a:r>
+              <a:rPr sz="1300" b="0">
                 <a:solidFill>
                   <a:srgbClr val="555555"/>
                 </a:solidFill>
                 <a:latin typeface="Calibri"/>
               </a:rPr>
-              <a:t>Gateways NEVER publish to JMS directly — they append to the outbox table in-transaction, so a rolled-back order emits nothing and a committed one always eventually does. At-least-once relay is safe: fixed eventId + idempotent consumers. @Version optimistic lock stops an approve+deny race (→ 409); the Mongo adapter keeps outbox + @Version via multi-document transactions (rs0).</a:t>
+              <a:t>•  Same observable behavior as legacy; no persisted supplier PO required (M8 kept).</a:t>
             </a:r>
           </a:p>
         </p:txBody>
@@ -6499,7 +6911,7 @@
                 </a:solidFill>
                 <a:latin typeface="Calibri"/>
               </a:rPr>
-              <a:t>2 min</a:t>
+              <a:t>code</a:t>
             </a:r>
           </a:p>
         </p:txBody>
@@ -6534,7 +6946,7 @@
                 </a:solidFill>
                 <a:latin typeface="Calibri"/>
               </a:rPr>
-              <a:t>MongoDB Stretch — DONE</a:t>
+              <a:t>Walkthrough 5 — Transactional Outbox</a:t>
             </a:r>
           </a:p>
         </p:txBody>
@@ -6569,7 +6981,7 @@
                 </a:solidFill>
                 <a:latin typeface="Calibri"/>
               </a:rPr>
-              <a:t>Ports made the DB swap additive — zero change to domain / services / tests</a:t>
+              <a:t>Order commit and 'approved' publish can't diverge</a:t>
             </a:r>
           </a:p>
         </p:txBody>
@@ -6583,7 +6995,7 @@
         <p:spPr>
           <a:xfrm>
             <a:off x="457200" y="1280160"/>
-            <a:ext cx="5943600" cy="4937760"/>
+            <a:ext cx="11247120" cy="1828800"/>
           </a:xfrm>
           <a:prstGeom prst="rect">
             <a:avLst/>
@@ -6602,13 +7014,13 @@
               </a:spcAft>
             </a:pPr>
             <a:r>
-              <a:rPr sz="1500" b="1">
-                <a:solidFill>
-                  <a:srgbClr val="1F3355"/>
+              <a:rPr sz="1500" b="0">
+                <a:solidFill>
+                  <a:srgbClr val="B23A48"/>
                 </a:solidFill>
                 <a:latin typeface="Calibri"/>
               </a:rPr>
-              <a:t>•  Profile-selectable: @Profile("mongo") vs @Profile("!mongo"); H2 stays the default.</a:t>
+              <a:t>•  Problem: if we persist the order then publish, a crash between them loses the message (or double-sends).</a:t>
             </a:r>
           </a:p>
           <a:p>
@@ -6618,93 +7030,13 @@
               </a:spcAft>
             </a:pPr>
             <a:r>
-              <a:rPr sz="1500" b="1">
-                <a:solidFill>
-                  <a:srgbClr val="2E6DB4"/>
+              <a:rPr sz="1500" b="0">
+                <a:solidFill>
+                  <a:srgbClr val="1F3355"/>
                 </a:solidFill>
                 <a:latin typeface="Calibri"/>
               </a:rPr>
-              <a:t>•  order-processing-service — fully wired:</a:t>
-            </a:r>
-          </a:p>
-          <a:p>
-            <a:pPr lvl="1">
-              <a:spcAft>
-                <a:spcPts val="700"/>
-              </a:spcAft>
-            </a:pPr>
-            <a:r>
-              <a:rPr sz="1400" b="0">
-                <a:solidFill>
-                  <a:srgbClr val="1F3355"/>
-                </a:solidFill>
-                <a:latin typeface="Calibri"/>
-              </a:rPr>
-              <a:t>–  MongoOrderStore + MongoOutboxStore adapters</a:t>
-            </a:r>
-          </a:p>
-          <a:p>
-            <a:pPr lvl="1">
-              <a:spcAft>
-                <a:spcPts val="700"/>
-              </a:spcAft>
-            </a:pPr>
-            <a:r>
-              <a:rPr sz="1400" b="0">
-                <a:solidFill>
-                  <a:srgbClr val="1F3355"/>
-                </a:solidFill>
-                <a:latin typeface="Calibri"/>
-              </a:rPr>
-              <a:t>–  multi-document transactions (outbox + order commit)</a:t>
-            </a:r>
-          </a:p>
-          <a:p>
-            <a:pPr lvl="1">
-              <a:spcAft>
-                <a:spcPts val="700"/>
-              </a:spcAft>
-            </a:pPr>
-            <a:r>
-              <a:rPr sz="1400" b="0">
-                <a:solidFill>
-                  <a:srgbClr val="1F3355"/>
-                </a:solidFill>
-                <a:latin typeface="Calibri"/>
-              </a:rPr>
-              <a:t>–  @Version optimistic lock + $jsonSchema validators</a:t>
-            </a:r>
-          </a:p>
-          <a:p>
-            <a:pPr>
-              <a:spcAft>
-                <a:spcPts val="700"/>
-              </a:spcAft>
-            </a:pPr>
-            <a:r>
-              <a:rPr sz="1500" b="1">
-                <a:solidFill>
-                  <a:srgbClr val="2E6DB4"/>
-                </a:solidFill>
-                <a:latin typeface="Calibri"/>
-              </a:rPr>
-              <a:t>•  catalog-service — Mongo adapter (3 collections, locale map embedded).</a:t>
-            </a:r>
-          </a:p>
-          <a:p>
-            <a:pPr>
-              <a:spcAft>
-                <a:spcPts val="700"/>
-              </a:spcAft>
-            </a:pPr>
-            <a:r>
-              <a:rPr sz="1400" b="0">
-                <a:solidFill>
-                  <a:srgbClr val="2F8F46"/>
-                </a:solidFill>
-                <a:latin typeface="Calibri"/>
-              </a:rPr>
-              <a:t>•  Testcontainers mongo:7 parity tests on both.</a:t>
+              <a:t>•  Fix: write the outgoing event into an outbox row in the SAME DB transaction as the order; a relay polls and publishes, marking rows sent. Publish is now exactly-effectively-once.</a:t>
             </a:r>
           </a:p>
         </p:txBody>
@@ -6717,14 +7049,14 @@
         </p:nvSpPr>
         <p:spPr>
           <a:xfrm>
-            <a:off x="6629400" y="1371600"/>
-            <a:ext cx="5120640" cy="4206240"/>
+            <a:off x="457200" y="3200400"/>
+            <a:ext cx="11247120" cy="2194560"/>
           </a:xfrm>
           <a:prstGeom prst="rect">
             <a:avLst/>
           </a:prstGeom>
           <a:solidFill>
-            <a:srgbClr val="F2F4F7"/>
+            <a:srgbClr val="1E283B"/>
           </a:solidFill>
           <a:ln>
             <a:noFill/>
@@ -6761,8 +7093,177 @@
         </p:nvSpPr>
         <p:spPr>
           <a:xfrm>
-            <a:off x="6858000" y="1508760"/>
-            <a:ext cx="4663440" cy="457200"/>
+            <a:off x="594360" y="3255264"/>
+            <a:ext cx="10972800" cy="274320"/>
+          </a:xfrm>
+          <a:prstGeom prst="rect">
+            <a:avLst/>
+          </a:prstGeom>
+          <a:noFill/>
+        </p:spPr>
+        <p:txBody>
+          <a:bodyPr wrap="none">
+            <a:spAutoFit/>
+          </a:bodyPr>
+          <a:lstStyle/>
+          <a:p>
+            <a:r>
+              <a:rPr sz="1100" b="1">
+                <a:solidFill>
+                  <a:srgbClr val="7FB5F5"/>
+                </a:solidFill>
+                <a:latin typeface="Consolas"/>
+              </a:rPr>
+              <a:t>order-processing-service/app/.../service/  (AdminService · ApprovalGateway · OutboxRelay)</a:t>
+            </a:r>
+          </a:p>
+        </p:txBody>
+      </p:sp>
+      <p:sp>
+        <p:nvSpPr>
+          <p:cNvPr id="10" name="TextBox 9"/>
+          <p:cNvSpPr txBox="1"/>
+          <p:nvPr/>
+        </p:nvSpPr>
+        <p:spPr>
+          <a:xfrm>
+            <a:off x="594360" y="3584448"/>
+            <a:ext cx="10972800" cy="1737360"/>
+          </a:xfrm>
+          <a:prstGeom prst="rect">
+            <a:avLst/>
+          </a:prstGeom>
+          <a:noFill/>
+        </p:spPr>
+        <p:txBody>
+          <a:bodyPr wrap="square">
+            <a:spAutoFit/>
+          </a:bodyPr>
+          <a:lstStyle/>
+          <a:p>
+            <a:pPr>
+              <a:spcAft>
+                <a:spcPts val="100"/>
+              </a:spcAft>
+            </a:pPr>
+            <a:r>
+              <a:rPr sz="1200">
+                <a:solidFill>
+                  <a:srgbClr val="7FB5F5"/>
+                </a:solidFill>
+                <a:latin typeface="Consolas"/>
+              </a:rPr>
+              <a:t>@Transactional                                     // ONE atomic unit</a:t>
+            </a:r>
+          </a:p>
+          <a:p>
+            <a:pPr>
+              <a:spcAft>
+                <a:spcPts val="100"/>
+              </a:spcAft>
+            </a:pPr>
+            <a:r>
+              <a:rPr sz="1200">
+                <a:solidFill>
+                  <a:srgbClr val="E6EDF3"/>
+                </a:solidFill>
+                <a:latin typeface="Consolas"/>
+              </a:rPr>
+              <a:t>void applyStatusChange(orderId, APPROVED) {</a:t>
+            </a:r>
+          </a:p>
+          <a:p>
+            <a:pPr>
+              <a:spcAft>
+                <a:spcPts val="100"/>
+              </a:spcAft>
+            </a:pPr>
+            <a:r>
+              <a:rPr sz="1200">
+                <a:solidFill>
+                  <a:srgbClr val="E6EDF3"/>
+                </a:solidFill>
+                <a:latin typeface="Consolas"/>
+              </a:rPr>
+              <a:t>    orders.updateStatus(orderId, APPROVED);         // order row</a:t>
+            </a:r>
+          </a:p>
+          <a:p>
+            <a:pPr>
+              <a:spcAft>
+                <a:spcPts val="100"/>
+              </a:spcAft>
+            </a:pPr>
+            <a:r>
+              <a:rPr sz="1200">
+                <a:solidFill>
+                  <a:srgbClr val="7FB5F5"/>
+                </a:solidFill>
+                <a:latin typeface="Consolas"/>
+              </a:rPr>
+              <a:t>    approvalGateway.dispatchForFulfilment(order);   // → OutboxWriter.enqueue(...) — SAME tx</a:t>
+            </a:r>
+          </a:p>
+          <a:p>
+            <a:pPr>
+              <a:spcAft>
+                <a:spcPts val="100"/>
+              </a:spcAft>
+            </a:pPr>
+            <a:r>
+              <a:rPr sz="1200">
+                <a:solidFill>
+                  <a:srgbClr val="7FB5F5"/>
+                </a:solidFill>
+                <a:latin typeface="Consolas"/>
+              </a:rPr>
+              <a:t>    statusGateway.announce(order, APPROVED);        // → OutboxWriter.enqueue(...) — SAME tx</a:t>
+            </a:r>
+          </a:p>
+          <a:p>
+            <a:pPr>
+              <a:spcAft>
+                <a:spcPts val="100"/>
+              </a:spcAft>
+            </a:pPr>
+            <a:r>
+              <a:rPr sz="1200">
+                <a:solidFill>
+                  <a:srgbClr val="E6EDF3"/>
+                </a:solidFill>
+                <a:latin typeface="Consolas"/>
+              </a:rPr>
+              <a:t>}</a:t>
+            </a:r>
+          </a:p>
+          <a:p>
+            <a:pPr>
+              <a:spcAft>
+                <a:spcPts val="100"/>
+              </a:spcAft>
+            </a:pPr>
+            <a:r>
+              <a:rPr sz="1200">
+                <a:solidFill>
+                  <a:srgbClr val="2F8F46"/>
+                </a:solidFill>
+                <a:latin typeface="Consolas"/>
+              </a:rPr>
+              <a:t>// @Scheduled OutboxRelay polls unsent rows → MessagePublisher → marks published</a:t>
+            </a:r>
+          </a:p>
+        </p:txBody>
+      </p:sp>
+      <p:sp>
+        <p:nvSpPr>
+          <p:cNvPr id="11" name="TextBox 10"/>
+          <p:cNvSpPr txBox="1"/>
+          <p:nvPr/>
+        </p:nvSpPr>
+        <p:spPr>
+          <a:xfrm>
+            <a:off x="457200" y="5532120"/>
+            <a:ext cx="11247120" cy="868680"/>
           </a:xfrm>
           <a:prstGeom prst="rect">
             <a:avLst/>
@@ -6777,100 +7278,13 @@
           <a:p>
             <a:pPr algn="l"/>
             <a:r>
-              <a:rPr sz="1600" b="1">
-                <a:solidFill>
-                  <a:srgbClr val="1F3355"/>
+              <a:rPr sz="1200" b="0">
+                <a:solidFill>
+                  <a:srgbClr val="555555"/>
                 </a:solidFill>
                 <a:latin typeface="Calibri"/>
               </a:rPr>
-              <a:t>Why it was cheap</a:t>
-            </a:r>
-          </a:p>
-        </p:txBody>
-      </p:sp>
-      <p:sp>
-        <p:nvSpPr>
-          <p:cNvPr id="10" name="TextBox 9"/>
-          <p:cNvSpPr txBox="1"/>
-          <p:nvPr/>
-        </p:nvSpPr>
-        <p:spPr>
-          <a:xfrm>
-            <a:off x="6858000" y="2057400"/>
-            <a:ext cx="4663440" cy="3383280"/>
-          </a:xfrm>
-          <a:prstGeom prst="rect">
-            <a:avLst/>
-          </a:prstGeom>
-          <a:noFill/>
-        </p:spPr>
-        <p:txBody>
-          <a:bodyPr wrap="square">
-            <a:spAutoFit/>
-          </a:bodyPr>
-          <a:lstStyle/>
-          <a:p>
-            <a:pPr>
-              <a:spcAft>
-                <a:spcPts val="700"/>
-              </a:spcAft>
-            </a:pPr>
-            <a:r>
-              <a:rPr sz="1400" b="0">
-                <a:solidFill>
-                  <a:srgbClr val="1F3355"/>
-                </a:solidFill>
-                <a:latin typeface="Calibri"/>
-              </a:rPr>
-              <a:t>•  The domain talks to a port (OrderStore / OutboxStore), not to JPA.</a:t>
-            </a:r>
-          </a:p>
-          <a:p>
-            <a:pPr>
-              <a:spcAft>
-                <a:spcPts val="700"/>
-              </a:spcAft>
-            </a:pPr>
-            <a:r>
-              <a:rPr sz="1400" b="0">
-                <a:solidFill>
-                  <a:srgbClr val="1F3355"/>
-                </a:solidFill>
-                <a:latin typeface="Calibri"/>
-              </a:rPr>
-              <a:t>•  Mongo is just another adapter behind the same interface.</a:t>
-            </a:r>
-          </a:p>
-          <a:p>
-            <a:pPr>
-              <a:spcAft>
-                <a:spcPts val="700"/>
-              </a:spcAft>
-            </a:pPr>
-            <a:r>
-              <a:rPr sz="1300" b="0">
-                <a:solidFill>
-                  <a:srgbClr val="555555"/>
-                </a:solidFill>
-                <a:latin typeface="Calibri"/>
-              </a:rPr>
-              <a:t>•  Run it: OPC_STORE=mongo ./run-all.sh (docker-compose brings up mongo + mongo-express).</a:t>
-            </a:r>
-          </a:p>
-          <a:p>
-            <a:pPr>
-              <a:spcAft>
-                <a:spcPts val="700"/>
-              </a:spcAft>
-            </a:pPr>
-            <a:r>
-              <a:rPr sz="1400" b="1">
-                <a:solidFill>
-                  <a:srgbClr val="2F8F46"/>
-                </a:solidFill>
-                <a:latin typeface="Calibri"/>
-              </a:rPr>
-              <a:t>•  This is the payoff of hexagonal boundaries chosen up front.</a:t>
+              <a:t>Gateways NEVER publish to JMS directly — they append to the outbox table in-transaction, so a rolled-back order emits nothing and a committed one always eventually does. At-least-once relay is safe: fixed eventId + idempotent consumers. @Version optimistic lock stops an approve+deny race (→ 409); the Mongo adapter keeps outbox + @Version via multi-document transactions (rs0).</a:t>
             </a:r>
           </a:p>
         </p:txBody>
@@ -6884,6 +7298,518 @@
 </file>
 
 <file path=ppt/slides/slide18.xml><?xml version="1.0" encoding="utf-8"?>
+<p:sld xmlns:a="http://schemas.openxmlformats.org/drawingml/2006/main" xmlns:p="http://schemas.openxmlformats.org/presentationml/2006/main" xmlns:r="http://schemas.openxmlformats.org/officeDocument/2006/relationships">
+  <p:cSld>
+    <p:spTree>
+      <p:nvGrpSpPr>
+        <p:cNvPr id="1" name=""/>
+        <p:cNvGrpSpPr/>
+        <p:nvPr/>
+      </p:nvGrpSpPr>
+      <p:grpSpPr/>
+      <p:sp>
+        <p:nvSpPr>
+          <p:cNvPr id="2" name="Rectangle 1"/>
+          <p:cNvSpPr/>
+          <p:nvPr/>
+        </p:nvSpPr>
+        <p:spPr>
+          <a:xfrm>
+            <a:off x="0" y="0"/>
+            <a:ext cx="12191695" cy="1051560"/>
+          </a:xfrm>
+          <a:prstGeom prst="rect">
+            <a:avLst/>
+          </a:prstGeom>
+          <a:solidFill>
+            <a:srgbClr val="1F3355"/>
+          </a:solidFill>
+          <a:ln>
+            <a:noFill/>
+          </a:ln>
+          <a:effectLst/>
+        </p:spPr>
+        <p:style>
+          <a:lnRef idx="1">
+            <a:schemeClr val="accent1"/>
+          </a:lnRef>
+          <a:fillRef idx="3">
+            <a:schemeClr val="accent1"/>
+          </a:fillRef>
+          <a:effectRef idx="2">
+            <a:schemeClr val="accent1"/>
+          </a:effectRef>
+          <a:fontRef idx="minor">
+            <a:schemeClr val="lt1"/>
+          </a:fontRef>
+        </p:style>
+        <p:txBody>
+          <a:bodyPr rtlCol="0" anchor="ctr"/>
+          <a:lstStyle/>
+          <a:p>
+            <a:pPr algn="ctr"/>
+          </a:p>
+        </p:txBody>
+      </p:sp>
+      <p:sp>
+        <p:nvSpPr>
+          <p:cNvPr id="3" name="Rectangle 2"/>
+          <p:cNvSpPr/>
+          <p:nvPr/>
+        </p:nvSpPr>
+        <p:spPr>
+          <a:xfrm>
+            <a:off x="10378440" y="274320"/>
+            <a:ext cx="1600200" cy="502920"/>
+          </a:xfrm>
+          <a:prstGeom prst="rect">
+            <a:avLst/>
+          </a:prstGeom>
+          <a:solidFill>
+            <a:srgbClr val="C97C2F"/>
+          </a:solidFill>
+          <a:ln>
+            <a:noFill/>
+          </a:ln>
+          <a:effectLst/>
+        </p:spPr>
+        <p:style>
+          <a:lnRef idx="1">
+            <a:schemeClr val="accent1"/>
+          </a:lnRef>
+          <a:fillRef idx="3">
+            <a:schemeClr val="accent1"/>
+          </a:fillRef>
+          <a:effectRef idx="2">
+            <a:schemeClr val="accent1"/>
+          </a:effectRef>
+          <a:fontRef idx="minor">
+            <a:schemeClr val="lt1"/>
+          </a:fontRef>
+        </p:style>
+        <p:txBody>
+          <a:bodyPr rtlCol="0" anchor="ctr"/>
+          <a:lstStyle/>
+          <a:p>
+            <a:pPr algn="ctr"/>
+          </a:p>
+        </p:txBody>
+      </p:sp>
+      <p:sp>
+        <p:nvSpPr>
+          <p:cNvPr id="4" name="TextBox 3"/>
+          <p:cNvSpPr txBox="1"/>
+          <p:nvPr/>
+        </p:nvSpPr>
+        <p:spPr>
+          <a:xfrm>
+            <a:off x="10378440" y="274320"/>
+            <a:ext cx="1600200" cy="502920"/>
+          </a:xfrm>
+          <a:prstGeom prst="rect">
+            <a:avLst/>
+          </a:prstGeom>
+          <a:noFill/>
+        </p:spPr>
+        <p:txBody>
+          <a:bodyPr wrap="square" anchor="ctr">
+            <a:spAutoFit/>
+          </a:bodyPr>
+          <a:lstStyle/>
+          <a:p>
+            <a:pPr algn="ctr"/>
+            <a:r>
+              <a:rPr sz="1300" b="1">
+                <a:solidFill>
+                  <a:srgbClr val="FFFFFF"/>
+                </a:solidFill>
+                <a:latin typeface="Calibri"/>
+              </a:rPr>
+              <a:t>2 min</a:t>
+            </a:r>
+          </a:p>
+        </p:txBody>
+      </p:sp>
+      <p:sp>
+        <p:nvSpPr>
+          <p:cNvPr id="5" name="TextBox 4"/>
+          <p:cNvSpPr txBox="1"/>
+          <p:nvPr/>
+        </p:nvSpPr>
+        <p:spPr>
+          <a:xfrm>
+            <a:off x="457200" y="109728"/>
+            <a:ext cx="9784080" cy="640080"/>
+          </a:xfrm>
+          <a:prstGeom prst="rect">
+            <a:avLst/>
+          </a:prstGeom>
+          <a:noFill/>
+        </p:spPr>
+        <p:txBody>
+          <a:bodyPr wrap="square" anchor="ctr">
+            <a:spAutoFit/>
+          </a:bodyPr>
+          <a:lstStyle/>
+          <a:p>
+            <a:pPr algn="l"/>
+            <a:r>
+              <a:rPr sz="2700" b="1">
+                <a:solidFill>
+                  <a:srgbClr val="FFFFFF"/>
+                </a:solidFill>
+                <a:latin typeface="Calibri"/>
+              </a:rPr>
+              <a:t>MongoDB Stretch — DONE</a:t>
+            </a:r>
+          </a:p>
+        </p:txBody>
+      </p:sp>
+      <p:sp>
+        <p:nvSpPr>
+          <p:cNvPr id="6" name="TextBox 5"/>
+          <p:cNvSpPr txBox="1"/>
+          <p:nvPr/>
+        </p:nvSpPr>
+        <p:spPr>
+          <a:xfrm>
+            <a:off x="457200" y="676656"/>
+            <a:ext cx="9784080" cy="320040"/>
+          </a:xfrm>
+          <a:prstGeom prst="rect">
+            <a:avLst/>
+          </a:prstGeom>
+          <a:noFill/>
+        </p:spPr>
+        <p:txBody>
+          <a:bodyPr wrap="square" anchor="t">
+            <a:spAutoFit/>
+          </a:bodyPr>
+          <a:lstStyle/>
+          <a:p>
+            <a:pPr algn="l"/>
+            <a:r>
+              <a:rPr sz="1300" b="0">
+                <a:solidFill>
+                  <a:srgbClr val="C5D3E6"/>
+                </a:solidFill>
+                <a:latin typeface="Calibri"/>
+              </a:rPr>
+              <a:t>Ports made the DB swap additive — zero change to domain / services / tests</a:t>
+            </a:r>
+          </a:p>
+        </p:txBody>
+      </p:sp>
+      <p:sp>
+        <p:nvSpPr>
+          <p:cNvPr id="7" name="TextBox 6"/>
+          <p:cNvSpPr txBox="1"/>
+          <p:nvPr/>
+        </p:nvSpPr>
+        <p:spPr>
+          <a:xfrm>
+            <a:off x="457200" y="1280160"/>
+            <a:ext cx="5943600" cy="4937760"/>
+          </a:xfrm>
+          <a:prstGeom prst="rect">
+            <a:avLst/>
+          </a:prstGeom>
+          <a:noFill/>
+        </p:spPr>
+        <p:txBody>
+          <a:bodyPr wrap="square">
+            <a:spAutoFit/>
+          </a:bodyPr>
+          <a:lstStyle/>
+          <a:p>
+            <a:pPr>
+              <a:spcAft>
+                <a:spcPts val="700"/>
+              </a:spcAft>
+            </a:pPr>
+            <a:r>
+              <a:rPr sz="1500" b="1">
+                <a:solidFill>
+                  <a:srgbClr val="1F3355"/>
+                </a:solidFill>
+                <a:latin typeface="Calibri"/>
+              </a:rPr>
+              <a:t>•  Profile-selectable: @Profile("mongo") vs @Profile("!mongo"); H2 stays the default.</a:t>
+            </a:r>
+          </a:p>
+          <a:p>
+            <a:pPr>
+              <a:spcAft>
+                <a:spcPts val="700"/>
+              </a:spcAft>
+            </a:pPr>
+            <a:r>
+              <a:rPr sz="1500" b="1">
+                <a:solidFill>
+                  <a:srgbClr val="2E6DB4"/>
+                </a:solidFill>
+                <a:latin typeface="Calibri"/>
+              </a:rPr>
+              <a:t>•  order-processing-service — fully wired:</a:t>
+            </a:r>
+          </a:p>
+          <a:p>
+            <a:pPr lvl="1">
+              <a:spcAft>
+                <a:spcPts val="700"/>
+              </a:spcAft>
+            </a:pPr>
+            <a:r>
+              <a:rPr sz="1400" b="0">
+                <a:solidFill>
+                  <a:srgbClr val="1F3355"/>
+                </a:solidFill>
+                <a:latin typeface="Calibri"/>
+              </a:rPr>
+              <a:t>–  MongoOrderStore + MongoOutboxStore adapters</a:t>
+            </a:r>
+          </a:p>
+          <a:p>
+            <a:pPr lvl="1">
+              <a:spcAft>
+                <a:spcPts val="700"/>
+              </a:spcAft>
+            </a:pPr>
+            <a:r>
+              <a:rPr sz="1400" b="0">
+                <a:solidFill>
+                  <a:srgbClr val="1F3355"/>
+                </a:solidFill>
+                <a:latin typeface="Calibri"/>
+              </a:rPr>
+              <a:t>–  multi-document transactions (outbox + order commit)</a:t>
+            </a:r>
+          </a:p>
+          <a:p>
+            <a:pPr lvl="1">
+              <a:spcAft>
+                <a:spcPts val="700"/>
+              </a:spcAft>
+            </a:pPr>
+            <a:r>
+              <a:rPr sz="1400" b="0">
+                <a:solidFill>
+                  <a:srgbClr val="1F3355"/>
+                </a:solidFill>
+                <a:latin typeface="Calibri"/>
+              </a:rPr>
+              <a:t>–  @Version optimistic lock + $jsonSchema validators</a:t>
+            </a:r>
+          </a:p>
+          <a:p>
+            <a:pPr>
+              <a:spcAft>
+                <a:spcPts val="700"/>
+              </a:spcAft>
+            </a:pPr>
+            <a:r>
+              <a:rPr sz="1500" b="1">
+                <a:solidFill>
+                  <a:srgbClr val="2E6DB4"/>
+                </a:solidFill>
+                <a:latin typeface="Calibri"/>
+              </a:rPr>
+              <a:t>•  catalog-service — Mongo adapter (3 collections, locale map embedded).</a:t>
+            </a:r>
+          </a:p>
+          <a:p>
+            <a:pPr>
+              <a:spcAft>
+                <a:spcPts val="700"/>
+              </a:spcAft>
+            </a:pPr>
+            <a:r>
+              <a:rPr sz="1400" b="0">
+                <a:solidFill>
+                  <a:srgbClr val="2F8F46"/>
+                </a:solidFill>
+                <a:latin typeface="Calibri"/>
+              </a:rPr>
+              <a:t>•  Testcontainers mongo:7 parity tests on both.</a:t>
+            </a:r>
+          </a:p>
+        </p:txBody>
+      </p:sp>
+      <p:sp>
+        <p:nvSpPr>
+          <p:cNvPr id="8" name="Rectangle 7"/>
+          <p:cNvSpPr/>
+          <p:nvPr/>
+        </p:nvSpPr>
+        <p:spPr>
+          <a:xfrm>
+            <a:off x="6629400" y="1371600"/>
+            <a:ext cx="5120640" cy="4206240"/>
+          </a:xfrm>
+          <a:prstGeom prst="rect">
+            <a:avLst/>
+          </a:prstGeom>
+          <a:solidFill>
+            <a:srgbClr val="F2F4F7"/>
+          </a:solidFill>
+          <a:ln>
+            <a:noFill/>
+          </a:ln>
+          <a:effectLst/>
+        </p:spPr>
+        <p:style>
+          <a:lnRef idx="1">
+            <a:schemeClr val="accent1"/>
+          </a:lnRef>
+          <a:fillRef idx="3">
+            <a:schemeClr val="accent1"/>
+          </a:fillRef>
+          <a:effectRef idx="2">
+            <a:schemeClr val="accent1"/>
+          </a:effectRef>
+          <a:fontRef idx="minor">
+            <a:schemeClr val="lt1"/>
+          </a:fontRef>
+        </p:style>
+        <p:txBody>
+          <a:bodyPr rtlCol="0" anchor="ctr"/>
+          <a:lstStyle/>
+          <a:p>
+            <a:pPr algn="ctr"/>
+          </a:p>
+        </p:txBody>
+      </p:sp>
+      <p:sp>
+        <p:nvSpPr>
+          <p:cNvPr id="9" name="TextBox 8"/>
+          <p:cNvSpPr txBox="1"/>
+          <p:nvPr/>
+        </p:nvSpPr>
+        <p:spPr>
+          <a:xfrm>
+            <a:off x="6858000" y="1508760"/>
+            <a:ext cx="4663440" cy="457200"/>
+          </a:xfrm>
+          <a:prstGeom prst="rect">
+            <a:avLst/>
+          </a:prstGeom>
+          <a:noFill/>
+        </p:spPr>
+        <p:txBody>
+          <a:bodyPr wrap="square" anchor="t">
+            <a:spAutoFit/>
+          </a:bodyPr>
+          <a:lstStyle/>
+          <a:p>
+            <a:pPr algn="l"/>
+            <a:r>
+              <a:rPr sz="1600" b="1">
+                <a:solidFill>
+                  <a:srgbClr val="1F3355"/>
+                </a:solidFill>
+                <a:latin typeface="Calibri"/>
+              </a:rPr>
+              <a:t>Why it was cheap</a:t>
+            </a:r>
+          </a:p>
+        </p:txBody>
+      </p:sp>
+      <p:sp>
+        <p:nvSpPr>
+          <p:cNvPr id="10" name="TextBox 9"/>
+          <p:cNvSpPr txBox="1"/>
+          <p:nvPr/>
+        </p:nvSpPr>
+        <p:spPr>
+          <a:xfrm>
+            <a:off x="6858000" y="2057400"/>
+            <a:ext cx="4663440" cy="3383280"/>
+          </a:xfrm>
+          <a:prstGeom prst="rect">
+            <a:avLst/>
+          </a:prstGeom>
+          <a:noFill/>
+        </p:spPr>
+        <p:txBody>
+          <a:bodyPr wrap="square">
+            <a:spAutoFit/>
+          </a:bodyPr>
+          <a:lstStyle/>
+          <a:p>
+            <a:pPr>
+              <a:spcAft>
+                <a:spcPts val="700"/>
+              </a:spcAft>
+            </a:pPr>
+            <a:r>
+              <a:rPr sz="1400" b="0">
+                <a:solidFill>
+                  <a:srgbClr val="1F3355"/>
+                </a:solidFill>
+                <a:latin typeface="Calibri"/>
+              </a:rPr>
+              <a:t>•  The domain talks to a port (OrderStore / OutboxStore), not to JPA.</a:t>
+            </a:r>
+          </a:p>
+          <a:p>
+            <a:pPr>
+              <a:spcAft>
+                <a:spcPts val="700"/>
+              </a:spcAft>
+            </a:pPr>
+            <a:r>
+              <a:rPr sz="1400" b="0">
+                <a:solidFill>
+                  <a:srgbClr val="1F3355"/>
+                </a:solidFill>
+                <a:latin typeface="Calibri"/>
+              </a:rPr>
+              <a:t>•  Mongo is just another adapter behind the same interface.</a:t>
+            </a:r>
+          </a:p>
+          <a:p>
+            <a:pPr>
+              <a:spcAft>
+                <a:spcPts val="700"/>
+              </a:spcAft>
+            </a:pPr>
+            <a:r>
+              <a:rPr sz="1300" b="0">
+                <a:solidFill>
+                  <a:srgbClr val="555555"/>
+                </a:solidFill>
+                <a:latin typeface="Calibri"/>
+              </a:rPr>
+              <a:t>•  Run it: OPC_STORE=mongo ./run-all.sh (docker-compose brings up mongo + mongo-express).</a:t>
+            </a:r>
+          </a:p>
+          <a:p>
+            <a:pPr>
+              <a:spcAft>
+                <a:spcPts val="700"/>
+              </a:spcAft>
+            </a:pPr>
+            <a:r>
+              <a:rPr sz="1400" b="1">
+                <a:solidFill>
+                  <a:srgbClr val="2F8F46"/>
+                </a:solidFill>
+                <a:latin typeface="Calibri"/>
+              </a:rPr>
+              <a:t>•  This is the payoff of hexagonal boundaries chosen up front.</a:t>
+            </a:r>
+          </a:p>
+        </p:txBody>
+      </p:sp>
+    </p:spTree>
+  </p:cSld>
+  <p:clrMapOvr>
+    <a:masterClrMapping/>
+  </p:clrMapOvr>
+</p:sld>
+</file>
+
+<file path=ppt/slides/slide19.xml><?xml version="1.0" encoding="utf-8"?>
 <p:sld xmlns:a="http://schemas.openxmlformats.org/drawingml/2006/main" xmlns:p="http://schemas.openxmlformats.org/presentationml/2006/main" xmlns:r="http://schemas.openxmlformats.org/officeDocument/2006/relationships">
   <p:cSld>
     <p:spTree>
@@ -10000,7 +10926,7 @@
                 </a:solidFill>
                 <a:latin typeface="Calibri"/>
               </a:rPr>
-              <a:t>3 min</a:t>
+              <a:t>context</a:t>
             </a:r>
           </a:p>
         </p:txBody>
@@ -10035,7 +10961,7 @@
                 </a:solidFill>
                 <a:latin typeface="Calibri"/>
               </a:rPr>
-              <a:t>Migration Strategy &amp; Principles</a:t>
+              <a:t>Primer — What is EJB, and why it's everywhere here</a:t>
             </a:r>
           </a:p>
         </p:txBody>
@@ -10070,7 +10996,7 @@
                 </a:solidFill>
                 <a:latin typeface="Calibri"/>
               </a:rPr>
-              <a:t>How we de-risk a large migration</a:t>
+              <a:t>Enterprise JavaBeans: the J2EE server-side component model the legacy app is built on</a:t>
             </a:r>
           </a:p>
         </p:txBody>
@@ -10084,7 +11010,7 @@
         <p:spPr>
           <a:xfrm>
             <a:off x="457200" y="1234440"/>
-            <a:ext cx="5852160" cy="5120640"/>
+            <a:ext cx="5943600" cy="5212080"/>
           </a:xfrm>
           <a:prstGeom prst="rect">
             <a:avLst/>
@@ -10103,13 +11029,29 @@
               </a:spcAft>
             </a:pPr>
             <a:r>
-              <a:rPr sz="1700" b="1">
+              <a:rPr sz="1600" b="1">
                 <a:solidFill>
                   <a:srgbClr val="2E6DB4"/>
                 </a:solidFill>
                 <a:latin typeface="Calibri"/>
               </a:rPr>
-              <a:t>•  Strangler Fig, not big-bang.</a:t>
+              <a:t>•  EJB = Enterprise JavaBeans — the standard server-side component model of J2EE (2000s).</a:t>
+            </a:r>
+          </a:p>
+          <a:p>
+            <a:pPr>
+              <a:spcAft>
+                <a:spcPts val="700"/>
+              </a:spcAft>
+            </a:pPr>
+            <a:r>
+              <a:rPr sz="1400" b="0">
+                <a:solidFill>
+                  <a:srgbClr val="1F3355"/>
+                </a:solidFill>
+                <a:latin typeface="Calibri"/>
+              </a:rPr>
+              <a:t>•  A bean is a managed Java object; the app server (Sun J2EE RI) hosts it and supplies enterprise services declaratively — you write logic, the container adds the plumbing:</a:t>
             </a:r>
           </a:p>
           <a:p>
@@ -10119,13 +11061,29 @@
               </a:spcAft>
             </a:pPr>
             <a:r>
-              <a:rPr sz="1600" b="0">
+              <a:rPr sz="1400" b="0">
                 <a:solidFill>
                   <a:srgbClr val="1F3355"/>
                 </a:solidFill>
                 <a:latin typeface="Calibri"/>
               </a:rPr>
-              <a:t>–  Migrate one bounded context at a time; keep it runnable at every step.</a:t>
+              <a:t>–  Transactions, security, pooling, remoting, lifecycle.</a:t>
+            </a:r>
+          </a:p>
+          <a:p>
+            <a:pPr lvl="1">
+              <a:spcAft>
+                <a:spcPts val="700"/>
+              </a:spcAft>
+            </a:pPr>
+            <a:r>
+              <a:rPr sz="1400" b="0">
+                <a:solidFill>
+                  <a:srgbClr val="C97C2F"/>
+                </a:solidFill>
+                <a:latin typeface="Calibri"/>
+              </a:rPr>
+              <a:t>–  Persistence — CMP (Container-Managed Persistence) auto-maps entity beans to DB tables.</a:t>
             </a:r>
           </a:p>
           <a:p>
@@ -10135,13 +11093,13 @@
               </a:spcAft>
             </a:pPr>
             <a:r>
-              <a:rPr sz="1700" b="1">
+              <a:rPr sz="1600" b="1">
                 <a:solidFill>
                   <a:srgbClr val="2E6DB4"/>
                 </a:solidFill>
                 <a:latin typeface="Calibri"/>
               </a:rPr>
-              <a:t>•  Characterization tests FIRST.</a:t>
+              <a:t>•  Three bean flavours the Pet Store uses:</a:t>
             </a:r>
           </a:p>
           <a:p>
@@ -10151,29 +11109,13 @@
               </a:spcAft>
             </a:pPr>
             <a:r>
-              <a:rPr sz="1600" b="0">
+              <a:rPr sz="1400" b="0">
                 <a:solidFill>
                   <a:srgbClr val="1F3355"/>
                 </a:solidFill>
                 <a:latin typeface="Calibri"/>
               </a:rPr>
-              <a:t>–  Pin legacy behavior (incl. quirks) before touching it; migrate → green-or-rollback.</a:t>
-            </a:r>
-          </a:p>
-          <a:p>
-            <a:pPr>
-              <a:spcAft>
-                <a:spcPts val="700"/>
-              </a:spcAft>
-            </a:pPr>
-            <a:r>
-              <a:rPr sz="1700" b="1">
-                <a:solidFill>
-                  <a:srgbClr val="2E6DB4"/>
-                </a:solidFill>
-                <a:latin typeface="Calibri"/>
-              </a:rPr>
-              <a:t>•  Ports &amp; adapters (hexagonal).</a:t>
+              <a:t>–  Session beans — business logic (e.g. ShoppingCart, SignOn, OPCAdminFacade).</a:t>
             </a:r>
           </a:p>
           <a:p>
@@ -10183,29 +11125,13 @@
               </a:spcAft>
             </a:pPr>
             <a:r>
-              <a:rPr sz="1600" b="0">
+              <a:rPr sz="1400" b="0">
                 <a:solidFill>
                   <a:srgbClr val="1F3355"/>
                 </a:solidFill>
                 <a:latin typeface="Calibri"/>
               </a:rPr>
-              <a:t>–  Domain depends on interfaces; JPA / JMS / Mongo are swappable adapters.</a:t>
-            </a:r>
-          </a:p>
-          <a:p>
-            <a:pPr>
-              <a:spcAft>
-                <a:spcPts val="700"/>
-              </a:spcAft>
-            </a:pPr>
-            <a:r>
-              <a:rPr sz="1700" b="1">
-                <a:solidFill>
-                  <a:srgbClr val="2E6DB4"/>
-                </a:solidFill>
-                <a:latin typeface="Calibri"/>
-              </a:rPr>
-              <a:t>•  SOLID + ask before choosing a pattern.</a:t>
+              <a:t>–  Entity beans (CMP) — persistent data (Customer, Account, PurchaseOrder, Inventory…).</a:t>
             </a:r>
           </a:p>
           <a:p>
@@ -10215,13 +11141,13 @@
               </a:spcAft>
             </a:pPr>
             <a:r>
-              <a:rPr sz="1600" b="0">
+              <a:rPr sz="1400" b="0">
                 <a:solidFill>
                   <a:srgbClr val="1F3355"/>
                 </a:solidFill>
                 <a:latin typeface="Calibri"/>
               </a:rPr>
-              <a:t>–  Enum+guards over State pattern; thin controllers over Command — right-sized.</a:t>
+              <a:t>–  Message-driven beans (MDB) — JMS consumers (PurchaseOrderMDB, InvoiceMDB, Mail*MDB).</a:t>
             </a:r>
           </a:p>
         </p:txBody>
@@ -10234,8 +11160,8 @@
         </p:nvSpPr>
         <p:spPr>
           <a:xfrm>
-            <a:off x="6537960" y="1371600"/>
-            <a:ext cx="5212080" cy="4480560"/>
+            <a:off x="6583680" y="1371600"/>
+            <a:ext cx="5166360" cy="4846320"/>
           </a:xfrm>
           <a:prstGeom prst="rect">
             <a:avLst/>
@@ -10278,8 +11204,8 @@
         </p:nvSpPr>
         <p:spPr>
           <a:xfrm>
-            <a:off x="6766560" y="1508760"/>
-            <a:ext cx="4846320" cy="457200"/>
+            <a:off x="6784848" y="1481328"/>
+            <a:ext cx="4800600" cy="457200"/>
           </a:xfrm>
           <a:prstGeom prst="rect">
             <a:avLst/>
@@ -10294,13 +11220,13 @@
           <a:p>
             <a:pPr algn="l"/>
             <a:r>
-              <a:rPr sz="1600" b="1">
+              <a:rPr sz="1500" b="1">
                 <a:solidFill>
                   <a:srgbClr val="1F3355"/>
                 </a:solidFill>
                 <a:latin typeface="Calibri"/>
               </a:rPr>
-              <a:t>The safety net (quality gate)</a:t>
+              <a:t>Why it blocks a straight port</a:t>
             </a:r>
           </a:p>
         </p:txBody>
@@ -10313,8 +11239,8 @@
         </p:nvSpPr>
         <p:spPr>
           <a:xfrm>
-            <a:off x="6766560" y="2057400"/>
-            <a:ext cx="4846320" cy="3657600"/>
+            <a:off x="6784848" y="2011680"/>
+            <a:ext cx="4800600" cy="4114800"/>
           </a:xfrm>
           <a:prstGeom prst="rect">
             <a:avLst/>
@@ -10329,7 +11255,7 @@
           <a:p>
             <a:pPr>
               <a:spcAft>
-                <a:spcPts val="900"/>
+                <a:spcPts val="800"/>
               </a:spcAft>
             </a:pPr>
             <a:r>
@@ -10339,13 +11265,13 @@
                 </a:solidFill>
                 <a:latin typeface="Calibri"/>
               </a:rPr>
-              <a:t>•  Test pyramid: unit → @DataJpaTest slice → MockMvc → Testcontainers e2e.</a:t>
+              <a:t>•  Every bean needs an interface trio + XML: Home + Remote/Local + Bean class, wired in ejb-jar.xml / sun-j2ee-ri.xml.</a:t>
             </a:r>
           </a:p>
           <a:p>
             <a:pPr>
               <a:spcAft>
-                <a:spcPts val="900"/>
+                <a:spcPts val="800"/>
               </a:spcAft>
             </a:pPr>
             <a:r>
@@ -10355,55 +11281,87 @@
                 </a:solidFill>
                 <a:latin typeface="Calibri"/>
               </a:rPr>
-              <a:t>•  Golden-file message tests before any XML→JSON wire change.</a:t>
+              <a:t>•  Beans are found by JNDI lookup via a ServiceLocator — not injected. Hard to unit-test (needs a running container).</a:t>
             </a:r>
           </a:p>
           <a:p>
             <a:pPr>
               <a:spcAft>
-                <a:spcPts val="900"/>
+                <a:spcPts val="800"/>
               </a:spcAft>
             </a:pPr>
             <a:r>
               <a:rPr sz="1300" b="0">
                 <a:solidFill>
-                  <a:srgbClr val="1F3355"/>
+                  <a:srgbClr val="B23A48"/>
                 </a:solidFill>
                 <a:latin typeface="Calibri"/>
               </a:rPr>
-              <a:t>•  Idempotent @JmsListener — JMS is at-least-once.</a:t>
+              <a:t>•  Runs only on a J2EE 1.3 app server on javax.* APIs — no such server on Java 21.</a:t>
             </a:r>
           </a:p>
           <a:p>
             <a:pPr>
               <a:spcAft>
-                <a:spcPts val="900"/>
+                <a:spcPts val="800"/>
               </a:spcAft>
             </a:pPr>
             <a:r>
-              <a:rPr sz="1300" b="0">
-                <a:solidFill>
-                  <a:srgbClr val="1F3355"/>
+              <a:rPr sz="1400" b="1">
+                <a:solidFill>
+                  <a:srgbClr val="2F8F46"/>
                 </a:solidFill>
                 <a:latin typeface="Calibri"/>
               </a:rPr>
-              <a:t>•  Parity audit: file-by-file legacy vs migrated (preserved/changed/missing).</a:t>
-            </a:r>
-          </a:p>
-          <a:p>
-            <a:pPr>
+              <a:t>•  Modern mapping:</a:t>
+            </a:r>
+          </a:p>
+          <a:p>
+            <a:pPr lvl="1">
               <a:spcAft>
-                <a:spcPts val="900"/>
+                <a:spcPts val="800"/>
               </a:spcAft>
             </a:pPr>
             <a:r>
               <a:rPr sz="1300" b="0">
                 <a:solidFill>
-                  <a:srgbClr val="1F3355"/>
+                  <a:srgbClr val="2F8F46"/>
                 </a:solidFill>
                 <a:latin typeface="Calibri"/>
               </a:rPr>
-              <a:t>•  Commit only on green; a migration ledger tracks each module.</a:t>
+              <a:t>–  Session bean → Spring @Service</a:t>
+            </a:r>
+          </a:p>
+          <a:p>
+            <a:pPr lvl="1">
+              <a:spcAft>
+                <a:spcPts val="800"/>
+              </a:spcAft>
+            </a:pPr>
+            <a:r>
+              <a:rPr sz="1300" b="0">
+                <a:solidFill>
+                  <a:srgbClr val="2F8F46"/>
+                </a:solidFill>
+                <a:latin typeface="Calibri"/>
+              </a:rPr>
+              <a:t>–  Entity bean (CMP) → JPA @Entity + repository port</a:t>
+            </a:r>
+          </a:p>
+          <a:p>
+            <a:pPr lvl="1">
+              <a:spcAft>
+                <a:spcPts val="800"/>
+              </a:spcAft>
+            </a:pPr>
+            <a:r>
+              <a:rPr sz="1300" b="0">
+                <a:solidFill>
+                  <a:srgbClr val="2F8F46"/>
+                </a:solidFill>
+                <a:latin typeface="Calibri"/>
+              </a:rPr>
+              <a:t>–  MDB → @JmsListener; JNDI/ServiceLocator → dependency injection</a:t>
             </a:r>
           </a:p>
         </p:txBody>
@@ -10417,6 +11375,550 @@
 </file>
 
 <file path=ppt/slides/slide7.xml><?xml version="1.0" encoding="utf-8"?>
+<p:sld xmlns:a="http://schemas.openxmlformats.org/drawingml/2006/main" xmlns:p="http://schemas.openxmlformats.org/presentationml/2006/main" xmlns:r="http://schemas.openxmlformats.org/officeDocument/2006/relationships">
+  <p:cSld>
+    <p:spTree>
+      <p:nvGrpSpPr>
+        <p:cNvPr id="1" name=""/>
+        <p:cNvGrpSpPr/>
+        <p:nvPr/>
+      </p:nvGrpSpPr>
+      <p:grpSpPr/>
+      <p:sp>
+        <p:nvSpPr>
+          <p:cNvPr id="2" name="Rectangle 1"/>
+          <p:cNvSpPr/>
+          <p:nvPr/>
+        </p:nvSpPr>
+        <p:spPr>
+          <a:xfrm>
+            <a:off x="0" y="0"/>
+            <a:ext cx="12191695" cy="1051560"/>
+          </a:xfrm>
+          <a:prstGeom prst="rect">
+            <a:avLst/>
+          </a:prstGeom>
+          <a:solidFill>
+            <a:srgbClr val="1F3355"/>
+          </a:solidFill>
+          <a:ln>
+            <a:noFill/>
+          </a:ln>
+          <a:effectLst/>
+        </p:spPr>
+        <p:style>
+          <a:lnRef idx="1">
+            <a:schemeClr val="accent1"/>
+          </a:lnRef>
+          <a:fillRef idx="3">
+            <a:schemeClr val="accent1"/>
+          </a:fillRef>
+          <a:effectRef idx="2">
+            <a:schemeClr val="accent1"/>
+          </a:effectRef>
+          <a:fontRef idx="minor">
+            <a:schemeClr val="lt1"/>
+          </a:fontRef>
+        </p:style>
+        <p:txBody>
+          <a:bodyPr rtlCol="0" anchor="ctr"/>
+          <a:lstStyle/>
+          <a:p>
+            <a:pPr algn="ctr"/>
+          </a:p>
+        </p:txBody>
+      </p:sp>
+      <p:sp>
+        <p:nvSpPr>
+          <p:cNvPr id="3" name="Rectangle 2"/>
+          <p:cNvSpPr/>
+          <p:nvPr/>
+        </p:nvSpPr>
+        <p:spPr>
+          <a:xfrm>
+            <a:off x="10378440" y="274320"/>
+            <a:ext cx="1600200" cy="502920"/>
+          </a:xfrm>
+          <a:prstGeom prst="rect">
+            <a:avLst/>
+          </a:prstGeom>
+          <a:solidFill>
+            <a:srgbClr val="C97C2F"/>
+          </a:solidFill>
+          <a:ln>
+            <a:noFill/>
+          </a:ln>
+          <a:effectLst/>
+        </p:spPr>
+        <p:style>
+          <a:lnRef idx="1">
+            <a:schemeClr val="accent1"/>
+          </a:lnRef>
+          <a:fillRef idx="3">
+            <a:schemeClr val="accent1"/>
+          </a:fillRef>
+          <a:effectRef idx="2">
+            <a:schemeClr val="accent1"/>
+          </a:effectRef>
+          <a:fontRef idx="minor">
+            <a:schemeClr val="lt1"/>
+          </a:fontRef>
+        </p:style>
+        <p:txBody>
+          <a:bodyPr rtlCol="0" anchor="ctr"/>
+          <a:lstStyle/>
+          <a:p>
+            <a:pPr algn="ctr"/>
+          </a:p>
+        </p:txBody>
+      </p:sp>
+      <p:sp>
+        <p:nvSpPr>
+          <p:cNvPr id="4" name="TextBox 3"/>
+          <p:cNvSpPr txBox="1"/>
+          <p:nvPr/>
+        </p:nvSpPr>
+        <p:spPr>
+          <a:xfrm>
+            <a:off x="10378440" y="274320"/>
+            <a:ext cx="1600200" cy="502920"/>
+          </a:xfrm>
+          <a:prstGeom prst="rect">
+            <a:avLst/>
+          </a:prstGeom>
+          <a:noFill/>
+        </p:spPr>
+        <p:txBody>
+          <a:bodyPr wrap="square" anchor="ctr">
+            <a:spAutoFit/>
+          </a:bodyPr>
+          <a:lstStyle/>
+          <a:p>
+            <a:pPr algn="ctr"/>
+            <a:r>
+              <a:rPr sz="1300" b="1">
+                <a:solidFill>
+                  <a:srgbClr val="FFFFFF"/>
+                </a:solidFill>
+                <a:latin typeface="Calibri"/>
+              </a:rPr>
+              <a:t>3 min</a:t>
+            </a:r>
+          </a:p>
+        </p:txBody>
+      </p:sp>
+      <p:sp>
+        <p:nvSpPr>
+          <p:cNvPr id="5" name="TextBox 4"/>
+          <p:cNvSpPr txBox="1"/>
+          <p:nvPr/>
+        </p:nvSpPr>
+        <p:spPr>
+          <a:xfrm>
+            <a:off x="457200" y="109728"/>
+            <a:ext cx="9784080" cy="640080"/>
+          </a:xfrm>
+          <a:prstGeom prst="rect">
+            <a:avLst/>
+          </a:prstGeom>
+          <a:noFill/>
+        </p:spPr>
+        <p:txBody>
+          <a:bodyPr wrap="square" anchor="ctr">
+            <a:spAutoFit/>
+          </a:bodyPr>
+          <a:lstStyle/>
+          <a:p>
+            <a:pPr algn="l"/>
+            <a:r>
+              <a:rPr sz="2700" b="1">
+                <a:solidFill>
+                  <a:srgbClr val="FFFFFF"/>
+                </a:solidFill>
+                <a:latin typeface="Calibri"/>
+              </a:rPr>
+              <a:t>Migration Strategy &amp; Principles</a:t>
+            </a:r>
+          </a:p>
+        </p:txBody>
+      </p:sp>
+      <p:sp>
+        <p:nvSpPr>
+          <p:cNvPr id="6" name="TextBox 5"/>
+          <p:cNvSpPr txBox="1"/>
+          <p:nvPr/>
+        </p:nvSpPr>
+        <p:spPr>
+          <a:xfrm>
+            <a:off x="457200" y="676656"/>
+            <a:ext cx="9784080" cy="320040"/>
+          </a:xfrm>
+          <a:prstGeom prst="rect">
+            <a:avLst/>
+          </a:prstGeom>
+          <a:noFill/>
+        </p:spPr>
+        <p:txBody>
+          <a:bodyPr wrap="square" anchor="t">
+            <a:spAutoFit/>
+          </a:bodyPr>
+          <a:lstStyle/>
+          <a:p>
+            <a:pPr algn="l"/>
+            <a:r>
+              <a:rPr sz="1300" b="0">
+                <a:solidFill>
+                  <a:srgbClr val="C5D3E6"/>
+                </a:solidFill>
+                <a:latin typeface="Calibri"/>
+              </a:rPr>
+              <a:t>How we de-risk a large migration</a:t>
+            </a:r>
+          </a:p>
+        </p:txBody>
+      </p:sp>
+      <p:sp>
+        <p:nvSpPr>
+          <p:cNvPr id="7" name="TextBox 6"/>
+          <p:cNvSpPr txBox="1"/>
+          <p:nvPr/>
+        </p:nvSpPr>
+        <p:spPr>
+          <a:xfrm>
+            <a:off x="457200" y="1234440"/>
+            <a:ext cx="5852160" cy="5120640"/>
+          </a:xfrm>
+          <a:prstGeom prst="rect">
+            <a:avLst/>
+          </a:prstGeom>
+          <a:noFill/>
+        </p:spPr>
+        <p:txBody>
+          <a:bodyPr wrap="square">
+            <a:spAutoFit/>
+          </a:bodyPr>
+          <a:lstStyle/>
+          <a:p>
+            <a:pPr>
+              <a:spcAft>
+                <a:spcPts val="700"/>
+              </a:spcAft>
+            </a:pPr>
+            <a:r>
+              <a:rPr sz="1700" b="1">
+                <a:solidFill>
+                  <a:srgbClr val="2E6DB4"/>
+                </a:solidFill>
+                <a:latin typeface="Calibri"/>
+              </a:rPr>
+              <a:t>•  Strangler Fig, not big-bang.</a:t>
+            </a:r>
+          </a:p>
+          <a:p>
+            <a:pPr lvl="1">
+              <a:spcAft>
+                <a:spcPts val="700"/>
+              </a:spcAft>
+            </a:pPr>
+            <a:r>
+              <a:rPr sz="1600" b="0">
+                <a:solidFill>
+                  <a:srgbClr val="1F3355"/>
+                </a:solidFill>
+                <a:latin typeface="Calibri"/>
+              </a:rPr>
+              <a:t>–  Migrate one bounded context at a time; keep it runnable at every step.</a:t>
+            </a:r>
+          </a:p>
+          <a:p>
+            <a:pPr>
+              <a:spcAft>
+                <a:spcPts val="700"/>
+              </a:spcAft>
+            </a:pPr>
+            <a:r>
+              <a:rPr sz="1700" b="1">
+                <a:solidFill>
+                  <a:srgbClr val="2E6DB4"/>
+                </a:solidFill>
+                <a:latin typeface="Calibri"/>
+              </a:rPr>
+              <a:t>•  Characterization tests FIRST.</a:t>
+            </a:r>
+          </a:p>
+          <a:p>
+            <a:pPr lvl="1">
+              <a:spcAft>
+                <a:spcPts val="700"/>
+              </a:spcAft>
+            </a:pPr>
+            <a:r>
+              <a:rPr sz="1600" b="0">
+                <a:solidFill>
+                  <a:srgbClr val="1F3355"/>
+                </a:solidFill>
+                <a:latin typeface="Calibri"/>
+              </a:rPr>
+              <a:t>–  Pin legacy behavior (incl. quirks) before touching it; migrate → green-or-rollback.</a:t>
+            </a:r>
+          </a:p>
+          <a:p>
+            <a:pPr>
+              <a:spcAft>
+                <a:spcPts val="700"/>
+              </a:spcAft>
+            </a:pPr>
+            <a:r>
+              <a:rPr sz="1700" b="1">
+                <a:solidFill>
+                  <a:srgbClr val="2E6DB4"/>
+                </a:solidFill>
+                <a:latin typeface="Calibri"/>
+              </a:rPr>
+              <a:t>•  Ports &amp; adapters (hexagonal).</a:t>
+            </a:r>
+          </a:p>
+          <a:p>
+            <a:pPr lvl="1">
+              <a:spcAft>
+                <a:spcPts val="700"/>
+              </a:spcAft>
+            </a:pPr>
+            <a:r>
+              <a:rPr sz="1600" b="0">
+                <a:solidFill>
+                  <a:srgbClr val="1F3355"/>
+                </a:solidFill>
+                <a:latin typeface="Calibri"/>
+              </a:rPr>
+              <a:t>–  Domain depends on interfaces; JPA / JMS / Mongo are swappable adapters.</a:t>
+            </a:r>
+          </a:p>
+          <a:p>
+            <a:pPr>
+              <a:spcAft>
+                <a:spcPts val="700"/>
+              </a:spcAft>
+            </a:pPr>
+            <a:r>
+              <a:rPr sz="1700" b="1">
+                <a:solidFill>
+                  <a:srgbClr val="2E6DB4"/>
+                </a:solidFill>
+                <a:latin typeface="Calibri"/>
+              </a:rPr>
+              <a:t>•  SOLID + ask before choosing a pattern.</a:t>
+            </a:r>
+          </a:p>
+          <a:p>
+            <a:pPr lvl="1">
+              <a:spcAft>
+                <a:spcPts val="700"/>
+              </a:spcAft>
+            </a:pPr>
+            <a:r>
+              <a:rPr sz="1600" b="0">
+                <a:solidFill>
+                  <a:srgbClr val="1F3355"/>
+                </a:solidFill>
+                <a:latin typeface="Calibri"/>
+              </a:rPr>
+              <a:t>–  Enum+guards over State pattern; thin controllers over Command — right-sized.</a:t>
+            </a:r>
+          </a:p>
+        </p:txBody>
+      </p:sp>
+      <p:sp>
+        <p:nvSpPr>
+          <p:cNvPr id="8" name="Rectangle 7"/>
+          <p:cNvSpPr/>
+          <p:nvPr/>
+        </p:nvSpPr>
+        <p:spPr>
+          <a:xfrm>
+            <a:off x="6537960" y="1371600"/>
+            <a:ext cx="5212080" cy="4480560"/>
+          </a:xfrm>
+          <a:prstGeom prst="rect">
+            <a:avLst/>
+          </a:prstGeom>
+          <a:solidFill>
+            <a:srgbClr val="F2F4F7"/>
+          </a:solidFill>
+          <a:ln>
+            <a:noFill/>
+          </a:ln>
+          <a:effectLst/>
+        </p:spPr>
+        <p:style>
+          <a:lnRef idx="1">
+            <a:schemeClr val="accent1"/>
+          </a:lnRef>
+          <a:fillRef idx="3">
+            <a:schemeClr val="accent1"/>
+          </a:fillRef>
+          <a:effectRef idx="2">
+            <a:schemeClr val="accent1"/>
+          </a:effectRef>
+          <a:fontRef idx="minor">
+            <a:schemeClr val="lt1"/>
+          </a:fontRef>
+        </p:style>
+        <p:txBody>
+          <a:bodyPr rtlCol="0" anchor="ctr"/>
+          <a:lstStyle/>
+          <a:p>
+            <a:pPr algn="ctr"/>
+          </a:p>
+        </p:txBody>
+      </p:sp>
+      <p:sp>
+        <p:nvSpPr>
+          <p:cNvPr id="9" name="TextBox 8"/>
+          <p:cNvSpPr txBox="1"/>
+          <p:nvPr/>
+        </p:nvSpPr>
+        <p:spPr>
+          <a:xfrm>
+            <a:off x="6766560" y="1508760"/>
+            <a:ext cx="4846320" cy="457200"/>
+          </a:xfrm>
+          <a:prstGeom prst="rect">
+            <a:avLst/>
+          </a:prstGeom>
+          <a:noFill/>
+        </p:spPr>
+        <p:txBody>
+          <a:bodyPr wrap="square" anchor="t">
+            <a:spAutoFit/>
+          </a:bodyPr>
+          <a:lstStyle/>
+          <a:p>
+            <a:pPr algn="l"/>
+            <a:r>
+              <a:rPr sz="1600" b="1">
+                <a:solidFill>
+                  <a:srgbClr val="1F3355"/>
+                </a:solidFill>
+                <a:latin typeface="Calibri"/>
+              </a:rPr>
+              <a:t>The safety net (quality gate)</a:t>
+            </a:r>
+          </a:p>
+        </p:txBody>
+      </p:sp>
+      <p:sp>
+        <p:nvSpPr>
+          <p:cNvPr id="10" name="TextBox 9"/>
+          <p:cNvSpPr txBox="1"/>
+          <p:nvPr/>
+        </p:nvSpPr>
+        <p:spPr>
+          <a:xfrm>
+            <a:off x="6766560" y="2057400"/>
+            <a:ext cx="4846320" cy="3657600"/>
+          </a:xfrm>
+          <a:prstGeom prst="rect">
+            <a:avLst/>
+          </a:prstGeom>
+          <a:noFill/>
+        </p:spPr>
+        <p:txBody>
+          <a:bodyPr wrap="square">
+            <a:spAutoFit/>
+          </a:bodyPr>
+          <a:lstStyle/>
+          <a:p>
+            <a:pPr>
+              <a:spcAft>
+                <a:spcPts val="900"/>
+              </a:spcAft>
+            </a:pPr>
+            <a:r>
+              <a:rPr sz="1300" b="0">
+                <a:solidFill>
+                  <a:srgbClr val="1F3355"/>
+                </a:solidFill>
+                <a:latin typeface="Calibri"/>
+              </a:rPr>
+              <a:t>•  Test pyramid: unit → @DataJpaTest slice → MockMvc → Testcontainers e2e.</a:t>
+            </a:r>
+          </a:p>
+          <a:p>
+            <a:pPr>
+              <a:spcAft>
+                <a:spcPts val="900"/>
+              </a:spcAft>
+            </a:pPr>
+            <a:r>
+              <a:rPr sz="1300" b="0">
+                <a:solidFill>
+                  <a:srgbClr val="B23A48"/>
+                </a:solidFill>
+                <a:latin typeface="Calibri"/>
+              </a:rPr>
+              <a:t>•  Golden-file message tests before any XML→JSON wire change.</a:t>
+            </a:r>
+          </a:p>
+          <a:p>
+            <a:pPr>
+              <a:spcAft>
+                <a:spcPts val="900"/>
+              </a:spcAft>
+            </a:pPr>
+            <a:r>
+              <a:rPr sz="1300" b="0">
+                <a:solidFill>
+                  <a:srgbClr val="1F3355"/>
+                </a:solidFill>
+                <a:latin typeface="Calibri"/>
+              </a:rPr>
+              <a:t>•  Idempotent @JmsListener — JMS is at-least-once.</a:t>
+            </a:r>
+          </a:p>
+          <a:p>
+            <a:pPr>
+              <a:spcAft>
+                <a:spcPts val="900"/>
+              </a:spcAft>
+            </a:pPr>
+            <a:r>
+              <a:rPr sz="1300" b="0">
+                <a:solidFill>
+                  <a:srgbClr val="1F3355"/>
+                </a:solidFill>
+                <a:latin typeface="Calibri"/>
+              </a:rPr>
+              <a:t>•  Parity audit: file-by-file legacy vs migrated (preserved/changed/missing).</a:t>
+            </a:r>
+          </a:p>
+          <a:p>
+            <a:pPr>
+              <a:spcAft>
+                <a:spcPts val="900"/>
+              </a:spcAft>
+            </a:pPr>
+            <a:r>
+              <a:rPr sz="1300" b="0">
+                <a:solidFill>
+                  <a:srgbClr val="1F3355"/>
+                </a:solidFill>
+                <a:latin typeface="Calibri"/>
+              </a:rPr>
+              <a:t>•  Commit only on green; a migration ledger tracks each module.</a:t>
+            </a:r>
+          </a:p>
+        </p:txBody>
+      </p:sp>
+    </p:spTree>
+  </p:cSld>
+  <p:clrMapOvr>
+    <a:masterClrMapping/>
+  </p:clrMapOvr>
+</p:sld>
+</file>
+
+<file path=ppt/slides/slide8.xml><?xml version="1.0" encoding="utf-8"?>
 <p:sld xmlns:a="http://schemas.openxmlformats.org/drawingml/2006/main" xmlns:p="http://schemas.openxmlformats.org/presentationml/2006/main" xmlns:r="http://schemas.openxmlformats.org/officeDocument/2006/relationships">
   <p:cSld>
     <p:spTree>
@@ -11355,7 +12857,7 @@
 </p:sld>
 </file>
 
-<file path=ppt/slides/slide8.xml><?xml version="1.0" encoding="utf-8"?>
+<file path=ppt/slides/slide9.xml><?xml version="1.0" encoding="utf-8"?>
 <p:sld xmlns:a="http://schemas.openxmlformats.org/drawingml/2006/main" xmlns:p="http://schemas.openxmlformats.org/presentationml/2006/main" xmlns:r="http://schemas.openxmlformats.org/officeDocument/2006/relationships">
   <p:cSld>
     <p:spTree>
@@ -12237,931 +13739,6 @@
 </p:sld>
 </file>
 
-<file path=ppt/slides/slide9.xml><?xml version="1.0" encoding="utf-8"?>
-<p:sld xmlns:a="http://schemas.openxmlformats.org/drawingml/2006/main" xmlns:p="http://schemas.openxmlformats.org/presentationml/2006/main" xmlns:r="http://schemas.openxmlformats.org/officeDocument/2006/relationships">
-  <p:cSld>
-    <p:spTree>
-      <p:nvGrpSpPr>
-        <p:cNvPr id="1" name=""/>
-        <p:cNvGrpSpPr/>
-        <p:nvPr/>
-      </p:nvGrpSpPr>
-      <p:grpSpPr/>
-      <p:sp>
-        <p:nvSpPr>
-          <p:cNvPr id="2" name="Rectangle 1"/>
-          <p:cNvSpPr/>
-          <p:nvPr/>
-        </p:nvSpPr>
-        <p:spPr>
-          <a:xfrm>
-            <a:off x="0" y="0"/>
-            <a:ext cx="12191695" cy="1051560"/>
-          </a:xfrm>
-          <a:prstGeom prst="rect">
-            <a:avLst/>
-          </a:prstGeom>
-          <a:solidFill>
-            <a:srgbClr val="1F3355"/>
-          </a:solidFill>
-          <a:ln>
-            <a:noFill/>
-          </a:ln>
-          <a:effectLst/>
-        </p:spPr>
-        <p:style>
-          <a:lnRef idx="1">
-            <a:schemeClr val="accent1"/>
-          </a:lnRef>
-          <a:fillRef idx="3">
-            <a:schemeClr val="accent1"/>
-          </a:fillRef>
-          <a:effectRef idx="2">
-            <a:schemeClr val="accent1"/>
-          </a:effectRef>
-          <a:fontRef idx="minor">
-            <a:schemeClr val="lt1"/>
-          </a:fontRef>
-        </p:style>
-        <p:txBody>
-          <a:bodyPr rtlCol="0" anchor="ctr"/>
-          <a:lstStyle/>
-          <a:p>
-            <a:pPr algn="ctr"/>
-          </a:p>
-        </p:txBody>
-      </p:sp>
-      <p:sp>
-        <p:nvSpPr>
-          <p:cNvPr id="3" name="Rectangle 2"/>
-          <p:cNvSpPr/>
-          <p:nvPr/>
-        </p:nvSpPr>
-        <p:spPr>
-          <a:xfrm>
-            <a:off x="10378440" y="274320"/>
-            <a:ext cx="1600200" cy="502920"/>
-          </a:xfrm>
-          <a:prstGeom prst="rect">
-            <a:avLst/>
-          </a:prstGeom>
-          <a:solidFill>
-            <a:srgbClr val="C97C2F"/>
-          </a:solidFill>
-          <a:ln>
-            <a:noFill/>
-          </a:ln>
-          <a:effectLst/>
-        </p:spPr>
-        <p:style>
-          <a:lnRef idx="1">
-            <a:schemeClr val="accent1"/>
-          </a:lnRef>
-          <a:fillRef idx="3">
-            <a:schemeClr val="accent1"/>
-          </a:fillRef>
-          <a:effectRef idx="2">
-            <a:schemeClr val="accent1"/>
-          </a:effectRef>
-          <a:fontRef idx="minor">
-            <a:schemeClr val="lt1"/>
-          </a:fontRef>
-        </p:style>
-        <p:txBody>
-          <a:bodyPr rtlCol="0" anchor="ctr"/>
-          <a:lstStyle/>
-          <a:p>
-            <a:pPr algn="ctr"/>
-          </a:p>
-        </p:txBody>
-      </p:sp>
-      <p:sp>
-        <p:nvSpPr>
-          <p:cNvPr id="4" name="TextBox 3"/>
-          <p:cNvSpPr txBox="1"/>
-          <p:nvPr/>
-        </p:nvSpPr>
-        <p:spPr>
-          <a:xfrm>
-            <a:off x="10378440" y="274320"/>
-            <a:ext cx="1600200" cy="502920"/>
-          </a:xfrm>
-          <a:prstGeom prst="rect">
-            <a:avLst/>
-          </a:prstGeom>
-          <a:noFill/>
-        </p:spPr>
-        <p:txBody>
-          <a:bodyPr wrap="square" anchor="ctr">
-            <a:spAutoFit/>
-          </a:bodyPr>
-          <a:lstStyle/>
-          <a:p>
-            <a:pPr algn="ctr"/>
-            <a:r>
-              <a:rPr sz="1300" b="1">
-                <a:solidFill>
-                  <a:srgbClr val="FFFFFF"/>
-                </a:solidFill>
-                <a:latin typeface="Calibri"/>
-              </a:rPr>
-              <a:t>4 min</a:t>
-            </a:r>
-          </a:p>
-        </p:txBody>
-      </p:sp>
-      <p:sp>
-        <p:nvSpPr>
-          <p:cNvPr id="5" name="TextBox 4"/>
-          <p:cNvSpPr txBox="1"/>
-          <p:nvPr/>
-        </p:nvSpPr>
-        <p:spPr>
-          <a:xfrm>
-            <a:off x="457200" y="109728"/>
-            <a:ext cx="9784080" cy="640080"/>
-          </a:xfrm>
-          <a:prstGeom prst="rect">
-            <a:avLst/>
-          </a:prstGeom>
-          <a:noFill/>
-        </p:spPr>
-        <p:txBody>
-          <a:bodyPr wrap="square" anchor="ctr">
-            <a:spAutoFit/>
-          </a:bodyPr>
-          <a:lstStyle/>
-          <a:p>
-            <a:pPr algn="l"/>
-            <a:r>
-              <a:rPr sz="2700" b="1">
-                <a:solidFill>
-                  <a:srgbClr val="FFFFFF"/>
-                </a:solidFill>
-                <a:latin typeface="Calibri"/>
-              </a:rPr>
-              <a:t>What We Fixed — Parity Audit</a:t>
-            </a:r>
-          </a:p>
-        </p:txBody>
-      </p:sp>
-      <p:sp>
-        <p:nvSpPr>
-          <p:cNvPr id="6" name="TextBox 5"/>
-          <p:cNvSpPr txBox="1"/>
-          <p:nvPr/>
-        </p:nvSpPr>
-        <p:spPr>
-          <a:xfrm>
-            <a:off x="457200" y="676656"/>
-            <a:ext cx="9784080" cy="320040"/>
-          </a:xfrm>
-          <a:prstGeom prst="rect">
-            <a:avLst/>
-          </a:prstGeom>
-          <a:noFill/>
-        </p:spPr>
-        <p:txBody>
-          <a:bodyPr wrap="square" anchor="t">
-            <a:spAutoFit/>
-          </a:bodyPr>
-          <a:lstStyle/>
-          <a:p>
-            <a:pPr algn="l"/>
-            <a:r>
-              <a:rPr sz="1300" b="0">
-                <a:solidFill>
-                  <a:srgbClr val="C5D3E6"/>
-                </a:solidFill>
-                <a:latin typeface="Calibri"/>
-              </a:rPr>
-              <a:t>File-by-file legacy vs migrated · 21 gaps found, all resolved</a:t>
-            </a:r>
-          </a:p>
-        </p:txBody>
-      </p:sp>
-      <p:graphicFrame>
-        <p:nvGraphicFramePr>
-          <p:cNvPr id="7" name="Table 6"/>
-          <p:cNvGraphicFramePr>
-            <a:graphicFrameLocks noGrp="1"/>
-          </p:cNvGraphicFramePr>
-          <p:nvPr/>
-        </p:nvGraphicFramePr>
-        <p:xfrm>
-          <a:off x="320040" y="1207008"/>
-          <a:ext cx="11567160" cy="4160520"/>
-        </p:xfrm>
-        <a:graphic>
-          <a:graphicData uri="http://schemas.openxmlformats.org/drawingml/2006/table">
-            <a:tbl>
-              <a:tblPr firstRow="1" bandRow="1">
-                <a:tableStyleId>{5C22544A-7EE6-4342-B048-85BDC9FD1C3A}</a:tableStyleId>
-              </a:tblPr>
-              <a:tblGrid>
-                <a:gridCol w="1005840"/>
-                <a:gridCol w="5623560"/>
-                <a:gridCol w="4937760"/>
-              </a:tblGrid>
-              <a:tr h="520065">
-                <a:tc>
-                  <a:txBody>
-                    <a:bodyPr/>
-                    <a:lstStyle/>
-                    <a:p>
-                      <a:pPr>
-                        <a:defRPr sz="1050" b="1">
-                          <a:solidFill>
-                            <a:srgbClr val="FFFFFF"/>
-                          </a:solidFill>
-                          <a:latin typeface="Calibri"/>
-                        </a:defRPr>
-                      </a:pPr>
-                      <a:r>
-                        <a:t>#</a:t>
-                      </a:r>
-                    </a:p>
-                  </a:txBody>
-                  <a:tcPr anchor="ctr" marT="25400" marB="25400" marL="63500" marR="63500">
-                    <a:solidFill>
-                      <a:srgbClr val="1F3355"/>
-                    </a:solidFill>
-                  </a:tcPr>
-                </a:tc>
-                <a:tc>
-                  <a:txBody>
-                    <a:bodyPr/>
-                    <a:lstStyle/>
-                    <a:p>
-                      <a:pPr>
-                        <a:defRPr sz="1050" b="1">
-                          <a:solidFill>
-                            <a:srgbClr val="FFFFFF"/>
-                          </a:solidFill>
-                          <a:latin typeface="Calibri"/>
-                        </a:defRPr>
-                      </a:pPr>
-                      <a:r>
-                        <a:t>Gap the audit found</a:t>
-                      </a:r>
-                    </a:p>
-                  </a:txBody>
-                  <a:tcPr anchor="ctr" marT="25400" marB="25400" marL="63500" marR="63500">
-                    <a:solidFill>
-                      <a:srgbClr val="1F3355"/>
-                    </a:solidFill>
-                  </a:tcPr>
-                </a:tc>
-                <a:tc>
-                  <a:txBody>
-                    <a:bodyPr/>
-                    <a:lstStyle/>
-                    <a:p>
-                      <a:pPr>
-                        <a:defRPr sz="1050" b="1">
-                          <a:solidFill>
-                            <a:srgbClr val="FFFFFF"/>
-                          </a:solidFill>
-                          <a:latin typeface="Calibri"/>
-                        </a:defRPr>
-                      </a:pPr>
-                      <a:r>
-                        <a:t>Resolution</a:t>
-                      </a:r>
-                    </a:p>
-                  </a:txBody>
-                  <a:tcPr anchor="ctr" marT="25400" marB="25400" marL="63500" marR="63500">
-                    <a:solidFill>
-                      <a:srgbClr val="1F3355"/>
-                    </a:solidFill>
-                  </a:tcPr>
-                </a:tc>
-              </a:tr>
-              <a:tr h="520065">
-                <a:tc>
-                  <a:txBody>
-                    <a:bodyPr/>
-                    <a:lstStyle/>
-                    <a:p>
-                      <a:pPr>
-                        <a:defRPr sz="1050">
-                          <a:solidFill>
-                            <a:srgbClr val="1F3355"/>
-                          </a:solidFill>
-                          <a:latin typeface="Calibri"/>
-                        </a:defRPr>
-                      </a:pPr>
-                      <a:r>
-                        <a:t>H2</a:t>
-                      </a:r>
-                    </a:p>
-                  </a:txBody>
-                  <a:tcPr anchor="ctr" marT="25400" marB="25400" marL="63500" marR="63500">
-                    <a:solidFill>
-                      <a:srgbClr val="FFFFFF"/>
-                    </a:solidFill>
-                  </a:tcPr>
-                </a:tc>
-                <a:tc>
-                  <a:txBody>
-                    <a:bodyPr/>
-                    <a:lstStyle/>
-                    <a:p>
-                      <a:pPr>
-                        <a:defRPr sz="1050">
-                          <a:solidFill>
-                            <a:srgbClr val="1F3355"/>
-                          </a:solidFill>
-                          <a:latin typeface="Calibri"/>
-                        </a:defRPr>
-                      </a:pPr>
-                      <a:r>
-                        <a:t>Backorder retry-on-restock dropped</a:t>
-                      </a:r>
-                    </a:p>
-                  </a:txBody>
-                  <a:tcPr anchor="ctr" marT="25400" marB="25400" marL="63500" marR="63500">
-                    <a:solidFill>
-                      <a:srgbClr val="FFFFFF"/>
-                    </a:solidFill>
-                  </a:tcPr>
-                </a:tc>
-                <a:tc>
-                  <a:txBody>
-                    <a:bodyPr/>
-                    <a:lstStyle/>
-                    <a:p>
-                      <a:pPr>
-                        <a:defRPr sz="1050">
-                          <a:solidFill>
-                            <a:srgbClr val="1F3355"/>
-                          </a:solidFill>
-                          <a:latin typeface="Calibri"/>
-                        </a:defRPr>
-                      </a:pPr>
-                      <a:r>
-                        <a:t>RESTORED event-driven: RestockEvent → OPC re-drives APPROVED backorders</a:t>
-                      </a:r>
-                    </a:p>
-                  </a:txBody>
-                  <a:tcPr anchor="ctr" marT="25400" marB="25400" marL="63500" marR="63500">
-                    <a:solidFill>
-                      <a:srgbClr val="FFFFFF"/>
-                    </a:solidFill>
-                  </a:tcPr>
-                </a:tc>
-              </a:tr>
-              <a:tr h="520065">
-                <a:tc>
-                  <a:txBody>
-                    <a:bodyPr/>
-                    <a:lstStyle/>
-                    <a:p>
-                      <a:pPr>
-                        <a:defRPr sz="1050">
-                          <a:solidFill>
-                            <a:srgbClr val="1F3355"/>
-                          </a:solidFill>
-                          <a:latin typeface="Calibri"/>
-                        </a:defRPr>
-                      </a:pPr>
-                      <a:r>
-                        <a:t>H3/H4</a:t>
-                      </a:r>
-                    </a:p>
-                  </a:txBody>
-                  <a:tcPr anchor="ctr" marT="25400" marB="25400" marL="63500" marR="63500">
-                    <a:solidFill>
-                      <a:srgbClr val="F2F4F7"/>
-                    </a:solidFill>
-                  </a:tcPr>
-                </a:tc>
-                <a:tc>
-                  <a:txBody>
-                    <a:bodyPr/>
-                    <a:lstStyle/>
-                    <a:p>
-                      <a:pPr>
-                        <a:defRPr sz="1050">
-                          <a:solidFill>
-                            <a:srgbClr val="1F3355"/>
-                          </a:solidFill>
-                          <a:latin typeface="Calibri"/>
-                        </a:defRPr>
-                      </a:pPr>
-                      <a:r>
-                        <a:t>Approval / denial / COMPLETED emails missing</a:t>
-                      </a:r>
-                    </a:p>
-                  </a:txBody>
-                  <a:tcPr anchor="ctr" marT="25400" marB="25400" marL="63500" marR="63500">
-                    <a:solidFill>
-                      <a:srgbClr val="F2F4F7"/>
-                    </a:solidFill>
-                  </a:tcPr>
-                </a:tc>
-                <a:tc>
-                  <a:txBody>
-                    <a:bodyPr/>
-                    <a:lstStyle/>
-                    <a:p>
-                      <a:pPr>
-                        <a:defRPr sz="1050">
-                          <a:solidFill>
-                            <a:srgbClr val="1F3355"/>
-                          </a:solidFill>
-                          <a:latin typeface="Calibri"/>
-                        </a:defRPr>
-                      </a:pPr>
-                      <a:r>
-                        <a:t>OrderStatusTopic → notification-service emails restored</a:t>
-                      </a:r>
-                    </a:p>
-                  </a:txBody>
-                  <a:tcPr anchor="ctr" marT="25400" marB="25400" marL="63500" marR="63500">
-                    <a:solidFill>
-                      <a:srgbClr val="F2F4F7"/>
-                    </a:solidFill>
-                  </a:tcPr>
-                </a:tc>
-              </a:tr>
-              <a:tr h="520065">
-                <a:tc>
-                  <a:txBody>
-                    <a:bodyPr/>
-                    <a:lstStyle/>
-                    <a:p>
-                      <a:pPr>
-                        <a:defRPr sz="1050">
-                          <a:solidFill>
-                            <a:srgbClr val="1F3355"/>
-                          </a:solidFill>
-                          <a:latin typeface="Calibri"/>
-                        </a:defRPr>
-                      </a:pPr>
-                      <a:r>
-                        <a:t>H5</a:t>
-                      </a:r>
-                    </a:p>
-                  </a:txBody>
-                  <a:tcPr anchor="ctr" marT="25400" marB="25400" marL="63500" marR="63500">
-                    <a:solidFill>
-                      <a:srgbClr val="FFFFFF"/>
-                    </a:solidFill>
-                  </a:tcPr>
-                </a:tc>
-                <a:tc>
-                  <a:txBody>
-                    <a:bodyPr/>
-                    <a:lstStyle/>
-                    <a:p>
-                      <a:pPr>
-                        <a:defRPr sz="1050">
-                          <a:solidFill>
-                            <a:srgbClr val="1F3355"/>
-                          </a:solidFill>
-                          <a:latin typeface="Calibri"/>
-                        </a:defRPr>
-                      </a:pPr>
-                      <a:r>
-                        <a:t>Sales/revenue aggregation gone</a:t>
-                      </a:r>
-                    </a:p>
-                  </a:txBody>
-                  <a:tcPr anchor="ctr" marT="25400" marB="25400" marL="63500" marR="63500">
-                    <a:solidFill>
-                      <a:srgbClr val="FFFFFF"/>
-                    </a:solidFill>
-                  </a:tcPr>
-                </a:tc>
-                <a:tc>
-                  <a:txBody>
-                    <a:bodyPr/>
-                    <a:lstStyle/>
-                    <a:p>
-                      <a:pPr>
-                        <a:defRPr sz="1050">
-                          <a:solidFill>
-                            <a:srgbClr val="1F3355"/>
-                          </a:solidFill>
-                          <a:latin typeface="Calibri"/>
-                        </a:defRPr>
-                      </a:pPr>
-                      <a:r>
-                        <a:t>OPC aggregateSales() + GET /api/sales; admin delegates</a:t>
-                      </a:r>
-                    </a:p>
-                  </a:txBody>
-                  <a:tcPr anchor="ctr" marT="25400" marB="25400" marL="63500" marR="63500">
-                    <a:solidFill>
-                      <a:srgbClr val="FFFFFF"/>
-                    </a:solidFill>
-                  </a:tcPr>
-                </a:tc>
-              </a:tr>
-              <a:tr h="520065">
-                <a:tc>
-                  <a:txBody>
-                    <a:bodyPr/>
-                    <a:lstStyle/>
-                    <a:p>
-                      <a:pPr>
-                        <a:defRPr sz="1050">
-                          <a:solidFill>
-                            <a:srgbClr val="1F3355"/>
-                          </a:solidFill>
-                          <a:latin typeface="Calibri"/>
-                        </a:defRPr>
-                      </a:pPr>
-                      <a:r>
-                        <a:t>H6</a:t>
-                      </a:r>
-                    </a:p>
-                  </a:txBody>
-                  <a:tcPr anchor="ctr" marT="25400" marB="25400" marL="63500" marR="63500">
-                    <a:solidFill>
-                      <a:srgbClr val="F2F4F7"/>
-                    </a:solidFill>
-                  </a:tcPr>
-                </a:tc>
-                <a:tc>
-                  <a:txBody>
-                    <a:bodyPr/>
-                    <a:lstStyle/>
-                    <a:p>
-                      <a:pPr>
-                        <a:defRPr sz="1050">
-                          <a:solidFill>
-                            <a:srgbClr val="1F3355"/>
-                          </a:solidFill>
-                          <a:latin typeface="Calibri"/>
-                        </a:defRPr>
-                      </a:pPr>
-                      <a:r>
-                        <a:t>Catalog search semantics changed</a:t>
-                      </a:r>
-                    </a:p>
-                  </a:txBody>
-                  <a:tcPr anchor="ctr" marT="25400" marB="25400" marL="63500" marR="63500">
-                    <a:solidFill>
-                      <a:srgbClr val="F2F4F7"/>
-                    </a:solidFill>
-                  </a:tcPr>
-                </a:tc>
-                <a:tc>
-                  <a:txBody>
-                    <a:bodyPr/>
-                    <a:lstStyle/>
-                    <a:p>
-                      <a:pPr>
-                        <a:defRPr sz="1050">
-                          <a:solidFill>
-                            <a:srgbClr val="1F3355"/>
-                          </a:solidFill>
-                          <a:latin typeface="Calibri"/>
-                        </a:defRPr>
-                      </a:pPr>
-                      <a:r>
-                        <a:t>Restored tokenized multi-field LIKE search</a:t>
-                      </a:r>
-                    </a:p>
-                  </a:txBody>
-                  <a:tcPr anchor="ctr" marT="25400" marB="25400" marL="63500" marR="63500">
-                    <a:solidFill>
-                      <a:srgbClr val="F2F4F7"/>
-                    </a:solidFill>
-                  </a:tcPr>
-                </a:tc>
-              </a:tr>
-              <a:tr h="520065">
-                <a:tc>
-                  <a:txBody>
-                    <a:bodyPr/>
-                    <a:lstStyle/>
-                    <a:p>
-                      <a:pPr>
-                        <a:defRPr sz="1050">
-                          <a:solidFill>
-                            <a:srgbClr val="1F3355"/>
-                          </a:solidFill>
-                          <a:latin typeface="Calibri"/>
-                        </a:defRPr>
-                      </a:pPr>
-                      <a:r>
-                        <a:t>H7</a:t>
-                      </a:r>
-                    </a:p>
-                  </a:txBody>
-                  <a:tcPr anchor="ctr" marT="25400" marB="25400" marL="63500" marR="63500">
-                    <a:solidFill>
-                      <a:srgbClr val="FFFFFF"/>
-                    </a:solidFill>
-                  </a:tcPr>
-                </a:tc>
-                <a:tc>
-                  <a:txBody>
-                    <a:bodyPr/>
-                    <a:lstStyle/>
-                    <a:p>
-                      <a:pPr>
-                        <a:defRPr sz="1050">
-                          <a:solidFill>
-                            <a:srgbClr val="1F3355"/>
-                          </a:solidFill>
-                          <a:latin typeface="Calibri"/>
-                        </a:defRPr>
-                      </a:pPr>
-                      <a:r>
-                        <a:t>Ship/bill address collection + validation lost</a:t>
-                      </a:r>
-                    </a:p>
-                  </a:txBody>
-                  <a:tcPr anchor="ctr" marT="25400" marB="25400" marL="63500" marR="63500">
-                    <a:solidFill>
-                      <a:srgbClr val="FFFFFF"/>
-                    </a:solidFill>
-                  </a:tcPr>
-                </a:tc>
-                <a:tc>
-                  <a:txBody>
-                    <a:bodyPr/>
-                    <a:lstStyle/>
-                    <a:p>
-                      <a:pPr>
-                        <a:defRPr sz="1050">
-                          <a:solidFill>
-                            <a:srgbClr val="1F3355"/>
-                          </a:solidFill>
-                          <a:latin typeface="Calibri"/>
-                        </a:defRPr>
-                      </a:pPr>
-                      <a:r>
-                        <a:t>Both addresses collected + validated; persisted on order</a:t>
-                      </a:r>
-                    </a:p>
-                  </a:txBody>
-                  <a:tcPr anchor="ctr" marT="25400" marB="25400" marL="63500" marR="63500">
-                    <a:solidFill>
-                      <a:srgbClr val="FFFFFF"/>
-                    </a:solidFill>
-                  </a:tcPr>
-                </a:tc>
-              </a:tr>
-              <a:tr h="520065">
-                <a:tc>
-                  <a:txBody>
-                    <a:bodyPr/>
-                    <a:lstStyle/>
-                    <a:p>
-                      <a:pPr>
-                        <a:defRPr sz="1050">
-                          <a:solidFill>
-                            <a:srgbClr val="1F3355"/>
-                          </a:solidFill>
-                          <a:latin typeface="Calibri"/>
-                        </a:defRPr>
-                      </a:pPr>
-                      <a:r>
-                        <a:t>H8/H9</a:t>
-                      </a:r>
-                    </a:p>
-                  </a:txBody>
-                  <a:tcPr anchor="ctr" marT="25400" marB="25400" marL="63500" marR="63500">
-                    <a:solidFill>
-                      <a:srgbClr val="F2F4F7"/>
-                    </a:solidFill>
-                  </a:tcPr>
-                </a:tc>
-                <a:tc>
-                  <a:txBody>
-                    <a:bodyPr/>
-                    <a:lstStyle/>
-                    <a:p>
-                      <a:pPr>
-                        <a:defRPr sz="1050">
-                          <a:solidFill>
-                            <a:srgbClr val="1F3355"/>
-                          </a:solidFill>
-                          <a:latin typeface="Calibri"/>
-                        </a:defRPr>
-                      </a:pPr>
-                      <a:r>
-                        <a:t>New-customer profile defaults + sign-on locale</a:t>
-                      </a:r>
-                    </a:p>
-                  </a:txBody>
-                  <a:tcPr anchor="ctr" marT="25400" marB="25400" marL="63500" marR="63500">
-                    <a:solidFill>
-                      <a:srgbClr val="F2F4F7"/>
-                    </a:solidFill>
-                  </a:tcPr>
-                </a:tc>
-                <a:tc>
-                  <a:txBody>
-                    <a:bodyPr/>
-                    <a:lstStyle/>
-                    <a:p>
-                      <a:pPr>
-                        <a:defRPr sz="1050">
-                          <a:solidFill>
-                            <a:srgbClr val="1F3355"/>
-                          </a:solidFill>
-                          <a:latin typeface="Calibri"/>
-                        </a:defRPr>
-                      </a:pPr>
-                      <a:r>
-                        <a:t>Legacy defaults restored; preferredLanguage applied on login</a:t>
-                      </a:r>
-                    </a:p>
-                  </a:txBody>
-                  <a:tcPr anchor="ctr" marT="25400" marB="25400" marL="63500" marR="63500">
-                    <a:solidFill>
-                      <a:srgbClr val="F2F4F7"/>
-                    </a:solidFill>
-                  </a:tcPr>
-                </a:tc>
-              </a:tr>
-              <a:tr h="520065">
-                <a:tc>
-                  <a:txBody>
-                    <a:bodyPr/>
-                    <a:lstStyle/>
-                    <a:p>
-                      <a:pPr>
-                        <a:defRPr sz="1050">
-                          <a:solidFill>
-                            <a:srgbClr val="1F3355"/>
-                          </a:solidFill>
-                          <a:latin typeface="Calibri"/>
-                        </a:defRPr>
-                      </a:pPr>
-                      <a:r>
-                        <a:t>M1–M7</a:t>
-                      </a:r>
-                    </a:p>
-                  </a:txBody>
-                  <a:tcPr anchor="ctr" marT="25400" marB="25400" marL="63500" marR="63500">
-                    <a:solidFill>
-                      <a:srgbClr val="FFFFFF"/>
-                    </a:solidFill>
-                  </a:tcPr>
-                </a:tc>
-                <a:tc>
-                  <a:txBody>
-                    <a:bodyPr/>
-                    <a:lstStyle/>
-                    <a:p>
-                      <a:pPr>
-                        <a:defRPr sz="1050">
-                          <a:solidFill>
-                            <a:srgbClr val="1F3355"/>
-                          </a:solidFill>
-                          <a:latin typeface="Calibri"/>
-                        </a:defRPr>
-                      </a:pPr>
-                      <a:r>
-                        <a:t>Ordering, getItem.category, batch approval, etc.</a:t>
-                      </a:r>
-                    </a:p>
-                  </a:txBody>
-                  <a:tcPr anchor="ctr" marT="25400" marB="25400" marL="63500" marR="63500">
-                    <a:solidFill>
-                      <a:srgbClr val="FFFFFF"/>
-                    </a:solidFill>
-                  </a:tcPr>
-                </a:tc>
-                <a:tc>
-                  <a:txBody>
-                    <a:bodyPr/>
-                    <a:lstStyle/>
-                    <a:p>
-                      <a:pPr>
-                        <a:defRPr sz="1050">
-                          <a:solidFill>
-                            <a:srgbClr val="1F3355"/>
-                          </a:solidFill>
-                          <a:latin typeface="Calibri"/>
-                        </a:defRPr>
-                      </a:pPr>
-                      <a:r>
-                        <a:t>All restored (see PARITY_AUDIT.md)</a:t>
-                      </a:r>
-                    </a:p>
-                  </a:txBody>
-                  <a:tcPr anchor="ctr" marT="25400" marB="25400" marL="63500" marR="63500">
-                    <a:solidFill>
-                      <a:srgbClr val="FFFFFF"/>
-                    </a:solidFill>
-                  </a:tcPr>
-                </a:tc>
-              </a:tr>
-            </a:tbl>
-          </a:graphicData>
-        </a:graphic>
-      </p:graphicFrame>
-      <p:sp>
-        <p:nvSpPr>
-          <p:cNvPr id="8" name="Rectangle 7"/>
-          <p:cNvSpPr/>
-          <p:nvPr/>
-        </p:nvSpPr>
-        <p:spPr>
-          <a:xfrm>
-            <a:off x="320040" y="5532120"/>
-            <a:ext cx="11567160" cy="960120"/>
-          </a:xfrm>
-          <a:prstGeom prst="rect">
-            <a:avLst/>
-          </a:prstGeom>
-          <a:solidFill>
-            <a:srgbClr val="F2F4F7"/>
-          </a:solidFill>
-          <a:ln>
-            <a:noFill/>
-          </a:ln>
-          <a:effectLst/>
-        </p:spPr>
-        <p:style>
-          <a:lnRef idx="1">
-            <a:schemeClr val="accent1"/>
-          </a:lnRef>
-          <a:fillRef idx="3">
-            <a:schemeClr val="accent1"/>
-          </a:fillRef>
-          <a:effectRef idx="2">
-            <a:schemeClr val="accent1"/>
-          </a:effectRef>
-          <a:fontRef idx="minor">
-            <a:schemeClr val="lt1"/>
-          </a:fontRef>
-        </p:style>
-        <p:txBody>
-          <a:bodyPr rtlCol="0" anchor="ctr"/>
-          <a:lstStyle/>
-          <a:p>
-            <a:pPr algn="ctr"/>
-          </a:p>
-        </p:txBody>
-      </p:sp>
-      <p:sp>
-        <p:nvSpPr>
-          <p:cNvPr id="9" name="TextBox 8"/>
-          <p:cNvSpPr txBox="1"/>
-          <p:nvPr/>
-        </p:nvSpPr>
-        <p:spPr>
-          <a:xfrm>
-            <a:off x="502920" y="5623560"/>
-            <a:ext cx="11155680" cy="822960"/>
-          </a:xfrm>
-          <a:prstGeom prst="rect">
-            <a:avLst/>
-          </a:prstGeom>
-          <a:noFill/>
-        </p:spPr>
-        <p:txBody>
-          <a:bodyPr wrap="square" anchor="t">
-            <a:spAutoFit/>
-          </a:bodyPr>
-          <a:lstStyle/>
-          <a:p>
-            <a:pPr algn="l">
-              <a:spcAft>
-                <a:spcPts val="300"/>
-              </a:spcAft>
-            </a:pPr>
-            <a:r>
-              <a:rPr sz="1300" b="1">
-                <a:solidFill>
-                  <a:srgbClr val="1F3355"/>
-                </a:solidFill>
-                <a:latin typeface="Calibri"/>
-              </a:rPr>
-              <a:t>Kept intentional (recorded in DECISIONS.md): H1 all-or-nothing fulfilment · M8 no persisted supplier PO.</a:t>
-            </a:r>
-          </a:p>
-          <a:p>
-            <a:pPr algn="l"/>
-            <a:r>
-              <a:rPr sz="1200" b="0">
-                <a:solidFill>
-                  <a:srgbClr val="B23A48"/>
-                </a:solidFill>
-                <a:latin typeface="Calibri"/>
-              </a:rPr>
-              <a:t>Two bugs caught by LIVE end-to-end testing (not unit tests): large orders auto-shipped without approval; approve→fulfil race (published before commit). Both fixed + regression-tested.</a:t>
-            </a:r>
-          </a:p>
-        </p:txBody>
-      </p:sp>
-    </p:spTree>
-  </p:cSld>
-  <p:clrMapOvr>
-    <a:masterClrMapping/>
-  </p:clrMapOvr>
-</p:sld>
-</file>
-
 <file path=ppt/theme/theme1.xml><?xml version="1.0" encoding="utf-8"?>
 <a:theme xmlns:a="http://schemas.openxmlformats.org/drawingml/2006/main" name="Office Theme">
   <a:themeElements>

--- a/docs/PetStore_Demo_45min.pptx
+++ b/docs/PetStore_Demo_45min.pptx
@@ -5923,86 +5923,7 @@
       </p:sp>
       <p:sp>
         <p:nvSpPr>
-          <p:cNvPr id="3" name="Rectangle 2"/>
-          <p:cNvSpPr/>
-          <p:nvPr/>
-        </p:nvSpPr>
-        <p:spPr>
-          <a:xfrm>
-            <a:off x="10378440" y="274320"/>
-            <a:ext cx="1600200" cy="502920"/>
-          </a:xfrm>
-          <a:prstGeom prst="rect">
-            <a:avLst/>
-          </a:prstGeom>
-          <a:solidFill>
-            <a:srgbClr val="C97C2F"/>
-          </a:solidFill>
-          <a:ln>
-            <a:noFill/>
-          </a:ln>
-          <a:effectLst/>
-        </p:spPr>
-        <p:style>
-          <a:lnRef idx="1">
-            <a:schemeClr val="accent1"/>
-          </a:lnRef>
-          <a:fillRef idx="3">
-            <a:schemeClr val="accent1"/>
-          </a:fillRef>
-          <a:effectRef idx="2">
-            <a:schemeClr val="accent1"/>
-          </a:effectRef>
-          <a:fontRef idx="minor">
-            <a:schemeClr val="lt1"/>
-          </a:fontRef>
-        </p:style>
-        <p:txBody>
-          <a:bodyPr rtlCol="0" anchor="ctr"/>
-          <a:lstStyle/>
-          <a:p>
-            <a:pPr algn="ctr"/>
-          </a:p>
-        </p:txBody>
-      </p:sp>
-      <p:sp>
-        <p:nvSpPr>
-          <p:cNvPr id="4" name="TextBox 3"/>
-          <p:cNvSpPr txBox="1"/>
-          <p:nvPr/>
-        </p:nvSpPr>
-        <p:spPr>
-          <a:xfrm>
-            <a:off x="10378440" y="274320"/>
-            <a:ext cx="1600200" cy="502920"/>
-          </a:xfrm>
-          <a:prstGeom prst="rect">
-            <a:avLst/>
-          </a:prstGeom>
-          <a:noFill/>
-        </p:spPr>
-        <p:txBody>
-          <a:bodyPr wrap="square" anchor="ctr">
-            <a:spAutoFit/>
-          </a:bodyPr>
-          <a:lstStyle/>
-          <a:p>
-            <a:pPr algn="ctr"/>
-            <a:r>
-              <a:rPr sz="1300" b="1">
-                <a:solidFill>
-                  <a:srgbClr val="FFFFFF"/>
-                </a:solidFill>
-                <a:latin typeface="Calibri"/>
-              </a:rPr>
-              <a:t>3 min</a:t>
-            </a:r>
-          </a:p>
-        </p:txBody>
-      </p:sp>
-      <p:sp>
-        <p:nvSpPr>
-          <p:cNvPr id="5" name="TextBox 4"/>
+          <p:cNvPr id="3" name="TextBox 2"/>
           <p:cNvSpPr txBox="1"/>
           <p:nvPr/>
         </p:nvSpPr>
@@ -6037,7 +5958,7 @@
       </p:sp>
       <p:sp>
         <p:nvSpPr>
-          <p:cNvPr id="6" name="TextBox 5"/>
+          <p:cNvPr id="4" name="TextBox 3"/>
           <p:cNvSpPr txBox="1"/>
           <p:nvPr/>
         </p:nvSpPr>
@@ -6072,7 +5993,7 @@
       </p:sp>
       <p:sp>
         <p:nvSpPr>
-          <p:cNvPr id="7" name="TextBox 6"/>
+          <p:cNvPr id="5" name="TextBox 4"/>
           <p:cNvSpPr txBox="1"/>
           <p:nvPr/>
         </p:nvSpPr>
@@ -6223,7 +6144,7 @@
       </p:sp>
       <p:sp>
         <p:nvSpPr>
-          <p:cNvPr id="8" name="Rectangle 7"/>
+          <p:cNvPr id="6" name="Rectangle 5"/>
           <p:cNvSpPr/>
           <p:nvPr/>
         </p:nvSpPr>
@@ -6267,7 +6188,7 @@
       </p:sp>
       <p:sp>
         <p:nvSpPr>
-          <p:cNvPr id="9" name="TextBox 8"/>
+          <p:cNvPr id="7" name="TextBox 6"/>
           <p:cNvSpPr txBox="1"/>
           <p:nvPr/>
         </p:nvSpPr>
@@ -6302,7 +6223,7 @@
       </p:sp>
       <p:sp>
         <p:nvSpPr>
-          <p:cNvPr id="10" name="TextBox 9"/>
+          <p:cNvPr id="8" name="TextBox 7"/>
           <p:cNvSpPr txBox="1"/>
           <p:nvPr/>
         </p:nvSpPr>
@@ -6467,86 +6388,7 @@
       </p:sp>
       <p:sp>
         <p:nvSpPr>
-          <p:cNvPr id="3" name="Rectangle 2"/>
-          <p:cNvSpPr/>
-          <p:nvPr/>
-        </p:nvSpPr>
-        <p:spPr>
-          <a:xfrm>
-            <a:off x="10378440" y="274320"/>
-            <a:ext cx="1600200" cy="502920"/>
-          </a:xfrm>
-          <a:prstGeom prst="rect">
-            <a:avLst/>
-          </a:prstGeom>
-          <a:solidFill>
-            <a:srgbClr val="C97C2F"/>
-          </a:solidFill>
-          <a:ln>
-            <a:noFill/>
-          </a:ln>
-          <a:effectLst/>
-        </p:spPr>
-        <p:style>
-          <a:lnRef idx="1">
-            <a:schemeClr val="accent1"/>
-          </a:lnRef>
-          <a:fillRef idx="3">
-            <a:schemeClr val="accent1"/>
-          </a:fillRef>
-          <a:effectRef idx="2">
-            <a:schemeClr val="accent1"/>
-          </a:effectRef>
-          <a:fontRef idx="minor">
-            <a:schemeClr val="lt1"/>
-          </a:fontRef>
-        </p:style>
-        <p:txBody>
-          <a:bodyPr rtlCol="0" anchor="ctr"/>
-          <a:lstStyle/>
-          <a:p>
-            <a:pPr algn="ctr"/>
-          </a:p>
-        </p:txBody>
-      </p:sp>
-      <p:sp>
-        <p:nvSpPr>
-          <p:cNvPr id="4" name="TextBox 3"/>
-          <p:cNvSpPr txBox="1"/>
-          <p:nvPr/>
-        </p:nvSpPr>
-        <p:spPr>
-          <a:xfrm>
-            <a:off x="10378440" y="274320"/>
-            <a:ext cx="1600200" cy="502920"/>
-          </a:xfrm>
-          <a:prstGeom prst="rect">
-            <a:avLst/>
-          </a:prstGeom>
-          <a:noFill/>
-        </p:spPr>
-        <p:txBody>
-          <a:bodyPr wrap="square" anchor="ctr">
-            <a:spAutoFit/>
-          </a:bodyPr>
-          <a:lstStyle/>
-          <a:p>
-            <a:pPr algn="ctr"/>
-            <a:r>
-              <a:rPr sz="1300" b="1">
-                <a:solidFill>
-                  <a:srgbClr val="FFFFFF"/>
-                </a:solidFill>
-                <a:latin typeface="Calibri"/>
-              </a:rPr>
-              <a:t>5 min</a:t>
-            </a:r>
-          </a:p>
-        </p:txBody>
-      </p:sp>
-      <p:sp>
-        <p:nvSpPr>
-          <p:cNvPr id="5" name="TextBox 4"/>
+          <p:cNvPr id="3" name="TextBox 2"/>
           <p:cNvSpPr txBox="1"/>
           <p:nvPr/>
         </p:nvSpPr>
@@ -6581,7 +6423,7 @@
       </p:sp>
       <p:sp>
         <p:nvSpPr>
-          <p:cNvPr id="6" name="TextBox 5"/>
+          <p:cNvPr id="4" name="TextBox 3"/>
           <p:cNvSpPr txBox="1"/>
           <p:nvPr/>
         </p:nvSpPr>
@@ -6616,7 +6458,7 @@
       </p:sp>
       <p:graphicFrame>
         <p:nvGraphicFramePr>
-          <p:cNvPr id="7" name="Table 6"/>
+          <p:cNvPr id="5" name="Table 4"/>
           <p:cNvGraphicFramePr>
             <a:graphicFrameLocks noGrp="1"/>
           </p:cNvGraphicFramePr>
@@ -7309,7 +7151,7 @@
       </p:graphicFrame>
       <p:sp>
         <p:nvSpPr>
-          <p:cNvPr id="8" name="TextBox 7"/>
+          <p:cNvPr id="6" name="TextBox 5"/>
           <p:cNvSpPr txBox="1"/>
           <p:nvPr/>
         </p:nvSpPr>
@@ -7406,86 +7248,7 @@
       </p:sp>
       <p:sp>
         <p:nvSpPr>
-          <p:cNvPr id="3" name="Rectangle 2"/>
-          <p:cNvSpPr/>
-          <p:nvPr/>
-        </p:nvSpPr>
-        <p:spPr>
-          <a:xfrm>
-            <a:off x="10378440" y="274320"/>
-            <a:ext cx="1600200" cy="502920"/>
-          </a:xfrm>
-          <a:prstGeom prst="rect">
-            <a:avLst/>
-          </a:prstGeom>
-          <a:solidFill>
-            <a:srgbClr val="C97C2F"/>
-          </a:solidFill>
-          <a:ln>
-            <a:noFill/>
-          </a:ln>
-          <a:effectLst/>
-        </p:spPr>
-        <p:style>
-          <a:lnRef idx="1">
-            <a:schemeClr val="accent1"/>
-          </a:lnRef>
-          <a:fillRef idx="3">
-            <a:schemeClr val="accent1"/>
-          </a:fillRef>
-          <a:effectRef idx="2">
-            <a:schemeClr val="accent1"/>
-          </a:effectRef>
-          <a:fontRef idx="minor">
-            <a:schemeClr val="lt1"/>
-          </a:fontRef>
-        </p:style>
-        <p:txBody>
-          <a:bodyPr rtlCol="0" anchor="ctr"/>
-          <a:lstStyle/>
-          <a:p>
-            <a:pPr algn="ctr"/>
-          </a:p>
-        </p:txBody>
-      </p:sp>
-      <p:sp>
-        <p:nvSpPr>
-          <p:cNvPr id="4" name="TextBox 3"/>
-          <p:cNvSpPr txBox="1"/>
-          <p:nvPr/>
-        </p:nvSpPr>
-        <p:spPr>
-          <a:xfrm>
-            <a:off x="10378440" y="274320"/>
-            <a:ext cx="1600200" cy="502920"/>
-          </a:xfrm>
-          <a:prstGeom prst="rect">
-            <a:avLst/>
-          </a:prstGeom>
-          <a:noFill/>
-        </p:spPr>
-        <p:txBody>
-          <a:bodyPr wrap="square" anchor="ctr">
-            <a:spAutoFit/>
-          </a:bodyPr>
-          <a:lstStyle/>
-          <a:p>
-            <a:pPr algn="ctr"/>
-            <a:r>
-              <a:rPr sz="1300" b="1">
-                <a:solidFill>
-                  <a:srgbClr val="FFFFFF"/>
-                </a:solidFill>
-                <a:latin typeface="Calibri"/>
-              </a:rPr>
-              <a:t>4 min</a:t>
-            </a:r>
-          </a:p>
-        </p:txBody>
-      </p:sp>
-      <p:sp>
-        <p:nvSpPr>
-          <p:cNvPr id="5" name="TextBox 4"/>
+          <p:cNvPr id="3" name="TextBox 2"/>
           <p:cNvSpPr txBox="1"/>
           <p:nvPr/>
         </p:nvSpPr>
@@ -7520,7 +7283,7 @@
       </p:sp>
       <p:sp>
         <p:nvSpPr>
-          <p:cNvPr id="6" name="TextBox 5"/>
+          <p:cNvPr id="4" name="TextBox 3"/>
           <p:cNvSpPr txBox="1"/>
           <p:nvPr/>
         </p:nvSpPr>
@@ -7555,7 +7318,7 @@
       </p:sp>
       <p:sp>
         <p:nvSpPr>
-          <p:cNvPr id="7" name="TextBox 6"/>
+          <p:cNvPr id="5" name="TextBox 4"/>
           <p:cNvSpPr txBox="1"/>
           <p:nvPr/>
         </p:nvSpPr>
@@ -7590,7 +7353,7 @@
       </p:sp>
       <p:graphicFrame>
         <p:nvGraphicFramePr>
-          <p:cNvPr id="8" name="Table 7"/>
+          <p:cNvPr id="6" name="Table 5"/>
           <p:cNvGraphicFramePr>
             <a:graphicFrameLocks noGrp="1"/>
           </p:cNvGraphicFramePr>
@@ -8061,7 +7824,7 @@
       </p:graphicFrame>
       <p:sp>
         <p:nvSpPr>
-          <p:cNvPr id="9" name="Rectangle 8"/>
+          <p:cNvPr id="7" name="Rectangle 6"/>
           <p:cNvSpPr/>
           <p:nvPr/>
         </p:nvSpPr>
@@ -8105,7 +7868,7 @@
       </p:sp>
       <p:sp>
         <p:nvSpPr>
-          <p:cNvPr id="10" name="TextBox 9"/>
+          <p:cNvPr id="8" name="TextBox 7"/>
           <p:cNvSpPr txBox="1"/>
           <p:nvPr/>
         </p:nvSpPr>
@@ -8139,7 +7902,7 @@
       </p:sp>
       <p:sp>
         <p:nvSpPr>
-          <p:cNvPr id="11" name="TextBox 10"/>
+          <p:cNvPr id="9" name="TextBox 8"/>
           <p:cNvSpPr txBox="1"/>
           <p:nvPr/>
         </p:nvSpPr>
@@ -8288,86 +8051,7 @@
       </p:sp>
       <p:sp>
         <p:nvSpPr>
-          <p:cNvPr id="3" name="Rectangle 2"/>
-          <p:cNvSpPr/>
-          <p:nvPr/>
-        </p:nvSpPr>
-        <p:spPr>
-          <a:xfrm>
-            <a:off x="10378440" y="274320"/>
-            <a:ext cx="1600200" cy="502920"/>
-          </a:xfrm>
-          <a:prstGeom prst="rect">
-            <a:avLst/>
-          </a:prstGeom>
-          <a:solidFill>
-            <a:srgbClr val="C97C2F"/>
-          </a:solidFill>
-          <a:ln>
-            <a:noFill/>
-          </a:ln>
-          <a:effectLst/>
-        </p:spPr>
-        <p:style>
-          <a:lnRef idx="1">
-            <a:schemeClr val="accent1"/>
-          </a:lnRef>
-          <a:fillRef idx="3">
-            <a:schemeClr val="accent1"/>
-          </a:fillRef>
-          <a:effectRef idx="2">
-            <a:schemeClr val="accent1"/>
-          </a:effectRef>
-          <a:fontRef idx="minor">
-            <a:schemeClr val="lt1"/>
-          </a:fontRef>
-        </p:style>
-        <p:txBody>
-          <a:bodyPr rtlCol="0" anchor="ctr"/>
-          <a:lstStyle/>
-          <a:p>
-            <a:pPr algn="ctr"/>
-          </a:p>
-        </p:txBody>
-      </p:sp>
-      <p:sp>
-        <p:nvSpPr>
-          <p:cNvPr id="4" name="TextBox 3"/>
-          <p:cNvSpPr txBox="1"/>
-          <p:nvPr/>
-        </p:nvSpPr>
-        <p:spPr>
-          <a:xfrm>
-            <a:off x="10378440" y="274320"/>
-            <a:ext cx="1600200" cy="502920"/>
-          </a:xfrm>
-          <a:prstGeom prst="rect">
-            <a:avLst/>
-          </a:prstGeom>
-          <a:noFill/>
-        </p:spPr>
-        <p:txBody>
-          <a:bodyPr wrap="square" anchor="ctr">
-            <a:spAutoFit/>
-          </a:bodyPr>
-          <a:lstStyle/>
-          <a:p>
-            <a:pPr algn="ctr"/>
-            <a:r>
-              <a:rPr sz="1300" b="1">
-                <a:solidFill>
-                  <a:srgbClr val="FFFFFF"/>
-                </a:solidFill>
-                <a:latin typeface="Calibri"/>
-              </a:rPr>
-              <a:t>4 min</a:t>
-            </a:r>
-          </a:p>
-        </p:txBody>
-      </p:sp>
-      <p:sp>
-        <p:nvSpPr>
-          <p:cNvPr id="5" name="TextBox 4"/>
+          <p:cNvPr id="3" name="TextBox 2"/>
           <p:cNvSpPr txBox="1"/>
           <p:nvPr/>
         </p:nvSpPr>
@@ -8402,7 +8086,7 @@
       </p:sp>
       <p:sp>
         <p:nvSpPr>
-          <p:cNvPr id="6" name="TextBox 5"/>
+          <p:cNvPr id="4" name="TextBox 3"/>
           <p:cNvSpPr txBox="1"/>
           <p:nvPr/>
         </p:nvSpPr>
@@ -8437,7 +8121,7 @@
       </p:sp>
       <p:graphicFrame>
         <p:nvGraphicFramePr>
-          <p:cNvPr id="7" name="Table 6"/>
+          <p:cNvPr id="5" name="Table 4"/>
           <p:cNvGraphicFramePr>
             <a:graphicFrameLocks noGrp="1"/>
           </p:cNvGraphicFramePr>
@@ -9056,7 +8740,7 @@
       </p:graphicFrame>
       <p:sp>
         <p:nvSpPr>
-          <p:cNvPr id="8" name="Rectangle 7"/>
+          <p:cNvPr id="6" name="Rectangle 5"/>
           <p:cNvSpPr/>
           <p:nvPr/>
         </p:nvSpPr>
@@ -9100,7 +8784,7 @@
       </p:sp>
       <p:sp>
         <p:nvSpPr>
-          <p:cNvPr id="9" name="TextBox 8"/>
+          <p:cNvPr id="7" name="TextBox 6"/>
           <p:cNvSpPr txBox="1"/>
           <p:nvPr/>
         </p:nvSpPr>
@@ -9213,86 +8897,7 @@
       </p:sp>
       <p:sp>
         <p:nvSpPr>
-          <p:cNvPr id="3" name="Rectangle 2"/>
-          <p:cNvSpPr/>
-          <p:nvPr/>
-        </p:nvSpPr>
-        <p:spPr>
-          <a:xfrm>
-            <a:off x="10378440" y="274320"/>
-            <a:ext cx="1600200" cy="502920"/>
-          </a:xfrm>
-          <a:prstGeom prst="rect">
-            <a:avLst/>
-          </a:prstGeom>
-          <a:solidFill>
-            <a:srgbClr val="C97C2F"/>
-          </a:solidFill>
-          <a:ln>
-            <a:noFill/>
-          </a:ln>
-          <a:effectLst/>
-        </p:spPr>
-        <p:style>
-          <a:lnRef idx="1">
-            <a:schemeClr val="accent1"/>
-          </a:lnRef>
-          <a:fillRef idx="3">
-            <a:schemeClr val="accent1"/>
-          </a:fillRef>
-          <a:effectRef idx="2">
-            <a:schemeClr val="accent1"/>
-          </a:effectRef>
-          <a:fontRef idx="minor">
-            <a:schemeClr val="lt1"/>
-          </a:fontRef>
-        </p:style>
-        <p:txBody>
-          <a:bodyPr rtlCol="0" anchor="ctr"/>
-          <a:lstStyle/>
-          <a:p>
-            <a:pPr algn="ctr"/>
-          </a:p>
-        </p:txBody>
-      </p:sp>
-      <p:sp>
-        <p:nvSpPr>
-          <p:cNvPr id="4" name="TextBox 3"/>
-          <p:cNvSpPr txBox="1"/>
-          <p:nvPr/>
-        </p:nvSpPr>
-        <p:spPr>
-          <a:xfrm>
-            <a:off x="10378440" y="274320"/>
-            <a:ext cx="1600200" cy="502920"/>
-          </a:xfrm>
-          <a:prstGeom prst="rect">
-            <a:avLst/>
-          </a:prstGeom>
-          <a:noFill/>
-        </p:spPr>
-        <p:txBody>
-          <a:bodyPr wrap="square" anchor="ctr">
-            <a:spAutoFit/>
-          </a:bodyPr>
-          <a:lstStyle/>
-          <a:p>
-            <a:pPr algn="ctr"/>
-            <a:r>
-              <a:rPr sz="1300" b="1">
-                <a:solidFill>
-                  <a:srgbClr val="FFFFFF"/>
-                </a:solidFill>
-                <a:latin typeface="Calibri"/>
-              </a:rPr>
-              <a:t>3 min</a:t>
-            </a:r>
-          </a:p>
-        </p:txBody>
-      </p:sp>
-      <p:sp>
-        <p:nvSpPr>
-          <p:cNvPr id="5" name="TextBox 4"/>
+          <p:cNvPr id="3" name="TextBox 2"/>
           <p:cNvSpPr txBox="1"/>
           <p:nvPr/>
         </p:nvSpPr>
@@ -9327,7 +8932,7 @@
       </p:sp>
       <p:sp>
         <p:nvSpPr>
-          <p:cNvPr id="6" name="TextBox 5"/>
+          <p:cNvPr id="4" name="TextBox 3"/>
           <p:cNvSpPr txBox="1"/>
           <p:nvPr/>
         </p:nvSpPr>
@@ -9362,7 +8967,7 @@
       </p:sp>
       <p:pic>
         <p:nvPicPr>
-          <p:cNvPr id="7" name="Picture 6" descr="petstore_architecture.png"/>
+          <p:cNvPr id="5" name="Picture 4" descr="petstore_architecture.png"/>
           <p:cNvPicPr>
             <a:picLocks noChangeAspect="1"/>
           </p:cNvPicPr>
@@ -10881,86 +10486,7 @@
       </p:sp>
       <p:sp>
         <p:nvSpPr>
-          <p:cNvPr id="3" name="Rectangle 2"/>
-          <p:cNvSpPr/>
-          <p:nvPr/>
-        </p:nvSpPr>
-        <p:spPr>
-          <a:xfrm>
-            <a:off x="10378440" y="274320"/>
-            <a:ext cx="1600200" cy="502920"/>
-          </a:xfrm>
-          <a:prstGeom prst="rect">
-            <a:avLst/>
-          </a:prstGeom>
-          <a:solidFill>
-            <a:srgbClr val="C97C2F"/>
-          </a:solidFill>
-          <a:ln>
-            <a:noFill/>
-          </a:ln>
-          <a:effectLst/>
-        </p:spPr>
-        <p:style>
-          <a:lnRef idx="1">
-            <a:schemeClr val="accent1"/>
-          </a:lnRef>
-          <a:fillRef idx="3">
-            <a:schemeClr val="accent1"/>
-          </a:fillRef>
-          <a:effectRef idx="2">
-            <a:schemeClr val="accent1"/>
-          </a:effectRef>
-          <a:fontRef idx="minor">
-            <a:schemeClr val="lt1"/>
-          </a:fontRef>
-        </p:style>
-        <p:txBody>
-          <a:bodyPr rtlCol="0" anchor="ctr"/>
-          <a:lstStyle/>
-          <a:p>
-            <a:pPr algn="ctr"/>
-          </a:p>
-        </p:txBody>
-      </p:sp>
-      <p:sp>
-        <p:nvSpPr>
-          <p:cNvPr id="4" name="TextBox 3"/>
-          <p:cNvSpPr txBox="1"/>
-          <p:nvPr/>
-        </p:nvSpPr>
-        <p:spPr>
-          <a:xfrm>
-            <a:off x="10378440" y="274320"/>
-            <a:ext cx="1600200" cy="502920"/>
-          </a:xfrm>
-          <a:prstGeom prst="rect">
-            <a:avLst/>
-          </a:prstGeom>
-          <a:noFill/>
-        </p:spPr>
-        <p:txBody>
-          <a:bodyPr wrap="square" anchor="ctr">
-            <a:spAutoFit/>
-          </a:bodyPr>
-          <a:lstStyle/>
-          <a:p>
-            <a:pPr algn="ctr"/>
-            <a:r>
-              <a:rPr sz="1300" b="1">
-                <a:solidFill>
-                  <a:srgbClr val="FFFFFF"/>
-                </a:solidFill>
-                <a:latin typeface="Calibri"/>
-              </a:rPr>
-              <a:t>45 min</a:t>
-            </a:r>
-          </a:p>
-        </p:txBody>
-      </p:sp>
-      <p:sp>
-        <p:nvSpPr>
-          <p:cNvPr id="5" name="TextBox 4"/>
+          <p:cNvPr id="3" name="TextBox 2"/>
           <p:cNvSpPr txBox="1"/>
           <p:nvPr/>
         </p:nvSpPr>
@@ -10995,7 +10521,7 @@
       </p:sp>
       <p:sp>
         <p:nvSpPr>
-          <p:cNvPr id="6" name="TextBox 5"/>
+          <p:cNvPr id="4" name="TextBox 3"/>
           <p:cNvSpPr txBox="1"/>
           <p:nvPr/>
         </p:nvSpPr>
@@ -11030,7 +10556,7 @@
       </p:sp>
       <p:graphicFrame>
         <p:nvGraphicFramePr>
-          <p:cNvPr id="7" name="Table 6"/>
+          <p:cNvPr id="5" name="Table 4"/>
           <p:cNvGraphicFramePr>
             <a:graphicFrameLocks noGrp="1"/>
           </p:cNvGraphicFramePr>
@@ -18528,86 +18054,7 @@
       </p:sp>
       <p:sp>
         <p:nvSpPr>
-          <p:cNvPr id="3" name="Rectangle 2"/>
-          <p:cNvSpPr/>
-          <p:nvPr/>
-        </p:nvSpPr>
-        <p:spPr>
-          <a:xfrm>
-            <a:off x="10378440" y="274320"/>
-            <a:ext cx="1600200" cy="502920"/>
-          </a:xfrm>
-          <a:prstGeom prst="rect">
-            <a:avLst/>
-          </a:prstGeom>
-          <a:solidFill>
-            <a:srgbClr val="C97C2F"/>
-          </a:solidFill>
-          <a:ln>
-            <a:noFill/>
-          </a:ln>
-          <a:effectLst/>
-        </p:spPr>
-        <p:style>
-          <a:lnRef idx="1">
-            <a:schemeClr val="accent1"/>
-          </a:lnRef>
-          <a:fillRef idx="3">
-            <a:schemeClr val="accent1"/>
-          </a:fillRef>
-          <a:effectRef idx="2">
-            <a:schemeClr val="accent1"/>
-          </a:effectRef>
-          <a:fontRef idx="minor">
-            <a:schemeClr val="lt1"/>
-          </a:fontRef>
-        </p:style>
-        <p:txBody>
-          <a:bodyPr rtlCol="0" anchor="ctr"/>
-          <a:lstStyle/>
-          <a:p>
-            <a:pPr algn="ctr"/>
-          </a:p>
-        </p:txBody>
-      </p:sp>
-      <p:sp>
-        <p:nvSpPr>
-          <p:cNvPr id="4" name="TextBox 3"/>
-          <p:cNvSpPr txBox="1"/>
-          <p:nvPr/>
-        </p:nvSpPr>
-        <p:spPr>
-          <a:xfrm>
-            <a:off x="10378440" y="274320"/>
-            <a:ext cx="1600200" cy="502920"/>
-          </a:xfrm>
-          <a:prstGeom prst="rect">
-            <a:avLst/>
-          </a:prstGeom>
-          <a:noFill/>
-        </p:spPr>
-        <p:txBody>
-          <a:bodyPr wrap="square" anchor="ctr">
-            <a:spAutoFit/>
-          </a:bodyPr>
-          <a:lstStyle/>
-          <a:p>
-            <a:pPr algn="ctr"/>
-            <a:r>
-              <a:rPr sz="1300" b="1">
-                <a:solidFill>
-                  <a:srgbClr val="FFFFFF"/>
-                </a:solidFill>
-                <a:latin typeface="Calibri"/>
-              </a:rPr>
-              <a:t>2 min</a:t>
-            </a:r>
-          </a:p>
-        </p:txBody>
-      </p:sp>
-      <p:sp>
-        <p:nvSpPr>
-          <p:cNvPr id="5" name="TextBox 4"/>
+          <p:cNvPr id="3" name="TextBox 2"/>
           <p:cNvSpPr txBox="1"/>
           <p:nvPr/>
         </p:nvSpPr>
@@ -18642,7 +18089,7 @@
       </p:sp>
       <p:sp>
         <p:nvSpPr>
-          <p:cNvPr id="6" name="TextBox 5"/>
+          <p:cNvPr id="4" name="TextBox 3"/>
           <p:cNvSpPr txBox="1"/>
           <p:nvPr/>
         </p:nvSpPr>
@@ -18677,7 +18124,7 @@
       </p:sp>
       <p:sp>
         <p:nvSpPr>
-          <p:cNvPr id="7" name="TextBox 6"/>
+          <p:cNvPr id="5" name="TextBox 4"/>
           <p:cNvSpPr txBox="1"/>
           <p:nvPr/>
         </p:nvSpPr>
@@ -20985,86 +20432,7 @@
       </p:sp>
       <p:sp>
         <p:nvSpPr>
-          <p:cNvPr id="3" name="Rectangle 2"/>
-          <p:cNvSpPr/>
-          <p:nvPr/>
-        </p:nvSpPr>
-        <p:spPr>
-          <a:xfrm>
-            <a:off x="10378440" y="274320"/>
-            <a:ext cx="1600200" cy="502920"/>
-          </a:xfrm>
-          <a:prstGeom prst="rect">
-            <a:avLst/>
-          </a:prstGeom>
-          <a:solidFill>
-            <a:srgbClr val="C97C2F"/>
-          </a:solidFill>
-          <a:ln>
-            <a:noFill/>
-          </a:ln>
-          <a:effectLst/>
-        </p:spPr>
-        <p:style>
-          <a:lnRef idx="1">
-            <a:schemeClr val="accent1"/>
-          </a:lnRef>
-          <a:fillRef idx="3">
-            <a:schemeClr val="accent1"/>
-          </a:fillRef>
-          <a:effectRef idx="2">
-            <a:schemeClr val="accent1"/>
-          </a:effectRef>
-          <a:fontRef idx="minor">
-            <a:schemeClr val="lt1"/>
-          </a:fontRef>
-        </p:style>
-        <p:txBody>
-          <a:bodyPr rtlCol="0" anchor="ctr"/>
-          <a:lstStyle/>
-          <a:p>
-            <a:pPr algn="ctr"/>
-          </a:p>
-        </p:txBody>
-      </p:sp>
-      <p:sp>
-        <p:nvSpPr>
-          <p:cNvPr id="4" name="TextBox 3"/>
-          <p:cNvSpPr txBox="1"/>
-          <p:nvPr/>
-        </p:nvSpPr>
-        <p:spPr>
-          <a:xfrm>
-            <a:off x="10378440" y="274320"/>
-            <a:ext cx="1600200" cy="502920"/>
-          </a:xfrm>
-          <a:prstGeom prst="rect">
-            <a:avLst/>
-          </a:prstGeom>
-          <a:noFill/>
-        </p:spPr>
-        <p:txBody>
-          <a:bodyPr wrap="square" anchor="ctr">
-            <a:spAutoFit/>
-          </a:bodyPr>
-          <a:lstStyle/>
-          <a:p>
-            <a:pPr algn="ctr"/>
-            <a:r>
-              <a:rPr sz="1300" b="1">
-                <a:solidFill>
-                  <a:srgbClr val="FFFFFF"/>
-                </a:solidFill>
-                <a:latin typeface="Calibri"/>
-              </a:rPr>
-              <a:t>2 min</a:t>
-            </a:r>
-          </a:p>
-        </p:txBody>
-      </p:sp>
-      <p:sp>
-        <p:nvSpPr>
-          <p:cNvPr id="5" name="TextBox 4"/>
+          <p:cNvPr id="3" name="TextBox 2"/>
           <p:cNvSpPr txBox="1"/>
           <p:nvPr/>
         </p:nvSpPr>
@@ -21099,7 +20467,7 @@
       </p:sp>
       <p:sp>
         <p:nvSpPr>
-          <p:cNvPr id="6" name="TextBox 5"/>
+          <p:cNvPr id="4" name="TextBox 3"/>
           <p:cNvSpPr txBox="1"/>
           <p:nvPr/>
         </p:nvSpPr>
@@ -21134,7 +20502,7 @@
       </p:sp>
       <p:sp>
         <p:nvSpPr>
-          <p:cNvPr id="7" name="TextBox 6"/>
+          <p:cNvPr id="5" name="TextBox 4"/>
           <p:cNvSpPr txBox="1"/>
           <p:nvPr/>
         </p:nvSpPr>
@@ -21269,7 +20637,7 @@
       </p:sp>
       <p:sp>
         <p:nvSpPr>
-          <p:cNvPr id="8" name="Rectangle 7"/>
+          <p:cNvPr id="6" name="Rectangle 5"/>
           <p:cNvSpPr/>
           <p:nvPr/>
         </p:nvSpPr>
@@ -21313,7 +20681,7 @@
       </p:sp>
       <p:sp>
         <p:nvSpPr>
-          <p:cNvPr id="9" name="TextBox 8"/>
+          <p:cNvPr id="7" name="TextBox 6"/>
           <p:cNvSpPr txBox="1"/>
           <p:nvPr/>
         </p:nvSpPr>
@@ -21348,7 +20716,7 @@
       </p:sp>
       <p:sp>
         <p:nvSpPr>
-          <p:cNvPr id="10" name="TextBox 9"/>
+          <p:cNvPr id="8" name="TextBox 7"/>
           <p:cNvSpPr txBox="1"/>
           <p:nvPr/>
         </p:nvSpPr>
@@ -21497,86 +20865,7 @@
       </p:sp>
       <p:sp>
         <p:nvSpPr>
-          <p:cNvPr id="3" name="Rectangle 2"/>
-          <p:cNvSpPr/>
-          <p:nvPr/>
-        </p:nvSpPr>
-        <p:spPr>
-          <a:xfrm>
-            <a:off x="10378440" y="274320"/>
-            <a:ext cx="1600200" cy="502920"/>
-          </a:xfrm>
-          <a:prstGeom prst="rect">
-            <a:avLst/>
-          </a:prstGeom>
-          <a:solidFill>
-            <a:srgbClr val="C97C2F"/>
-          </a:solidFill>
-          <a:ln>
-            <a:noFill/>
-          </a:ln>
-          <a:effectLst/>
-        </p:spPr>
-        <p:style>
-          <a:lnRef idx="1">
-            <a:schemeClr val="accent1"/>
-          </a:lnRef>
-          <a:fillRef idx="3">
-            <a:schemeClr val="accent1"/>
-          </a:fillRef>
-          <a:effectRef idx="2">
-            <a:schemeClr val="accent1"/>
-          </a:effectRef>
-          <a:fontRef idx="minor">
-            <a:schemeClr val="lt1"/>
-          </a:fontRef>
-        </p:style>
-        <p:txBody>
-          <a:bodyPr rtlCol="0" anchor="ctr"/>
-          <a:lstStyle/>
-          <a:p>
-            <a:pPr algn="ctr"/>
-          </a:p>
-        </p:txBody>
-      </p:sp>
-      <p:sp>
-        <p:nvSpPr>
-          <p:cNvPr id="4" name="TextBox 3"/>
-          <p:cNvSpPr txBox="1"/>
-          <p:nvPr/>
-        </p:nvSpPr>
-        <p:spPr>
-          <a:xfrm>
-            <a:off x="10378440" y="274320"/>
-            <a:ext cx="1600200" cy="502920"/>
-          </a:xfrm>
-          <a:prstGeom prst="rect">
-            <a:avLst/>
-          </a:prstGeom>
-          <a:noFill/>
-        </p:spPr>
-        <p:txBody>
-          <a:bodyPr wrap="square" anchor="ctr">
-            <a:spAutoFit/>
-          </a:bodyPr>
-          <a:lstStyle/>
-          <a:p>
-            <a:pPr algn="ctr"/>
-            <a:r>
-              <a:rPr sz="1300" b="1">
-                <a:solidFill>
-                  <a:srgbClr val="FFFFFF"/>
-                </a:solidFill>
-                <a:latin typeface="Calibri"/>
-              </a:rPr>
-              <a:t>5 min</a:t>
-            </a:r>
-          </a:p>
-        </p:txBody>
-      </p:sp>
-      <p:sp>
-        <p:nvSpPr>
-          <p:cNvPr id="5" name="TextBox 4"/>
+          <p:cNvPr id="3" name="TextBox 2"/>
           <p:cNvSpPr txBox="1"/>
           <p:nvPr/>
         </p:nvSpPr>
@@ -21611,7 +20900,7 @@
       </p:sp>
       <p:sp>
         <p:nvSpPr>
-          <p:cNvPr id="6" name="TextBox 5"/>
+          <p:cNvPr id="4" name="TextBox 3"/>
           <p:cNvSpPr txBox="1"/>
           <p:nvPr/>
         </p:nvSpPr>
@@ -21646,7 +20935,7 @@
       </p:sp>
       <p:sp>
         <p:nvSpPr>
-          <p:cNvPr id="7" name="TextBox 6"/>
+          <p:cNvPr id="5" name="TextBox 4"/>
           <p:cNvSpPr txBox="1"/>
           <p:nvPr/>
         </p:nvSpPr>
@@ -21859,86 +21148,7 @@
       </p:sp>
       <p:sp>
         <p:nvSpPr>
-          <p:cNvPr id="3" name="Rectangle 2"/>
-          <p:cNvSpPr/>
-          <p:nvPr/>
-        </p:nvSpPr>
-        <p:spPr>
-          <a:xfrm>
-            <a:off x="10378440" y="274320"/>
-            <a:ext cx="1600200" cy="502920"/>
-          </a:xfrm>
-          <a:prstGeom prst="rect">
-            <a:avLst/>
-          </a:prstGeom>
-          <a:solidFill>
-            <a:srgbClr val="C97C2F"/>
-          </a:solidFill>
-          <a:ln>
-            <a:noFill/>
-          </a:ln>
-          <a:effectLst/>
-        </p:spPr>
-        <p:style>
-          <a:lnRef idx="1">
-            <a:schemeClr val="accent1"/>
-          </a:lnRef>
-          <a:fillRef idx="3">
-            <a:schemeClr val="accent1"/>
-          </a:fillRef>
-          <a:effectRef idx="2">
-            <a:schemeClr val="accent1"/>
-          </a:effectRef>
-          <a:fontRef idx="minor">
-            <a:schemeClr val="lt1"/>
-          </a:fontRef>
-        </p:style>
-        <p:txBody>
-          <a:bodyPr rtlCol="0" anchor="ctr"/>
-          <a:lstStyle/>
-          <a:p>
-            <a:pPr algn="ctr"/>
-          </a:p>
-        </p:txBody>
-      </p:sp>
-      <p:sp>
-        <p:nvSpPr>
-          <p:cNvPr id="4" name="TextBox 3"/>
-          <p:cNvSpPr txBox="1"/>
-          <p:nvPr/>
-        </p:nvSpPr>
-        <p:spPr>
-          <a:xfrm>
-            <a:off x="10378440" y="274320"/>
-            <a:ext cx="1600200" cy="502920"/>
-          </a:xfrm>
-          <a:prstGeom prst="rect">
-            <a:avLst/>
-          </a:prstGeom>
-          <a:noFill/>
-        </p:spPr>
-        <p:txBody>
-          <a:bodyPr wrap="square" anchor="ctr">
-            <a:spAutoFit/>
-          </a:bodyPr>
-          <a:lstStyle/>
-          <a:p>
-            <a:pPr algn="ctr"/>
-            <a:r>
-              <a:rPr sz="1300" b="1">
-                <a:solidFill>
-                  <a:srgbClr val="FFFFFF"/>
-                </a:solidFill>
-                <a:latin typeface="Calibri"/>
-              </a:rPr>
-              <a:t>3 min</a:t>
-            </a:r>
-          </a:p>
-        </p:txBody>
-      </p:sp>
-      <p:sp>
-        <p:nvSpPr>
-          <p:cNvPr id="5" name="TextBox 4"/>
+          <p:cNvPr id="3" name="TextBox 2"/>
           <p:cNvSpPr txBox="1"/>
           <p:nvPr/>
         </p:nvSpPr>
@@ -21973,7 +21183,7 @@
       </p:sp>
       <p:sp>
         <p:nvSpPr>
-          <p:cNvPr id="6" name="TextBox 5"/>
+          <p:cNvPr id="4" name="TextBox 3"/>
           <p:cNvSpPr txBox="1"/>
           <p:nvPr/>
         </p:nvSpPr>
@@ -22008,7 +21218,7 @@
       </p:sp>
       <p:pic>
         <p:nvPicPr>
-          <p:cNvPr id="7" name="Picture 6" descr="petstore_legacy_highlevel.png"/>
+          <p:cNvPr id="5" name="Picture 4" descr="petstore_legacy_highlevel.png"/>
           <p:cNvPicPr>
             <a:picLocks noChangeAspect="1"/>
           </p:cNvPicPr>

--- a/docs/PetStore_Demo_45min.pptx
+++ b/docs/PetStore_Demo_45min.pptx
@@ -3326,7 +3326,7 @@
                 </a:solidFill>
                 <a:latin typeface="Calibri"/>
               </a:rPr>
-              <a:t>45-minute session · ~30 min narrative + ~10 min live code + ~5 min Q&amp;A</a:t>
+              <a:t>Narrative walkthrough · live code · Q&amp;A</a:t>
             </a:r>
           </a:p>
         </p:txBody>
@@ -10549,7 +10549,7 @@
                 </a:solidFill>
                 <a:latin typeface="Calibri"/>
               </a:rPr>
-              <a:t>How the 45 minutes are spent</a:t>
+              <a:t>What we'll walk through</a:t>
             </a:r>
           </a:p>
         </p:txBody>
@@ -10574,8 +10574,7 @@
               </a:tblPr>
               <a:tblGrid>
                 <a:gridCol w="731520"/>
-                <a:gridCol w="8686800"/>
-                <a:gridCol w="1828800"/>
+                <a:gridCol w="10515600"/>
               </a:tblGrid>
               <a:tr h="379827">
                 <a:tc>
@@ -10617,30 +10616,6 @@
                       </a:pPr>
                       <a:r>
                         <a:t>Section</a:t>
-                      </a:r>
-                    </a:p>
-                  </a:txBody>
-                  <a:tcPr anchor="ctr" marT="25400" marB="25400" marL="63500" marR="63500">
-                    <a:solidFill>
-                      <a:srgbClr val="1F3355"/>
-                    </a:solidFill>
-                  </a:tcPr>
-                </a:tc>
-                <a:tc>
-                  <a:txBody>
-                    <a:bodyPr/>
-                    <a:lstStyle/>
-                    <a:p>
-                      <a:pPr>
-                        <a:defRPr sz="1300" b="1">
-                          <a:solidFill>
-                            <a:srgbClr val="FFFFFF"/>
-                          </a:solidFill>
-                          <a:latin typeface="Calibri"/>
-                        </a:defRPr>
-                      </a:pPr>
-                      <a:r>
-                        <a:t>Time</a:t>
                       </a:r>
                     </a:p>
                   </a:txBody>
@@ -10700,30 +10675,6 @@
                     </a:solidFill>
                   </a:tcPr>
                 </a:tc>
-                <a:tc>
-                  <a:txBody>
-                    <a:bodyPr/>
-                    <a:lstStyle/>
-                    <a:p>
-                      <a:pPr>
-                        <a:defRPr sz="1300">
-                          <a:solidFill>
-                            <a:srgbClr val="1F3355"/>
-                          </a:solidFill>
-                          <a:latin typeface="Calibri"/>
-                        </a:defRPr>
-                      </a:pPr>
-                      <a:r>
-                        <a:t>2 min</a:t>
-                      </a:r>
-                    </a:p>
-                  </a:txBody>
-                  <a:tcPr anchor="ctr" marT="25400" marB="25400" marL="63500" marR="63500">
-                    <a:solidFill>
-                      <a:srgbClr val="FFFFFF"/>
-                    </a:solidFill>
-                  </a:tcPr>
-                </a:tc>
               </a:tr>
               <a:tr h="379827">
                 <a:tc>
@@ -10765,30 +10716,6 @@
                       </a:pPr>
                       <a:r>
                         <a:t>Legacy architecture — the starting point</a:t>
-                      </a:r>
-                    </a:p>
-                  </a:txBody>
-                  <a:tcPr anchor="ctr" marT="25400" marB="25400" marL="63500" marR="63500">
-                    <a:solidFill>
-                      <a:srgbClr val="F2F4F7"/>
-                    </a:solidFill>
-                  </a:tcPr>
-                </a:tc>
-                <a:tc>
-                  <a:txBody>
-                    <a:bodyPr/>
-                    <a:lstStyle/>
-                    <a:p>
-                      <a:pPr>
-                        <a:defRPr sz="1300">
-                          <a:solidFill>
-                            <a:srgbClr val="1F3355"/>
-                          </a:solidFill>
-                          <a:latin typeface="Calibri"/>
-                        </a:defRPr>
-                      </a:pPr>
-                      <a:r>
-                        <a:t>3 min</a:t>
                       </a:r>
                     </a:p>
                   </a:txBody>
@@ -10848,30 +10775,6 @@
                     </a:solidFill>
                   </a:tcPr>
                 </a:tc>
-                <a:tc>
-                  <a:txBody>
-                    <a:bodyPr/>
-                    <a:lstStyle/>
-                    <a:p>
-                      <a:pPr>
-                        <a:defRPr sz="1300">
-                          <a:solidFill>
-                            <a:srgbClr val="1F3355"/>
-                          </a:solidFill>
-                          <a:latin typeface="Calibri"/>
-                        </a:defRPr>
-                      </a:pPr>
-                      <a:r>
-                        <a:t>8 min</a:t>
-                      </a:r>
-                    </a:p>
-                  </a:txBody>
-                  <a:tcPr anchor="ctr" marT="25400" marB="25400" marL="63500" marR="63500">
-                    <a:solidFill>
-                      <a:srgbClr val="FFFFFF"/>
-                    </a:solidFill>
-                  </a:tcPr>
-                </a:tc>
               </a:tr>
               <a:tr h="379827">
                 <a:tc>
@@ -10913,30 +10816,6 @@
                       </a:pPr>
                       <a:r>
                         <a:t>Migration strategy &amp; principles</a:t>
-                      </a:r>
-                    </a:p>
-                  </a:txBody>
-                  <a:tcPr anchor="ctr" marT="25400" marB="25400" marL="63500" marR="63500">
-                    <a:solidFill>
-                      <a:srgbClr val="F2F4F7"/>
-                    </a:solidFill>
-                  </a:tcPr>
-                </a:tc>
-                <a:tc>
-                  <a:txBody>
-                    <a:bodyPr/>
-                    <a:lstStyle/>
-                    <a:p>
-                      <a:pPr>
-                        <a:defRPr sz="1300">
-                          <a:solidFill>
-                            <a:srgbClr val="1F3355"/>
-                          </a:solidFill>
-                          <a:latin typeface="Calibri"/>
-                        </a:defRPr>
-                      </a:pPr>
-                      <a:r>
-                        <a:t>3 min</a:t>
                       </a:r>
                     </a:p>
                   </a:txBody>
@@ -10996,30 +10875,6 @@
                     </a:solidFill>
                   </a:tcPr>
                 </a:tc>
-                <a:tc>
-                  <a:txBody>
-                    <a:bodyPr/>
-                    <a:lstStyle/>
-                    <a:p>
-                      <a:pPr>
-                        <a:defRPr sz="1300">
-                          <a:solidFill>
-                            <a:srgbClr val="1F3355"/>
-                          </a:solidFill>
-                          <a:latin typeface="Calibri"/>
-                        </a:defRPr>
-                      </a:pPr>
-                      <a:r>
-                        <a:t>5 min</a:t>
-                      </a:r>
-                    </a:p>
-                  </a:txBody>
-                  <a:tcPr anchor="ctr" marT="25400" marB="25400" marL="63500" marR="63500">
-                    <a:solidFill>
-                      <a:srgbClr val="FFFFFF"/>
-                    </a:solidFill>
-                  </a:tcPr>
-                </a:tc>
               </a:tr>
               <a:tr h="379827">
                 <a:tc>
@@ -11061,30 +10916,6 @@
                       </a:pPr>
                       <a:r>
                         <a:t>JMS message migration — XML → JSON (Anti-Corruption Layer)</a:t>
-                      </a:r>
-                    </a:p>
-                  </a:txBody>
-                  <a:tcPr anchor="ctr" marT="25400" marB="25400" marL="63500" marR="63500">
-                    <a:solidFill>
-                      <a:srgbClr val="F2F4F7"/>
-                    </a:solidFill>
-                  </a:tcPr>
-                </a:tc>
-                <a:tc>
-                  <a:txBody>
-                    <a:bodyPr/>
-                    <a:lstStyle/>
-                    <a:p>
-                      <a:pPr>
-                        <a:defRPr sz="1300">
-                          <a:solidFill>
-                            <a:srgbClr val="1F3355"/>
-                          </a:solidFill>
-                          <a:latin typeface="Calibri"/>
-                        </a:defRPr>
-                      </a:pPr>
-                      <a:r>
-                        <a:t>4 min</a:t>
                       </a:r>
                     </a:p>
                   </a:txBody>
@@ -11144,30 +10975,6 @@
                     </a:solidFill>
                   </a:tcPr>
                 </a:tc>
-                <a:tc>
-                  <a:txBody>
-                    <a:bodyPr/>
-                    <a:lstStyle/>
-                    <a:p>
-                      <a:pPr>
-                        <a:defRPr sz="1300">
-                          <a:solidFill>
-                            <a:srgbClr val="1F3355"/>
-                          </a:solidFill>
-                          <a:latin typeface="Calibri"/>
-                        </a:defRPr>
-                      </a:pPr>
-                      <a:r>
-                        <a:t>4 min</a:t>
-                      </a:r>
-                    </a:p>
-                  </a:txBody>
-                  <a:tcPr anchor="ctr" marT="25400" marB="25400" marL="63500" marR="63500">
-                    <a:solidFill>
-                      <a:srgbClr val="FFFFFF"/>
-                    </a:solidFill>
-                  </a:tcPr>
-                </a:tc>
               </a:tr>
               <a:tr h="379827">
                 <a:tc>
@@ -11209,30 +11016,6 @@
                       </a:pPr>
                       <a:r>
                         <a:t>Target as-built architecture</a:t>
-                      </a:r>
-                    </a:p>
-                  </a:txBody>
-                  <a:tcPr anchor="ctr" marT="25400" marB="25400" marL="63500" marR="63500">
-                    <a:solidFill>
-                      <a:srgbClr val="F2F4F7"/>
-                    </a:solidFill>
-                  </a:tcPr>
-                </a:tc>
-                <a:tc>
-                  <a:txBody>
-                    <a:bodyPr/>
-                    <a:lstStyle/>
-                    <a:p>
-                      <a:pPr>
-                        <a:defRPr sz="1300">
-                          <a:solidFill>
-                            <a:srgbClr val="1F3355"/>
-                          </a:solidFill>
-                          <a:latin typeface="Calibri"/>
-                        </a:defRPr>
-                      </a:pPr>
-                      <a:r>
-                        <a:t>3 min</a:t>
                       </a:r>
                     </a:p>
                   </a:txBody>
@@ -11292,30 +11075,6 @@
                     </a:solidFill>
                   </a:tcPr>
                 </a:tc>
-                <a:tc>
-                  <a:txBody>
-                    <a:bodyPr/>
-                    <a:lstStyle/>
-                    <a:p>
-                      <a:pPr>
-                        <a:defRPr sz="1300">
-                          <a:solidFill>
-                            <a:srgbClr val="1F3355"/>
-                          </a:solidFill>
-                          <a:latin typeface="Calibri"/>
-                        </a:defRPr>
-                      </a:pPr>
-                      <a:r>
-                        <a:t>8 min</a:t>
-                      </a:r>
-                    </a:p>
-                  </a:txBody>
-                  <a:tcPr anchor="ctr" marT="25400" marB="25400" marL="63500" marR="63500">
-                    <a:solidFill>
-                      <a:srgbClr val="FFFFFF"/>
-                    </a:solidFill>
-                  </a:tcPr>
-                </a:tc>
               </a:tr>
               <a:tr h="379827">
                 <a:tc>
@@ -11357,30 +11116,6 @@
                       </a:pPr>
                       <a:r>
                         <a:t>CODE WALKTHROUGH (live)</a:t>
-                      </a:r>
-                    </a:p>
-                  </a:txBody>
-                  <a:tcPr anchor="ctr" marT="25400" marB="25400" marL="63500" marR="63500">
-                    <a:solidFill>
-                      <a:srgbClr val="F2F4F7"/>
-                    </a:solidFill>
-                  </a:tcPr>
-                </a:tc>
-                <a:tc>
-                  <a:txBody>
-                    <a:bodyPr/>
-                    <a:lstStyle/>
-                    <a:p>
-                      <a:pPr>
-                        <a:defRPr sz="1300">
-                          <a:solidFill>
-                            <a:srgbClr val="1F3355"/>
-                          </a:solidFill>
-                          <a:latin typeface="Calibri"/>
-                        </a:defRPr>
-                      </a:pPr>
-                      <a:r>
-                        <a:t>10 min</a:t>
                       </a:r>
                     </a:p>
                   </a:txBody>
@@ -11440,30 +11175,6 @@
                     </a:solidFill>
                   </a:tcPr>
                 </a:tc>
-                <a:tc>
-                  <a:txBody>
-                    <a:bodyPr/>
-                    <a:lstStyle/>
-                    <a:p>
-                      <a:pPr>
-                        <a:defRPr sz="1300">
-                          <a:solidFill>
-                            <a:srgbClr val="1F3355"/>
-                          </a:solidFill>
-                          <a:latin typeface="Calibri"/>
-                        </a:defRPr>
-                      </a:pPr>
-                      <a:r>
-                        <a:t>2 min</a:t>
-                      </a:r>
-                    </a:p>
-                  </a:txBody>
-                  <a:tcPr anchor="ctr" marT="25400" marB="25400" marL="63500" marR="63500">
-                    <a:solidFill>
-                      <a:srgbClr val="FFFFFF"/>
-                    </a:solidFill>
-                  </a:tcPr>
-                </a:tc>
               </a:tr>
               <a:tr h="379836">
                 <a:tc>
@@ -11505,30 +11216,6 @@
                       </a:pPr>
                       <a:r>
                         <a:t>Wrap-up &amp; Q&amp;A</a:t>
-                      </a:r>
-                    </a:p>
-                  </a:txBody>
-                  <a:tcPr anchor="ctr" marT="25400" marB="25400" marL="63500" marR="63500">
-                    <a:solidFill>
-                      <a:srgbClr val="F2F4F7"/>
-                    </a:solidFill>
-                  </a:tcPr>
-                </a:tc>
-                <a:tc>
-                  <a:txBody>
-                    <a:bodyPr/>
-                    <a:lstStyle/>
-                    <a:p>
-                      <a:pPr>
-                        <a:defRPr sz="1300">
-                          <a:solidFill>
-                            <a:srgbClr val="1F3355"/>
-                          </a:solidFill>
-                          <a:latin typeface="Calibri"/>
-                        </a:defRPr>
-                      </a:pPr>
-                      <a:r>
-                        <a:t>5 min</a:t>
                       </a:r>
                     </a:p>
                   </a:txBody>

--- a/docs/PetStore_Demo_45min.pptx
+++ b/docs/PetStore_Demo_45min.pptx
@@ -13593,7 +13593,7 @@
                 </a:solidFill>
                 <a:latin typeface="Calibri"/>
               </a:rPr>
-              <a:t>Enhancement 5 — Optimistic locking on order status</a:t>
+              <a:t>Enhancement 5 — Optimistic lock + lifecycle guard on order status</a:t>
             </a:r>
           </a:p>
         </p:txBody>
@@ -13628,7 +13628,7 @@
                 </a:solidFill>
                 <a:latin typeface="Calibri"/>
               </a:rPr>
-              <a:t>Concurrent approve + deny can no longer both win</a:t>
+              <a:t>Concurrent approve+deny can't both win — and a done order can't be reversed</a:t>
             </a:r>
           </a:p>
         </p:txBody>
@@ -13718,7 +13718,23 @@
                 </a:solidFill>
                 <a:latin typeface="Calibri"/>
               </a:rPr>
-              <a:t>•  A lost update could leave the order in an inconsistent state, or fire both an approval AND a denial event.</a:t>
+              <a:t>•  A lost update could leave the order inconsistent, or fire both an approval AND a denial event.</a:t>
+            </a:r>
+          </a:p>
+          <a:p>
+            <a:pPr>
+              <a:spcAft>
+                <a:spcPts val="500"/>
+              </a:spcAft>
+            </a:pPr>
+            <a:r>
+              <a:rPr sz="1300" b="0">
+                <a:solidFill>
+                  <a:srgbClr val="B23A48"/>
+                </a:solidFill>
+                <a:latin typeface="Calibri"/>
+              </a:rPr>
+              <a:t>•  Direction was unguarded at the store: a stray writer could reverse a terminal order (COMPLETED → APPROVED).</a:t>
             </a:r>
           </a:p>
         </p:txBody>
@@ -13792,7 +13808,7 @@
                 </a:solidFill>
                 <a:latin typeface="Calibri"/>
               </a:rPr>
-              <a:t>•  A clean, race-free order lifecycle without holding a DB lock across the whole request.</a:t>
+              <a:t>•  A clean, race-free, one-directional order lifecycle without holding a DB lock across the request.</a:t>
             </a:r>
           </a:p>
           <a:p>
@@ -13808,7 +13824,7 @@
                 </a:solidFill>
                 <a:latin typeface="Calibri"/>
               </a:rPr>
-              <a:t>•  Cheap: one integer column + a mapped exception.</a:t>
+              <a:t>•  Cheap: one integer column, a mapped exception, and a guard no future caller can bypass.</a:t>
             </a:r>
           </a:p>
         </p:txBody>
@@ -13926,7 +13942,7 @@
                 </a:solidFill>
                 <a:latin typeface="Calibri"/>
               </a:rPr>
-              <a:t>•  A @Version column on the order: the first writer commits, the second hits a stale version.</a:t>
+              <a:t>•  Concurrency: a @Version column — first writer commits, the second hits a stale version → OptimisticLockingFailureException → HTTP 409.</a:t>
             </a:r>
           </a:p>
           <a:p>
@@ -13936,13 +13952,29 @@
               </a:spcAft>
             </a:pPr>
             <a:r>
+              <a:rPr sz="1300" b="1">
+                <a:solidFill>
+                  <a:srgbClr val="1F3355"/>
+                </a:solidFill>
+                <a:latin typeface="Calibri"/>
+              </a:rPr>
+              <a:t>•  Direction: the PENDING→APPROVED→COMPLETED (and →DENIED) lifecycle is enforced INSIDE the store's updateStatus — the chokepoint every writer passes through, not just the call sites.</a:t>
+            </a:r>
+          </a:p>
+          <a:p>
+            <a:pPr>
+              <a:spcAft>
+                <a:spcPts val="600"/>
+              </a:spcAft>
+            </a:pPr>
+            <a:r>
               <a:rPr sz="1300" b="0">
                 <a:solidFill>
                   <a:srgbClr val="1F3355"/>
                 </a:solidFill>
                 <a:latin typeface="Calibri"/>
               </a:rPr>
-              <a:t>•  The stale write throws OptimisticLockingFailureException → mapped to HTTP 409 Conflict.</a:t>
+              <a:t>•  An illegal move (e.g. COMPLETED→APPROVED, or skipping APPROVED) → 409; a same-status write is an idempotent no-op (JMS-redelivery safe).</a:t>
             </a:r>
           </a:p>
           <a:p>
@@ -13954,11 +13986,11 @@
             <a:r>
               <a:rPr sz="1300" b="0">
                 <a:solidFill>
-                  <a:srgbClr val="1F3355"/>
-                </a:solidFill>
-                <a:latin typeface="Calibri"/>
-              </a:rPr>
-              <a:t>•  Preserved on MongoDB too (Spring Data version-guarded conditional update).</a:t>
+                  <a:srgbClr val="2F8F46"/>
+                </a:solidFill>
+                <a:latin typeface="Calibri"/>
+              </a:rPr>
+              <a:t>•  On MongoDB, @Version is STILL required: updateStatus is a read-modify-write across two round trips, so single-document atomicity alone does not stop the lost update.</a:t>
             </a:r>
           </a:p>
         </p:txBody>
@@ -13993,7 +14025,7 @@
                 </a:solidFill>
                 <a:latin typeface="Consolas"/>
               </a:rPr>
-              <a:t>order-processing-service/.../repository/jpa/WarehouseOrderEntity.java (@Version)</a:t>
+              <a:t>opc/.../repository/OrderStore.java (updateStatus guard) · jpa+mongo OrderStore · WarehouseOrderEntity (@Version)</a:t>
             </a:r>
           </a:p>
         </p:txBody>
